--- a/deck/journey/Journey_Animation.pptx
+++ b/deck/journey/Journey_Animation.pptx
@@ -508,7 +508,7 @@
 A UM nurse picks it up. She reads all fourteen pages, hunting for four facts, and checks each one against policy.
 Then there are three ways out.
 Path one: everything is there, and she approves.
-Path two: a fact is missing. She pends the case. The provider has to work out what is missing and resend, and the case starts again from zero. A pend does not stop the clock.
+Path two: a fact is missing. She pends the case and it goes back to the provider. They have to work out what is missing, find it, and resend. The packet goes through the fax all over again, and the case starts again from zero. A pend does not stop the clock.
 Path three: the facts are there but the case is borderline. It goes to a medical director, the only role that can deny. A denial can be appealed, and many are overturned.
 Close on this: every step is somebody doing their job correctly. The delay is built into the process.</a:t>
             </a:r>
@@ -1057,8 +1057,8 @@
         </p:nvSpPr>
         <p:spPr>
           <a:xfrm>
-            <a:off x="640080" y="1389888"/>
-            <a:ext cx="3657600" cy="502920"/>
+            <a:off x="777240" y="1389888"/>
+            <a:ext cx="3566160" cy="502920"/>
           </a:xfrm>
           <a:prstGeom prst="rect">
             <a:avLst/>
@@ -1113,7 +1113,7 @@
         </p:nvSpPr>
         <p:spPr>
           <a:xfrm>
-            <a:off x="5257800" y="1389888"/>
+            <a:off x="5303520" y="1389888"/>
             <a:ext cx="5943600" cy="502920"/>
           </a:xfrm>
           <a:prstGeom prst="rect">
@@ -1208,8 +1208,8 @@
         </p:nvSpPr>
         <p:spPr>
           <a:xfrm>
-            <a:off x="685800" y="2011680"/>
-            <a:ext cx="3611880" cy="868680"/>
+            <a:off x="777240" y="2011680"/>
+            <a:ext cx="3520440" cy="868680"/>
           </a:xfrm>
           <a:prstGeom prst="roundRect">
             <a:avLst>
@@ -1226,7 +1226,7 @@
           </a:ln>
         </p:spPr>
         <p:txBody>
-          <a:bodyPr wrap="square" lIns="54864" tIns="128016" rIns="1188720" bIns="54864" rtlCol="0" anchor="ctr"/>
+          <a:bodyPr wrap="square" lIns="54864" tIns="914400" rIns="109728" bIns="54864" rtlCol="0" anchor="ctr"/>
           <a:lstStyle/>
           <a:p>
             <a:pPr algn="l" indent="0" marL="0">
@@ -1258,26 +1258,50 @@
                 <a:ea typeface="Calibri" pitchFamily="34" charset="-122"/>
                 <a:cs typeface="Calibri" pitchFamily="34" charset="-120"/>
               </a:rPr>
-              <a:t>Orders the fusion. Staff assemble the packet.</a:t>
+              <a:t>Staff assemble the packet.</a:t>
             </a:r>
             <a:endParaRPr lang="en-US" sz="1400" dirty="0"/>
           </a:p>
         </p:txBody>
       </p:sp>
+      <p:pic>
+        <p:nvPicPr>
+          <p:cNvPr id="10" name="AvL1" descr="preencoded.png">    </p:cNvPr>
+          <p:cNvPicPr>
+            <a:picLocks noChangeAspect="1"/>
+          </p:cNvPicPr>
+          <p:nvPr/>
+        </p:nvPicPr>
+        <p:blipFill>
+          <a:blip r:embed="rId1"/>
+          <a:stretch>
+            <a:fillRect/>
+          </a:stretch>
+        </p:blipFill>
+        <p:spPr>
+          <a:xfrm>
+            <a:off x="886968" y="2121408"/>
+            <a:ext cx="649224" cy="649224"/>
+          </a:xfrm>
+          <a:prstGeom prst="rect">
+            <a:avLst/>
+          </a:prstGeom>
+        </p:spPr>
+      </p:pic>
       <p:sp>
         <p:nvSpPr>
-          <p:cNvPr id="10" name="P1"/>
+          <p:cNvPr id="11" name="P1"/>
           <p:cNvSpPr/>
           <p:nvPr/>
         </p:nvSpPr>
         <p:spPr>
           <a:xfrm>
-            <a:off x="3310128" y="2267712"/>
-            <a:ext cx="868680" cy="365760"/>
+            <a:off x="3246120" y="2715768"/>
+            <a:ext cx="868680" cy="329184"/>
           </a:xfrm>
           <a:prstGeom prst="roundRect">
             <a:avLst>
-              <a:gd name="adj" fmla="val 15000"/>
+              <a:gd name="adj" fmla="val 16667"/>
             </a:avLst>
           </a:prstGeom>
           <a:solidFill>
@@ -1313,14 +1337,61 @@
       </p:sp>
       <p:sp>
         <p:nvSpPr>
-          <p:cNvPr id="11" name="Member"/>
+          <p:cNvPr id="12" name="P1b"/>
           <p:cNvSpPr/>
           <p:nvPr/>
         </p:nvSpPr>
         <p:spPr>
           <a:xfrm>
-            <a:off x="685800" y="3154680"/>
-            <a:ext cx="3611880" cy="868680"/>
+            <a:off x="3246120" y="2715768"/>
+            <a:ext cx="868680" cy="329184"/>
+          </a:xfrm>
+          <a:prstGeom prst="roundRect">
+            <a:avLst>
+              <a:gd name="adj" fmla="val 16667"/>
+            </a:avLst>
+          </a:prstGeom>
+          <a:solidFill>
+            <a:srgbClr val="FFFFFF"/>
+          </a:solidFill>
+          <a:ln w="19050">
+            <a:solidFill>
+              <a:srgbClr val="B8452F"/>
+            </a:solidFill>
+          </a:ln>
+        </p:spPr>
+        <p:txBody>
+          <a:bodyPr wrap="square" lIns="0" tIns="0" rIns="0" bIns="0" rtlCol="0" anchor="ctr"/>
+          <a:lstStyle/>
+          <a:p>
+            <a:pPr algn="ctr" indent="0" marL="0">
+              <a:buNone/>
+            </a:pPr>
+            <a:r>
+              <a:rPr lang="en-US" sz="1100" b="1" dirty="0">
+                <a:solidFill>
+                  <a:srgbClr val="B8452F"/>
+                </a:solidFill>
+                <a:latin typeface="Calibri" pitchFamily="34" charset="0"/>
+                <a:ea typeface="Calibri" pitchFamily="34" charset="-122"/>
+                <a:cs typeface="Calibri" pitchFamily="34" charset="-120"/>
+              </a:rPr>
+              <a:t>14 pages</a:t>
+            </a:r>
+            <a:endParaRPr lang="en-US" sz="1100" dirty="0"/>
+          </a:p>
+        </p:txBody>
+      </p:sp>
+      <p:sp>
+        <p:nvSpPr>
+          <p:cNvPr id="13" name="Member"/>
+          <p:cNvSpPr/>
+          <p:nvPr/>
+        </p:nvSpPr>
+        <p:spPr>
+          <a:xfrm>
+            <a:off x="777240" y="3154680"/>
+            <a:ext cx="3520440" cy="868680"/>
           </a:xfrm>
           <a:prstGeom prst="roundRect">
             <a:avLst>
@@ -1337,7 +1408,7 @@
           </a:ln>
         </p:spPr>
         <p:txBody>
-          <a:bodyPr wrap="square" lIns="54864" tIns="128016" rIns="109728" bIns="54864" rtlCol="0" anchor="ctr"/>
+          <a:bodyPr wrap="square" lIns="54864" tIns="914400" rIns="109728" bIns="54864" rtlCol="0" anchor="ctr"/>
           <a:lstStyle/>
           <a:p>
             <a:pPr algn="l" indent="0" marL="0">
@@ -1375,16 +1446,40 @@
           </a:p>
         </p:txBody>
       </p:sp>
+      <p:pic>
+        <p:nvPicPr>
+          <p:cNvPr id="14" name="AvM" descr="preencoded.png">    </p:cNvPr>
+          <p:cNvPicPr>
+            <a:picLocks noChangeAspect="1"/>
+          </p:cNvPicPr>
+          <p:nvPr/>
+        </p:nvPicPr>
+        <p:blipFill>
+          <a:blip r:embed="rId2"/>
+          <a:stretch>
+            <a:fillRect/>
+          </a:stretch>
+        </p:blipFill>
+        <p:spPr>
+          <a:xfrm>
+            <a:off x="886968" y="3264408"/>
+            <a:ext cx="649224" cy="649224"/>
+          </a:xfrm>
+          <a:prstGeom prst="rect">
+            <a:avLst/>
+          </a:prstGeom>
+        </p:spPr>
+      </p:pic>
       <p:sp>
         <p:nvSpPr>
-          <p:cNvPr id="12" name="L3"/>
+          <p:cNvPr id="15" name="L3"/>
           <p:cNvSpPr/>
           <p:nvPr/>
         </p:nvSpPr>
         <p:spPr>
           <a:xfrm>
-            <a:off x="685800" y="4343400"/>
-            <a:ext cx="3611880" cy="640080"/>
+            <a:off x="777240" y="4343400"/>
+            <a:ext cx="3520440" cy="640080"/>
           </a:xfrm>
           <a:prstGeom prst="roundRect">
             <a:avLst>
@@ -1401,7 +1496,7 @@
           </a:ln>
         </p:spPr>
         <p:txBody>
-          <a:bodyPr wrap="square" lIns="54864" tIns="128016" rIns="1188720" bIns="54864" rtlCol="0" anchor="ctr"/>
+          <a:bodyPr wrap="square" lIns="36576" tIns="777240" rIns="109728" bIns="36576" rtlCol="0" anchor="ctr"/>
           <a:lstStyle/>
           <a:p>
             <a:pPr algn="l" indent="0" marL="0">
@@ -1433,26 +1528,50 @@
                 <a:ea typeface="Calibri" pitchFamily="34" charset="-122"/>
                 <a:cs typeface="Calibri" pitchFamily="34" charset="-120"/>
               </a:rPr>
-              <a:t>Works out what is missing, then resends.</a:t>
+              <a:t>Works out what is missing.</a:t>
             </a:r>
             <a:endParaRPr lang="en-US" sz="1300" dirty="0"/>
           </a:p>
         </p:txBody>
       </p:sp>
+      <p:pic>
+        <p:nvPicPr>
+          <p:cNvPr id="16" name="AvL3" descr="preencoded.png">    </p:cNvPr>
+          <p:cNvPicPr>
+            <a:picLocks noChangeAspect="1"/>
+          </p:cNvPicPr>
+          <p:nvPr/>
+        </p:nvPicPr>
+        <p:blipFill>
+          <a:blip r:embed="rId3"/>
+          <a:stretch>
+            <a:fillRect/>
+          </a:stretch>
+        </p:blipFill>
+        <p:spPr>
+          <a:xfrm>
+            <a:off x="868680" y="4416552"/>
+            <a:ext cx="493776" cy="493776"/>
+          </a:xfrm>
+          <a:prstGeom prst="rect">
+            <a:avLst/>
+          </a:prstGeom>
+        </p:spPr>
+      </p:pic>
       <p:sp>
         <p:nvSpPr>
-          <p:cNvPr id="13" name="PL3"/>
+          <p:cNvPr id="17" name="PL3"/>
           <p:cNvSpPr/>
           <p:nvPr/>
         </p:nvSpPr>
         <p:spPr>
           <a:xfrm>
-            <a:off x="3310128" y="4480560"/>
-            <a:ext cx="868680" cy="365760"/>
+            <a:off x="3246120" y="4818888"/>
+            <a:ext cx="868680" cy="329184"/>
           </a:xfrm>
           <a:prstGeom prst="roundRect">
             <a:avLst>
-              <a:gd name="adj" fmla="val 15000"/>
+              <a:gd name="adj" fmla="val 16667"/>
             </a:avLst>
           </a:prstGeom>
           <a:solidFill>
@@ -1488,18 +1607,18 @@
       </p:sp>
       <p:sp>
         <p:nvSpPr>
-          <p:cNvPr id="14" name="T3"/>
+          <p:cNvPr id="18" name="T3"/>
           <p:cNvSpPr/>
           <p:nvPr/>
         </p:nvSpPr>
         <p:spPr>
           <a:xfrm>
-            <a:off x="685800" y="5102352"/>
-            <a:ext cx="3611880" cy="548640"/>
+            <a:off x="777240" y="5193792"/>
+            <a:ext cx="3520440" cy="502920"/>
           </a:xfrm>
           <a:prstGeom prst="roundRect">
             <a:avLst>
-              <a:gd name="adj" fmla="val 13333"/>
+              <a:gd name="adj" fmla="val 14545"/>
             </a:avLst>
           </a:prstGeom>
           <a:solidFill>
@@ -1527,7 +1646,7 @@
                 <a:ea typeface="Calibri" pitchFamily="34" charset="-122"/>
                 <a:cs typeface="Calibri" pitchFamily="34" charset="-120"/>
               </a:rPr>
-              <a:t>A pend does not stop the clock. The case starts again from zero.</a:t>
+              <a:t>A pend does not stop the clock.</a:t>
             </a:r>
             <a:endParaRPr lang="en-US" sz="1200" dirty="0"/>
           </a:p>
@@ -1535,7 +1654,7 @@
       </p:sp>
       <p:sp>
         <p:nvSpPr>
-          <p:cNvPr id="15" name="Intake"/>
+          <p:cNvPr id="19" name="Intake"/>
           <p:cNvSpPr/>
           <p:nvPr/>
         </p:nvSpPr>
@@ -1559,7 +1678,7 @@
           </a:ln>
         </p:spPr>
         <p:txBody>
-          <a:bodyPr wrap="square" lIns="54864" tIns="128016" rIns="1188720" bIns="54864" rtlCol="0" anchor="ctr"/>
+          <a:bodyPr wrap="square" lIns="54864" tIns="914400" rIns="109728" bIns="54864" rtlCol="0" anchor="ctr"/>
           <a:lstStyle/>
           <a:p>
             <a:pPr algn="l" indent="0" marL="0">
@@ -1597,20 +1716,44 @@
           </a:p>
         </p:txBody>
       </p:sp>
+      <p:pic>
+        <p:nvPicPr>
+          <p:cNvPr id="20" name="AvIntake" descr="preencoded.png">    </p:cNvPr>
+          <p:cNvPicPr>
+            <a:picLocks noChangeAspect="1"/>
+          </p:cNvPicPr>
+          <p:nvPr/>
+        </p:nvPicPr>
+        <p:blipFill>
+          <a:blip r:embed="rId4"/>
+          <a:stretch>
+            <a:fillRect/>
+          </a:stretch>
+        </p:blipFill>
+        <p:spPr>
+          <a:xfrm>
+            <a:off x="5413248" y="2121408"/>
+            <a:ext cx="649224" cy="649224"/>
+          </a:xfrm>
+          <a:prstGeom prst="rect">
+            <a:avLst/>
+          </a:prstGeom>
+        </p:spPr>
+      </p:pic>
       <p:sp>
         <p:nvSpPr>
-          <p:cNvPr id="16" name="P2"/>
+          <p:cNvPr id="21" name="P2"/>
           <p:cNvSpPr/>
           <p:nvPr/>
         </p:nvSpPr>
         <p:spPr>
           <a:xfrm>
-            <a:off x="7516368" y="2267712"/>
-            <a:ext cx="868680" cy="365760"/>
+            <a:off x="7589520" y="2715768"/>
+            <a:ext cx="868680" cy="329184"/>
           </a:xfrm>
           <a:prstGeom prst="roundRect">
             <a:avLst>
-              <a:gd name="adj" fmla="val 15000"/>
+              <a:gd name="adj" fmla="val 16667"/>
             </a:avLst>
           </a:prstGeom>
           <a:solidFill>
@@ -1646,7 +1789,54 @@
       </p:sp>
       <p:sp>
         <p:nvSpPr>
-          <p:cNvPr id="17" name="T1"/>
+          <p:cNvPr id="22" name="P2b"/>
+          <p:cNvSpPr/>
+          <p:nvPr/>
+        </p:nvSpPr>
+        <p:spPr>
+          <a:xfrm>
+            <a:off x="7589520" y="2715768"/>
+            <a:ext cx="868680" cy="329184"/>
+          </a:xfrm>
+          <a:prstGeom prst="roundRect">
+            <a:avLst>
+              <a:gd name="adj" fmla="val 16667"/>
+            </a:avLst>
+          </a:prstGeom>
+          <a:solidFill>
+            <a:srgbClr val="FFFFFF"/>
+          </a:solidFill>
+          <a:ln w="19050">
+            <a:solidFill>
+              <a:srgbClr val="B8452F"/>
+            </a:solidFill>
+          </a:ln>
+        </p:spPr>
+        <p:txBody>
+          <a:bodyPr wrap="square" lIns="0" tIns="0" rIns="0" bIns="0" rtlCol="0" anchor="ctr"/>
+          <a:lstStyle/>
+          <a:p>
+            <a:pPr algn="ctr" indent="0" marL="0">
+              <a:buNone/>
+            </a:pPr>
+            <a:r>
+              <a:rPr lang="en-US" sz="1100" b="1" dirty="0">
+                <a:solidFill>
+                  <a:srgbClr val="B8452F"/>
+                </a:solidFill>
+                <a:latin typeface="Calibri" pitchFamily="34" charset="0"/>
+                <a:ea typeface="Calibri" pitchFamily="34" charset="-122"/>
+                <a:cs typeface="Calibri" pitchFamily="34" charset="-120"/>
+              </a:rPr>
+              <a:t>14 pages</a:t>
+            </a:r>
+            <a:endParaRPr lang="en-US" sz="1100" dirty="0"/>
+          </a:p>
+        </p:txBody>
+      </p:sp>
+      <p:sp>
+        <p:nvSpPr>
+          <p:cNvPr id="23" name="T1"/>
           <p:cNvSpPr/>
           <p:nvPr/>
         </p:nvSpPr>
@@ -1693,7 +1883,54 @@
       </p:sp>
       <p:sp>
         <p:nvSpPr>
-          <p:cNvPr id="18" name="Nurse"/>
+          <p:cNvPr id="24" name="T5"/>
+          <p:cNvSpPr/>
+          <p:nvPr/>
+        </p:nvSpPr>
+        <p:spPr>
+          <a:xfrm>
+            <a:off x="8686800" y="2011680"/>
+            <a:ext cx="2834640" cy="868680"/>
+          </a:xfrm>
+          <a:prstGeom prst="roundRect">
+            <a:avLst>
+              <a:gd name="adj" fmla="val 8421"/>
+            </a:avLst>
+          </a:prstGeom>
+          <a:solidFill>
+            <a:srgbClr val="FBE9E4"/>
+          </a:solidFill>
+          <a:ln w="12700">
+            <a:solidFill>
+              <a:srgbClr val="B8452F"/>
+            </a:solidFill>
+          </a:ln>
+        </p:spPr>
+        <p:txBody>
+          <a:bodyPr wrap="square" lIns="45720" tIns="109728" rIns="109728" bIns="45720" rtlCol="0" anchor="ctr"/>
+          <a:lstStyle/>
+          <a:p>
+            <a:pPr algn="l" indent="0" marL="0">
+              <a:buNone/>
+            </a:pPr>
+            <a:r>
+              <a:rPr lang="en-US" sz="1200" b="1" dirty="0">
+                <a:solidFill>
+                  <a:srgbClr val="B8452F"/>
+                </a:solidFill>
+                <a:latin typeface="Calibri" pitchFamily="34" charset="0"/>
+                <a:ea typeface="Calibri" pitchFamily="34" charset="-122"/>
+                <a:cs typeface="Calibri" pitchFamily="34" charset="-120"/>
+              </a:rPr>
+              <a:t>Back to the start of the line. Maybe a different nurse.</a:t>
+            </a:r>
+            <a:endParaRPr lang="en-US" sz="1200" dirty="0"/>
+          </a:p>
+        </p:txBody>
+      </p:sp>
+      <p:sp>
+        <p:nvSpPr>
+          <p:cNvPr id="25" name="Nurse"/>
           <p:cNvSpPr/>
           <p:nvPr/>
         </p:nvSpPr>
@@ -1717,7 +1954,7 @@
           </a:ln>
         </p:spPr>
         <p:txBody>
-          <a:bodyPr wrap="square" lIns="54864" tIns="128016" rIns="1188720" bIns="54864" rtlCol="0" anchor="ctr"/>
+          <a:bodyPr wrap="square" lIns="54864" tIns="914400" rIns="109728" bIns="54864" rtlCol="0" anchor="ctr"/>
           <a:lstStyle/>
           <a:p>
             <a:pPr algn="l" indent="0" marL="0">
@@ -1755,20 +1992,44 @@
           </a:p>
         </p:txBody>
       </p:sp>
+      <p:pic>
+        <p:nvPicPr>
+          <p:cNvPr id="26" name="AvNurse" descr="preencoded.png">    </p:cNvPr>
+          <p:cNvPicPr>
+            <a:picLocks noChangeAspect="1"/>
+          </p:cNvPicPr>
+          <p:nvPr/>
+        </p:nvPicPr>
+        <p:blipFill>
+          <a:blip r:embed="rId5"/>
+          <a:stretch>
+            <a:fillRect/>
+          </a:stretch>
+        </p:blipFill>
+        <p:spPr>
+          <a:xfrm>
+            <a:off x="5413248" y="3264408"/>
+            <a:ext cx="649224" cy="649224"/>
+          </a:xfrm>
+          <a:prstGeom prst="rect">
+            <a:avLst/>
+          </a:prstGeom>
+        </p:spPr>
+      </p:pic>
       <p:sp>
         <p:nvSpPr>
-          <p:cNvPr id="19" name="P3"/>
+          <p:cNvPr id="27" name="P3"/>
           <p:cNvSpPr/>
           <p:nvPr/>
         </p:nvSpPr>
         <p:spPr>
           <a:xfrm>
-            <a:off x="7516368" y="3410712"/>
-            <a:ext cx="868680" cy="365760"/>
+            <a:off x="7589520" y="2990088"/>
+            <a:ext cx="868680" cy="329184"/>
           </a:xfrm>
           <a:prstGeom prst="roundRect">
             <a:avLst>
-              <a:gd name="adj" fmla="val 15000"/>
+              <a:gd name="adj" fmla="val 16667"/>
             </a:avLst>
           </a:prstGeom>
           <a:solidFill>
@@ -1804,7 +2065,7 @@
       </p:sp>
       <p:sp>
         <p:nvSpPr>
-          <p:cNvPr id="20" name="T2"/>
+          <p:cNvPr id="28" name="T2"/>
           <p:cNvSpPr txBox="1"/>
           <p:nvPr/>
         </p:nvSpPr>
@@ -1843,7 +2104,7 @@
       </p:sp>
       <p:sp>
         <p:nvSpPr>
-          <p:cNvPr id="21" name="Chip1"/>
+          <p:cNvPr id="29" name="Chip1"/>
           <p:cNvSpPr/>
           <p:nvPr/>
         </p:nvSpPr>
@@ -1890,7 +2151,7 @@
       </p:sp>
       <p:sp>
         <p:nvSpPr>
-          <p:cNvPr id="22" name="Chip2"/>
+          <p:cNvPr id="30" name="Chip2"/>
           <p:cNvSpPr/>
           <p:nvPr/>
         </p:nvSpPr>
@@ -1937,7 +2198,7 @@
       </p:sp>
       <p:sp>
         <p:nvSpPr>
-          <p:cNvPr id="23" name="Chip3"/>
+          <p:cNvPr id="31" name="Chip3"/>
           <p:cNvSpPr/>
           <p:nvPr/>
         </p:nvSpPr>
@@ -1984,7 +2245,7 @@
       </p:sp>
       <p:sp>
         <p:nvSpPr>
-          <p:cNvPr id="24" name="Chip4"/>
+          <p:cNvPr id="32" name="Chip4"/>
           <p:cNvSpPr/>
           <p:nvPr/>
         </p:nvSpPr>
@@ -2031,7 +2292,7 @@
       </p:sp>
       <p:sp>
         <p:nvSpPr>
-          <p:cNvPr id="25" name="OutPend"/>
+          <p:cNvPr id="33" name="OutPend"/>
           <p:cNvSpPr/>
           <p:nvPr/>
         </p:nvSpPr>
@@ -2095,7 +2356,7 @@
       </p:sp>
       <p:sp>
         <p:nvSpPr>
-          <p:cNvPr id="26" name="OutApprove"/>
+          <p:cNvPr id="34" name="OutApprove"/>
           <p:cNvSpPr/>
           <p:nvPr/>
         </p:nvSpPr>
@@ -2159,7 +2420,7 @@
       </p:sp>
       <p:sp>
         <p:nvSpPr>
-          <p:cNvPr id="27" name="OutEsc"/>
+          <p:cNvPr id="35" name="OutEsc"/>
           <p:cNvSpPr/>
           <p:nvPr/>
         </p:nvSpPr>
@@ -2223,7 +2484,7 @@
       </p:sp>
       <p:sp>
         <p:nvSpPr>
-          <p:cNvPr id="28" name="RingPend"/>
+          <p:cNvPr id="36" name="RingPend"/>
           <p:cNvSpPr/>
           <p:nvPr/>
         </p:nvSpPr>
@@ -2247,7 +2508,7 @@
       </p:sp>
       <p:sp>
         <p:nvSpPr>
-          <p:cNvPr id="29" name="RingApprove"/>
+          <p:cNvPr id="37" name="RingApprove"/>
           <p:cNvSpPr/>
           <p:nvPr/>
         </p:nvSpPr>
@@ -2271,7 +2532,7 @@
       </p:sp>
       <p:sp>
         <p:nvSpPr>
-          <p:cNvPr id="30" name="RingEsc"/>
+          <p:cNvPr id="38" name="RingEsc"/>
           <p:cNvSpPr/>
           <p:nvPr/>
         </p:nvSpPr>
@@ -2295,18 +2556,18 @@
       </p:sp>
       <p:sp>
         <p:nvSpPr>
-          <p:cNvPr id="31" name="MD"/>
+          <p:cNvPr id="39" name="MD"/>
           <p:cNvSpPr/>
           <p:nvPr/>
         </p:nvSpPr>
         <p:spPr>
           <a:xfrm>
-            <a:off x="8595360" y="5166360"/>
-            <a:ext cx="2926080" cy="548640"/>
+            <a:off x="8321040" y="5138928"/>
+            <a:ext cx="3291840" cy="566928"/>
           </a:xfrm>
           <a:prstGeom prst="roundRect">
             <a:avLst>
-              <a:gd name="adj" fmla="val 13333"/>
+              <a:gd name="adj" fmla="val 12903"/>
             </a:avLst>
           </a:prstGeom>
           <a:solidFill>
@@ -2319,7 +2580,7 @@
           </a:ln>
         </p:spPr>
         <p:txBody>
-          <a:bodyPr wrap="square" lIns="27432" tIns="128016" rIns="109728" bIns="27432" rtlCol="0" anchor="ctr"/>
+          <a:bodyPr wrap="square" lIns="27432" tIns="731520" rIns="91440" bIns="27432" rtlCol="0" anchor="ctr"/>
           <a:lstStyle/>
           <a:p>
             <a:pPr algn="l" indent="0" marL="0">
@@ -2351,26 +2612,50 @@
                 <a:ea typeface="Calibri" pitchFamily="34" charset="-122"/>
                 <a:cs typeface="Calibri" pitchFamily="34" charset="-120"/>
               </a:rPr>
-              <a:t>Decides. The only role that can deny.</a:t>
+              <a:t>Decides. Only role that can deny.</a:t>
             </a:r>
             <a:endParaRPr lang="en-US" sz="1300" dirty="0"/>
           </a:p>
         </p:txBody>
       </p:sp>
+      <p:pic>
+        <p:nvPicPr>
+          <p:cNvPr id="40" name="AvMD" descr="preencoded.png">    </p:cNvPr>
+          <p:cNvPicPr>
+            <a:picLocks noChangeAspect="1"/>
+          </p:cNvPicPr>
+          <p:nvPr/>
+        </p:nvPicPr>
+        <p:blipFill>
+          <a:blip r:embed="rId6"/>
+          <a:stretch>
+            <a:fillRect/>
+          </a:stretch>
+        </p:blipFill>
+        <p:spPr>
+          <a:xfrm>
+            <a:off x="8394192" y="5184648"/>
+            <a:ext cx="475488" cy="475488"/>
+          </a:xfrm>
+          <a:prstGeom prst="rect">
+            <a:avLst/>
+          </a:prstGeom>
+        </p:spPr>
+      </p:pic>
       <p:sp>
         <p:nvSpPr>
-          <p:cNvPr id="32" name="T4"/>
+          <p:cNvPr id="41" name="T4"/>
           <p:cNvSpPr/>
           <p:nvPr/>
         </p:nvSpPr>
         <p:spPr>
           <a:xfrm>
-            <a:off x="5303520" y="5166360"/>
-            <a:ext cx="3108960" cy="548640"/>
+            <a:off x="5303520" y="5138928"/>
+            <a:ext cx="2834640" cy="566928"/>
           </a:xfrm>
           <a:prstGeom prst="roundRect">
             <a:avLst>
-              <a:gd name="adj" fmla="val 13333"/>
+              <a:gd name="adj" fmla="val 12903"/>
             </a:avLst>
           </a:prstGeom>
           <a:solidFill>
@@ -2406,7 +2691,7 @@
       </p:sp>
       <p:sp>
         <p:nvSpPr>
-          <p:cNvPr id="33" name="ArrFax"/>
+          <p:cNvPr id="42" name="ArrFax"/>
           <p:cNvSpPr/>
           <p:nvPr/>
         </p:nvSpPr>
@@ -2428,16 +2713,40 @@
           </a:ln>
         </p:spPr>
       </p:sp>
+      <p:pic>
+        <p:nvPicPr>
+          <p:cNvPr id="43" name="IcFax" descr="preencoded.png">    </p:cNvPr>
+          <p:cNvPicPr>
+            <a:picLocks noChangeAspect="1"/>
+          </p:cNvPicPr>
+          <p:nvPr/>
+        </p:nvPicPr>
+        <p:blipFill>
+          <a:blip r:embed="rId7"/>
+          <a:stretch>
+            <a:fillRect/>
+          </a:stretch>
+        </p:blipFill>
+        <p:spPr>
+          <a:xfrm>
+            <a:off x="4553712" y="1901952"/>
+            <a:ext cx="493776" cy="493776"/>
+          </a:xfrm>
+          <a:prstGeom prst="rect">
+            <a:avLst/>
+          </a:prstGeom>
+        </p:spPr>
+      </p:pic>
       <p:sp>
         <p:nvSpPr>
-          <p:cNvPr id="34" name="LblFax"/>
+          <p:cNvPr id="44" name="LblFax"/>
           <p:cNvSpPr txBox="1"/>
           <p:nvPr/>
         </p:nvSpPr>
         <p:spPr>
           <a:xfrm>
-            <a:off x="4315968" y="2130552"/>
-            <a:ext cx="969264" cy="256032"/>
+            <a:off x="4315968" y="2487168"/>
+            <a:ext cx="969264" cy="228600"/>
           </a:xfrm>
           <a:prstGeom prst="rect">
             <a:avLst/>
@@ -2469,7 +2778,7 @@
       </p:sp>
       <p:sp>
         <p:nvSpPr>
-          <p:cNvPr id="35" name="ArrIn"/>
+          <p:cNvPr id="45" name="ArrIn"/>
           <p:cNvSpPr/>
           <p:nvPr/>
         </p:nvSpPr>
@@ -2493,7 +2802,7 @@
       </p:sp>
       <p:sp>
         <p:nvSpPr>
-          <p:cNvPr id="36" name="ForkStub"/>
+          <p:cNvPr id="46" name="ForkStub"/>
           <p:cNvSpPr/>
           <p:nvPr/>
         </p:nvSpPr>
@@ -2516,7 +2825,7 @@
       </p:sp>
       <p:sp>
         <p:nvSpPr>
-          <p:cNvPr id="37" name="ForkBar"/>
+          <p:cNvPr id="47" name="ForkBar"/>
           <p:cNvSpPr/>
           <p:nvPr/>
         </p:nvSpPr>
@@ -2539,7 +2848,7 @@
       </p:sp>
       <p:sp>
         <p:nvSpPr>
-          <p:cNvPr id="38" name="DropPend"/>
+          <p:cNvPr id="48" name="DropPend"/>
           <p:cNvSpPr/>
           <p:nvPr/>
         </p:nvSpPr>
@@ -2563,7 +2872,7 @@
       </p:sp>
       <p:sp>
         <p:nvSpPr>
-          <p:cNvPr id="39" name="DropApprove"/>
+          <p:cNvPr id="49" name="DropApprove"/>
           <p:cNvSpPr/>
           <p:nvPr/>
         </p:nvSpPr>
@@ -2587,7 +2896,7 @@
       </p:sp>
       <p:sp>
         <p:nvSpPr>
-          <p:cNvPr id="40" name="DropEsc"/>
+          <p:cNvPr id="50" name="DropEsc"/>
           <p:cNvSpPr/>
           <p:nvPr/>
         </p:nvSpPr>
@@ -2611,7 +2920,7 @@
       </p:sp>
       <p:sp>
         <p:nvSpPr>
-          <p:cNvPr id="41" name="ArrPend"/>
+          <p:cNvPr id="51" name="ArrPend"/>
           <p:cNvSpPr/>
           <p:nvPr/>
         </p:nvSpPr>
@@ -2635,14 +2944,14 @@
       </p:sp>
       <p:sp>
         <p:nvSpPr>
-          <p:cNvPr id="42" name="ArrMD"/>
+          <p:cNvPr id="52" name="ArrMD"/>
           <p:cNvSpPr/>
           <p:nvPr/>
         </p:nvSpPr>
         <p:spPr>
           <a:xfrm>
             <a:off x="10424160" y="4983480"/>
-            <a:ext cx="0" cy="182880"/>
+            <a:ext cx="0" cy="155448"/>
           </a:xfrm>
           <a:prstGeom prst="line">
             <a:avLst/>
@@ -2659,7 +2968,77 @@
       </p:sp>
       <p:sp>
         <p:nvSpPr>
-          <p:cNvPr id="43" name="LabelA"/>
+          <p:cNvPr id="53" name="ResA"/>
+          <p:cNvSpPr/>
+          <p:nvPr/>
+        </p:nvSpPr>
+        <p:spPr>
+          <a:xfrm>
+            <a:off x="603504" y="4663440"/>
+            <a:ext cx="173736" cy="0"/>
+          </a:xfrm>
+          <a:prstGeom prst="line">
+            <a:avLst/>
+          </a:prstGeom>
+          <a:noFill/>
+          <a:ln w="25400">
+            <a:solidFill>
+              <a:srgbClr val="B8452F"/>
+            </a:solidFill>
+            <a:prstDash val="solid"/>
+          </a:ln>
+        </p:spPr>
+      </p:sp>
+      <p:sp>
+        <p:nvSpPr>
+          <p:cNvPr id="54" name="ResB"/>
+          <p:cNvSpPr/>
+          <p:nvPr/>
+        </p:nvSpPr>
+        <p:spPr>
+          <a:xfrm>
+            <a:off x="603504" y="2446020"/>
+            <a:ext cx="0" cy="2217420"/>
+          </a:xfrm>
+          <a:prstGeom prst="line">
+            <a:avLst/>
+          </a:prstGeom>
+          <a:noFill/>
+          <a:ln w="25400">
+            <a:solidFill>
+              <a:srgbClr val="B8452F"/>
+            </a:solidFill>
+            <a:prstDash val="solid"/>
+          </a:ln>
+        </p:spPr>
+      </p:sp>
+      <p:sp>
+        <p:nvSpPr>
+          <p:cNvPr id="55" name="ResC"/>
+          <p:cNvSpPr/>
+          <p:nvPr/>
+        </p:nvSpPr>
+        <p:spPr>
+          <a:xfrm>
+            <a:off x="603504" y="2446020"/>
+            <a:ext cx="173736" cy="0"/>
+          </a:xfrm>
+          <a:prstGeom prst="line">
+            <a:avLst/>
+          </a:prstGeom>
+          <a:noFill/>
+          <a:ln w="25400">
+            <a:solidFill>
+              <a:srgbClr val="B8452F"/>
+            </a:solidFill>
+            <a:prstDash val="solid"/>
+            <a:tailEnd type="triangle"/>
+          </a:ln>
+        </p:spPr>
+      </p:sp>
+      <p:sp>
+        <p:nvSpPr>
+          <p:cNvPr id="56" name="LabelA"/>
           <p:cNvSpPr txBox="1"/>
           <p:nvPr/>
         </p:nvSpPr>
@@ -2698,7 +3077,7 @@
       </p:sp>
       <p:sp>
         <p:nvSpPr>
-          <p:cNvPr id="44" name="LabelB"/>
+          <p:cNvPr id="57" name="LabelB"/>
           <p:cNvSpPr txBox="1"/>
           <p:nvPr/>
         </p:nvSpPr>
@@ -2737,7 +3116,7 @@
       </p:sp>
       <p:sp>
         <p:nvSpPr>
-          <p:cNvPr id="45" name="LabelC"/>
+          <p:cNvPr id="58" name="LabelC"/>
           <p:cNvSpPr txBox="1"/>
           <p:nvPr/>
         </p:nvSpPr>
@@ -2776,7 +3155,7 @@
       </p:sp>
       <p:sp>
         <p:nvSpPr>
-          <p:cNvPr id="46" name="c1"/>
+          <p:cNvPr id="59" name="c1"/>
           <p:cNvSpPr txBox="1"/>
           <p:nvPr/>
         </p:nvSpPr>
@@ -2815,7 +3194,7 @@
       </p:sp>
       <p:sp>
         <p:nvSpPr>
-          <p:cNvPr id="47" name="c2"/>
+          <p:cNvPr id="60" name="c2"/>
           <p:cNvSpPr txBox="1"/>
           <p:nvPr/>
         </p:nvSpPr>
@@ -2854,7 +3233,7 @@
       </p:sp>
       <p:sp>
         <p:nvSpPr>
-          <p:cNvPr id="48" name="c3"/>
+          <p:cNvPr id="61" name="c3"/>
           <p:cNvSpPr txBox="1"/>
           <p:nvPr/>
         </p:nvSpPr>
@@ -2893,7 +3272,7 @@
       </p:sp>
       <p:sp>
         <p:nvSpPr>
-          <p:cNvPr id="49" name="c4"/>
+          <p:cNvPr id="62" name="c4"/>
           <p:cNvSpPr txBox="1"/>
           <p:nvPr/>
         </p:nvSpPr>
@@ -2932,7 +3311,7 @@
       </p:sp>
       <p:sp>
         <p:nvSpPr>
-          <p:cNvPr id="50" name="c5"/>
+          <p:cNvPr id="63" name="c5"/>
           <p:cNvSpPr txBox="1"/>
           <p:nvPr/>
         </p:nvSpPr>
@@ -2971,7 +3350,7 @@
       </p:sp>
       <p:sp>
         <p:nvSpPr>
-          <p:cNvPr id="51" name="c6"/>
+          <p:cNvPr id="64" name="c6"/>
           <p:cNvSpPr txBox="1"/>
           <p:nvPr/>
         </p:nvSpPr>
@@ -3010,7 +3389,7 @@
       </p:sp>
       <p:sp>
         <p:nvSpPr>
-          <p:cNvPr id="52" name="c7"/>
+          <p:cNvPr id="65" name="c7"/>
           <p:cNvSpPr txBox="1"/>
           <p:nvPr/>
         </p:nvSpPr>
@@ -3049,7 +3428,7 @@
       </p:sp>
       <p:sp>
         <p:nvSpPr>
-          <p:cNvPr id="53" name="c8"/>
+          <p:cNvPr id="66" name="c8"/>
           <p:cNvSpPr txBox="1"/>
           <p:nvPr/>
         </p:nvSpPr>
@@ -3080,7 +3459,7 @@
                 <a:ea typeface="Calibri" pitchFamily="34" charset="-122"/>
                 <a:cs typeface="Calibri" pitchFamily="34" charset="-120"/>
               </a:rPr>
-              <a:t>Path 2. A fact is missing. She pends the case and it goes back to the provider.</a:t>
+              <a:t>Path 2. A fact is missing. She pends the case and sends it back to the provider.</a:t>
             </a:r>
             <a:endParaRPr lang="en-US" sz="1800" dirty="0"/>
           </a:p>
@@ -3088,7 +3467,7 @@
       </p:sp>
       <p:sp>
         <p:nvSpPr>
-          <p:cNvPr id="54" name="c9"/>
+          <p:cNvPr id="67" name="c9"/>
           <p:cNvSpPr txBox="1"/>
           <p:nvPr/>
         </p:nvSpPr>
@@ -3119,7 +3498,7 @@
                 <a:ea typeface="Calibri" pitchFamily="34" charset="-122"/>
                 <a:cs typeface="Calibri" pitchFamily="34" charset="-120"/>
               </a:rPr>
-              <a:t>The provider has to work out what is missing, then resend. The case starts again from zero, and the clock keeps running.</a:t>
+              <a:t>The provider has to work out what is missing.</a:t>
             </a:r>
             <a:endParaRPr lang="en-US" sz="1800" dirty="0"/>
           </a:p>
@@ -3127,7 +3506,85 @@
       </p:sp>
       <p:sp>
         <p:nvSpPr>
-          <p:cNvPr id="55" name="c10"/>
+          <p:cNvPr id="68" name="c9b"/>
+          <p:cNvSpPr txBox="1"/>
+          <p:nvPr/>
+        </p:nvSpPr>
+        <p:spPr>
+          <a:xfrm>
+            <a:off x="457200" y="5943600"/>
+            <a:ext cx="11274552" cy="594360"/>
+          </a:xfrm>
+          <a:prstGeom prst="rect">
+            <a:avLst/>
+          </a:prstGeom>
+          <a:noFill/>
+          <a:ln/>
+        </p:spPr>
+        <p:txBody>
+          <a:bodyPr wrap="square" lIns="0" tIns="0" rIns="0" bIns="0" rtlCol="0" anchor="ctr"/>
+          <a:lstStyle/>
+          <a:p>
+            <a:pPr algn="l" indent="0" marL="0">
+              <a:buNone/>
+            </a:pPr>
+            <a:r>
+              <a:rPr lang="en-US" sz="1800" dirty="0">
+                <a:solidFill>
+                  <a:srgbClr val="16211E"/>
+                </a:solidFill>
+                <a:latin typeface="Calibri" pitchFamily="34" charset="0"/>
+                <a:ea typeface="Calibri" pitchFamily="34" charset="-122"/>
+                <a:cs typeface="Calibri" pitchFamily="34" charset="-120"/>
+              </a:rPr>
+              <a:t>They find it and resend the packet. It goes through the fax all over again.</a:t>
+            </a:r>
+            <a:endParaRPr lang="en-US" sz="1800" dirty="0"/>
+          </a:p>
+        </p:txBody>
+      </p:sp>
+      <p:sp>
+        <p:nvSpPr>
+          <p:cNvPr id="69" name="c9c"/>
+          <p:cNvSpPr txBox="1"/>
+          <p:nvPr/>
+        </p:nvSpPr>
+        <p:spPr>
+          <a:xfrm>
+            <a:off x="457200" y="5943600"/>
+            <a:ext cx="11274552" cy="594360"/>
+          </a:xfrm>
+          <a:prstGeom prst="rect">
+            <a:avLst/>
+          </a:prstGeom>
+          <a:noFill/>
+          <a:ln/>
+        </p:spPr>
+        <p:txBody>
+          <a:bodyPr wrap="square" lIns="0" tIns="0" rIns="0" bIns="0" rtlCol="0" anchor="ctr"/>
+          <a:lstStyle/>
+          <a:p>
+            <a:pPr algn="l" indent="0" marL="0">
+              <a:buNone/>
+            </a:pPr>
+            <a:r>
+              <a:rPr lang="en-US" sz="1800" dirty="0">
+                <a:solidFill>
+                  <a:srgbClr val="16211E"/>
+                </a:solidFill>
+                <a:latin typeface="Calibri" pitchFamily="34" charset="0"/>
+                <a:ea typeface="Calibri" pitchFamily="34" charset="-122"/>
+                <a:cs typeface="Calibri" pitchFamily="34" charset="-120"/>
+              </a:rPr>
+              <a:t>Back at intake, the case starts from zero. The clock never stopped.</a:t>
+            </a:r>
+            <a:endParaRPr lang="en-US" sz="1800" dirty="0"/>
+          </a:p>
+        </p:txBody>
+      </p:sp>
+      <p:sp>
+        <p:nvSpPr>
+          <p:cNvPr id="70" name="c10"/>
           <p:cNvSpPr txBox="1"/>
           <p:nvPr/>
         </p:nvSpPr>
@@ -3166,7 +3623,7 @@
       </p:sp>
       <p:sp>
         <p:nvSpPr>
-          <p:cNvPr id="56" name="c11"/>
+          <p:cNvPr id="71" name="c11"/>
           <p:cNvSpPr txBox="1"/>
           <p:nvPr/>
         </p:nvSpPr>
@@ -3205,7 +3662,7 @@
       </p:sp>
       <p:sp>
         <p:nvSpPr>
-          <p:cNvPr id="57" name="c12"/>
+          <p:cNvPr id="72" name="c12"/>
           <p:cNvSpPr txBox="1"/>
           <p:nvPr/>
         </p:nvSpPr>
@@ -3303,19 +3760,124 @@
                                 </p:cTn>
                               </p:par>
                               <p:par>
-                                <p:cTn id="10" presetID="10" presetClass="entr" presetSubtype="0" fill="hold" grpId="0" nodeType="withEffect">
+                                <p:cTn id="10" presetID="10" presetClass="entr" presetSubtype="0" fill="hold" nodeType="withEffect">
+                                  <p:stCondLst>
+                                    <p:cond delay="0"/>
+                                  </p:stCondLst>
+                                  <p:childTnLst>
+                                    <p:set>
+                                      <p:cBhvr>
+                                        <p:cTn id="8" dur="1" fill="hold">
+                                          <p:stCondLst>
+                                            <p:cond delay="0"/>
+                                          </p:stCondLst>
+                                        </p:cTn>
+                                        <p:tgtEl>
+                                          <p:spTgt spid="10"/>
+                                        </p:tgtEl>
+                                        <p:attrNameLst>
+                                          <p:attrName>style.visibility</p:attrName>
+                                        </p:attrNameLst>
+                                      </p:cBhvr>
+                                      <p:to>
+                                        <p:strVal val="visible"/>
+                                      </p:to>
+                                    </p:set>
+                                    <p:animEffect transition="in" filter="fade">
+                                      <p:cBhvr>
+                                        <p:cTn id="9" dur="500"/>
+                                        <p:tgtEl>
+                                          <p:spTgt spid="10"/>
+                                        </p:tgtEl>
+                                      </p:cBhvr>
+                                    </p:animEffect>
+                                  </p:childTnLst>
+                                </p:cTn>
+                              </p:par>
+                              <p:par>
+                                <p:cTn id="13" presetID="10" presetClass="entr" presetSubtype="0" fill="hold" grpId="0" nodeType="withEffect">
                                   <p:stCondLst>
                                     <p:cond delay="200"/>
                                   </p:stCondLst>
                                   <p:childTnLst>
                                     <p:set>
                                       <p:cBhvr>
-                                        <p:cTn id="8" dur="1" fill="hold">
+                                        <p:cTn id="11" dur="1" fill="hold">
                                           <p:stCondLst>
                                             <p:cond delay="0"/>
                                           </p:stCondLst>
                                         </p:cTn>
                                         <p:tgtEl>
+                                          <p:spTgt spid="13"/>
+                                        </p:tgtEl>
+                                        <p:attrNameLst>
+                                          <p:attrName>style.visibility</p:attrName>
+                                        </p:attrNameLst>
+                                      </p:cBhvr>
+                                      <p:to>
+                                        <p:strVal val="visible"/>
+                                      </p:to>
+                                    </p:set>
+                                    <p:animEffect transition="in" filter="fade">
+                                      <p:cBhvr>
+                                        <p:cTn id="12" dur="500"/>
+                                        <p:tgtEl>
+                                          <p:spTgt spid="13"/>
+                                        </p:tgtEl>
+                                      </p:cBhvr>
+                                    </p:animEffect>
+                                  </p:childTnLst>
+                                </p:cTn>
+                              </p:par>
+                              <p:par>
+                                <p:cTn id="16" presetID="10" presetClass="entr" presetSubtype="0" fill="hold" nodeType="withEffect">
+                                  <p:stCondLst>
+                                    <p:cond delay="200"/>
+                                  </p:stCondLst>
+                                  <p:childTnLst>
+                                    <p:set>
+                                      <p:cBhvr>
+                                        <p:cTn id="14" dur="1" fill="hold">
+                                          <p:stCondLst>
+                                            <p:cond delay="0"/>
+                                          </p:stCondLst>
+                                        </p:cTn>
+                                        <p:tgtEl>
+                                          <p:spTgt spid="14"/>
+                                        </p:tgtEl>
+                                        <p:attrNameLst>
+                                          <p:attrName>style.visibility</p:attrName>
+                                        </p:attrNameLst>
+                                      </p:cBhvr>
+                                      <p:to>
+                                        <p:strVal val="visible"/>
+                                      </p:to>
+                                    </p:set>
+                                    <p:animEffect transition="in" filter="fade">
+                                      <p:cBhvr>
+                                        <p:cTn id="15" dur="500"/>
+                                        <p:tgtEl>
+                                          <p:spTgt spid="14"/>
+                                        </p:tgtEl>
+                                      </p:cBhvr>
+                                    </p:animEffect>
+                                  </p:childTnLst>
+                                </p:cTn>
+                              </p:par>
+                              <p:par>
+                                <p:cTn id="19" presetID="10" presetClass="entr" presetSubtype="0" fill="hold" grpId="0" nodeType="withEffect">
+                                  <p:stCondLst>
+                                    <p:cond delay="600"/>
+                                  </p:stCondLst>
+                                  <p:childTnLst>
+                                    <p:set>
+                                      <p:cBhvr>
+                                        <p:cTn id="17" dur="1" fill="hold">
+                                          <p:stCondLst>
+                                            <p:cond delay="0"/>
+                                          </p:stCondLst>
+                                        </p:cTn>
+                                        <p:tgtEl>
                                           <p:spTgt spid="11"/>
                                         </p:tgtEl>
                                         <p:attrNameLst>
@@ -3328,7 +3890,7 @@
                                     </p:set>
                                     <p:animEffect transition="in" filter="fade">
                                       <p:cBhvr>
-                                        <p:cTn id="9" dur="500"/>
+                                        <p:cTn id="18" dur="500"/>
                                         <p:tgtEl>
                                           <p:spTgt spid="11"/>
                                         </p:tgtEl>
@@ -3338,20 +3900,20 @@
                                 </p:cTn>
                               </p:par>
                               <p:par>
-                                <p:cTn id="13" presetID="10" presetClass="entr" presetSubtype="0" fill="hold" grpId="0" nodeType="withEffect">
-                                  <p:stCondLst>
-                                    <p:cond delay="400"/>
-                                  </p:stCondLst>
-                                  <p:childTnLst>
-                                    <p:set>
-                                      <p:cBhvr>
-                                        <p:cTn id="11" dur="1" fill="hold">
+                                <p:cTn id="22" presetID="10" presetClass="entr" presetSubtype="0" fill="hold" grpId="0" nodeType="withEffect">
+                                  <p:stCondLst>
+                                    <p:cond delay="300"/>
+                                  </p:stCondLst>
+                                  <p:childTnLst>
+                                    <p:set>
+                                      <p:cBhvr>
+                                        <p:cTn id="20" dur="1" fill="hold">
                                           <p:stCondLst>
                                             <p:cond delay="0"/>
                                           </p:stCondLst>
                                         </p:cTn>
                                         <p:tgtEl>
-                                          <p:spTgt spid="10"/>
+                                          <p:spTgt spid="59"/>
                                         </p:tgtEl>
                                         <p:attrNameLst>
                                           <p:attrName>style.visibility</p:attrName>
@@ -3363,44 +3925,9 @@
                                     </p:set>
                                     <p:animEffect transition="in" filter="fade">
                                       <p:cBhvr>
-                                        <p:cTn id="12" dur="500"/>
-                                        <p:tgtEl>
-                                          <p:spTgt spid="10"/>
-                                        </p:tgtEl>
-                                      </p:cBhvr>
-                                    </p:animEffect>
-                                  </p:childTnLst>
-                                </p:cTn>
-                              </p:par>
-                              <p:par>
-                                <p:cTn id="16" presetID="10" presetClass="entr" presetSubtype="0" fill="hold" grpId="0" nodeType="withEffect">
-                                  <p:stCondLst>
-                                    <p:cond delay="300"/>
-                                  </p:stCondLst>
-                                  <p:childTnLst>
-                                    <p:set>
-                                      <p:cBhvr>
-                                        <p:cTn id="14" dur="1" fill="hold">
-                                          <p:stCondLst>
-                                            <p:cond delay="0"/>
-                                          </p:stCondLst>
-                                        </p:cTn>
-                                        <p:tgtEl>
-                                          <p:spTgt spid="46"/>
-                                        </p:tgtEl>
-                                        <p:attrNameLst>
-                                          <p:attrName>style.visibility</p:attrName>
-                                        </p:attrNameLst>
-                                      </p:cBhvr>
-                                      <p:to>
-                                        <p:strVal val="visible"/>
-                                      </p:to>
-                                    </p:set>
-                                    <p:animEffect transition="in" filter="fade">
-                                      <p:cBhvr>
-                                        <p:cTn id="15" dur="500"/>
-                                        <p:tgtEl>
-                                          <p:spTgt spid="46"/>
+                                        <p:cTn id="21" dur="500"/>
+                                        <p:tgtEl>
+                                          <p:spTgt spid="59"/>
                                         </p:tgtEl>
                                       </p:cBhvr>
                                     </p:animEffect>
@@ -3411,34 +3938,34 @@
                           </p:cTn>
                         </p:par>
                         <p:par>
-                          <p:cTn id="17" fill="hold">
+                          <p:cTn id="23" fill="hold">
                             <p:stCondLst>
-                              <p:cond delay="900"/>
+                              <p:cond delay="1100"/>
                             </p:stCondLst>
                             <p:childTnLst>
                               <p:par>
-                                <p:cTn id="20" presetID="10" presetClass="exit" presetSubtype="0" fill="hold" grpId="0" nodeType="afterEffect">
+                                <p:cTn id="26" presetID="10" presetClass="exit" presetSubtype="0" fill="hold" grpId="0" nodeType="afterEffect">
                                   <p:stCondLst>
                                     <p:cond delay="3500"/>
                                   </p:stCondLst>
                                   <p:childTnLst>
                                     <p:animEffect transition="out" filter="fade">
                                       <p:cBhvr>
-                                        <p:cTn id="18" dur="300"/>
-                                        <p:tgtEl>
-                                          <p:spTgt spid="46"/>
-                                        </p:tgtEl>
-                                      </p:cBhvr>
-                                    </p:animEffect>
-                                    <p:set>
-                                      <p:cBhvr>
-                                        <p:cTn id="19" dur="1" fill="hold">
+                                        <p:cTn id="24" dur="300"/>
+                                        <p:tgtEl>
+                                          <p:spTgt spid="59"/>
+                                        </p:tgtEl>
+                                      </p:cBhvr>
+                                    </p:animEffect>
+                                    <p:set>
+                                      <p:cBhvr>
+                                        <p:cTn id="25" dur="1" fill="hold">
                                           <p:stCondLst>
                                             <p:cond delay="299"/>
                                           </p:stCondLst>
                                         </p:cTn>
                                         <p:tgtEl>
-                                          <p:spTgt spid="46"/>
+                                          <p:spTgt spid="59"/>
                                         </p:tgtEl>
                                         <p:attrNameLst>
                                           <p:attrName>style.visibility</p:attrName>
@@ -3452,20 +3979,20 @@
                                 </p:cTn>
                               </p:par>
                               <p:par>
-                                <p:cTn id="23" presetID="22" presetClass="entr" presetSubtype="8" fill="hold" nodeType="withEffect">
+                                <p:cTn id="29" presetID="10" presetClass="entr" presetSubtype="0" fill="hold" nodeType="withEffect">
                                   <p:stCondLst>
                                     <p:cond delay="3800"/>
                                   </p:stCondLst>
                                   <p:childTnLst>
                                     <p:set>
                                       <p:cBhvr>
-                                        <p:cTn id="21" dur="1" fill="hold">
+                                        <p:cTn id="27" dur="1" fill="hold">
                                           <p:stCondLst>
                                             <p:cond delay="0"/>
                                           </p:stCondLst>
                                         </p:cTn>
                                         <p:tgtEl>
-                                          <p:spTgt spid="33"/>
+                                          <p:spTgt spid="43"/>
                                         </p:tgtEl>
                                         <p:attrNameLst>
                                           <p:attrName>style.visibility</p:attrName>
@@ -3475,32 +4002,67 @@
                                         <p:strVal val="visible"/>
                                       </p:to>
                                     </p:set>
+                                    <p:animEffect transition="in" filter="fade">
+                                      <p:cBhvr>
+                                        <p:cTn id="28" dur="500"/>
+                                        <p:tgtEl>
+                                          <p:spTgt spid="43"/>
+                                        </p:tgtEl>
+                                      </p:cBhvr>
+                                    </p:animEffect>
+                                  </p:childTnLst>
+                                </p:cTn>
+                              </p:par>
+                              <p:par>
+                                <p:cTn id="32" presetID="22" presetClass="entr" presetSubtype="8" fill="hold" nodeType="withEffect">
+                                  <p:stCondLst>
+                                    <p:cond delay="3800"/>
+                                  </p:stCondLst>
+                                  <p:childTnLst>
+                                    <p:set>
+                                      <p:cBhvr>
+                                        <p:cTn id="30" dur="1" fill="hold">
+                                          <p:stCondLst>
+                                            <p:cond delay="0"/>
+                                          </p:stCondLst>
+                                        </p:cTn>
+                                        <p:tgtEl>
+                                          <p:spTgt spid="42"/>
+                                        </p:tgtEl>
+                                        <p:attrNameLst>
+                                          <p:attrName>style.visibility</p:attrName>
+                                        </p:attrNameLst>
+                                      </p:cBhvr>
+                                      <p:to>
+                                        <p:strVal val="visible"/>
+                                      </p:to>
+                                    </p:set>
                                     <p:animEffect transition="in" filter="wipe(left)">
                                       <p:cBhvr>
-                                        <p:cTn id="22" dur="600"/>
-                                        <p:tgtEl>
-                                          <p:spTgt spid="33"/>
-                                        </p:tgtEl>
-                                      </p:cBhvr>
-                                    </p:animEffect>
-                                  </p:childTnLst>
-                                </p:cTn>
-                              </p:par>
-                              <p:par>
-                                <p:cTn id="26" presetID="10" presetClass="entr" presetSubtype="0" fill="hold" grpId="0" nodeType="withEffect">
+                                        <p:cTn id="31" dur="600"/>
+                                        <p:tgtEl>
+                                          <p:spTgt spid="42"/>
+                                        </p:tgtEl>
+                                      </p:cBhvr>
+                                    </p:animEffect>
+                                  </p:childTnLst>
+                                </p:cTn>
+                              </p:par>
+                              <p:par>
+                                <p:cTn id="35" presetID="10" presetClass="entr" presetSubtype="0" fill="hold" grpId="0" nodeType="withEffect">
                                   <p:stCondLst>
                                     <p:cond delay="3800"/>
                                   </p:stCondLst>
                                   <p:childTnLst>
                                     <p:set>
                                       <p:cBhvr>
-                                        <p:cTn id="24" dur="1" fill="hold">
+                                        <p:cTn id="33" dur="1" fill="hold">
                                           <p:stCondLst>
                                             <p:cond delay="0"/>
                                           </p:stCondLst>
                                         </p:cTn>
                                         <p:tgtEl>
-                                          <p:spTgt spid="34"/>
+                                          <p:spTgt spid="44"/>
                                         </p:tgtEl>
                                         <p:attrNameLst>
                                           <p:attrName>style.visibility</p:attrName>
@@ -3512,38 +4074,38 @@
                                     </p:set>
                                     <p:animEffect transition="in" filter="fade">
                                       <p:cBhvr>
-                                        <p:cTn id="25" dur="500"/>
-                                        <p:tgtEl>
-                                          <p:spTgt spid="34"/>
-                                        </p:tgtEl>
-                                      </p:cBhvr>
-                                    </p:animEffect>
-                                  </p:childTnLst>
-                                </p:cTn>
-                              </p:par>
-                              <p:par>
-                                <p:cTn id="29" presetID="10" presetClass="exit" presetSubtype="0" fill="hold" grpId="0" nodeType="withEffect">
+                                        <p:cTn id="34" dur="500"/>
+                                        <p:tgtEl>
+                                          <p:spTgt spid="44"/>
+                                        </p:tgtEl>
+                                      </p:cBhvr>
+                                    </p:animEffect>
+                                  </p:childTnLst>
+                                </p:cTn>
+                              </p:par>
+                              <p:par>
+                                <p:cTn id="38" presetID="10" presetClass="exit" presetSubtype="0" fill="hold" grpId="0" nodeType="withEffect">
                                   <p:stCondLst>
                                     <p:cond delay="4400"/>
                                   </p:stCondLst>
                                   <p:childTnLst>
                                     <p:animEffect transition="out" filter="fade">
                                       <p:cBhvr>
-                                        <p:cTn id="27" dur="300"/>
-                                        <p:tgtEl>
-                                          <p:spTgt spid="10"/>
-                                        </p:tgtEl>
-                                      </p:cBhvr>
-                                    </p:animEffect>
-                                    <p:set>
-                                      <p:cBhvr>
-                                        <p:cTn id="28" dur="1" fill="hold">
+                                        <p:cTn id="36" dur="300"/>
+                                        <p:tgtEl>
+                                          <p:spTgt spid="11"/>
+                                        </p:tgtEl>
+                                      </p:cBhvr>
+                                    </p:animEffect>
+                                    <p:set>
+                                      <p:cBhvr>
+                                        <p:cTn id="37" dur="1" fill="hold">
                                           <p:stCondLst>
                                             <p:cond delay="299"/>
                                           </p:stCondLst>
                                         </p:cTn>
                                         <p:tgtEl>
-                                          <p:spTgt spid="10"/>
+                                          <p:spTgt spid="11"/>
                                         </p:tgtEl>
                                         <p:attrNameLst>
                                           <p:attrName>style.visibility</p:attrName>
@@ -3557,20 +4119,20 @@
                                 </p:cTn>
                               </p:par>
                               <p:par>
-                                <p:cTn id="32" presetID="10" presetClass="entr" presetSubtype="0" fill="hold" grpId="0" nodeType="withEffect">
+                                <p:cTn id="41" presetID="10" presetClass="entr" presetSubtype="0" fill="hold" grpId="0" nodeType="withEffect">
                                   <p:stCondLst>
                                     <p:cond delay="4000"/>
                                   </p:stCondLst>
                                   <p:childTnLst>
                                     <p:set>
                                       <p:cBhvr>
-                                        <p:cTn id="30" dur="1" fill="hold">
+                                        <p:cTn id="39" dur="1" fill="hold">
                                           <p:stCondLst>
                                             <p:cond delay="0"/>
                                           </p:stCondLst>
                                         </p:cTn>
                                         <p:tgtEl>
-                                          <p:spTgt spid="47"/>
+                                          <p:spTgt spid="60"/>
                                         </p:tgtEl>
                                         <p:attrNameLst>
                                           <p:attrName>style.visibility</p:attrName>
@@ -3582,9 +4144,9 @@
                                     </p:set>
                                     <p:animEffect transition="in" filter="fade">
                                       <p:cBhvr>
-                                        <p:cTn id="31" dur="500"/>
-                                        <p:tgtEl>
-                                          <p:spTgt spid="47"/>
+                                        <p:cTn id="40" dur="500"/>
+                                        <p:tgtEl>
+                                          <p:spTgt spid="60"/>
                                         </p:tgtEl>
                                       </p:cBhvr>
                                     </p:animEffect>
@@ -3595,34 +4157,34 @@
                           </p:cTn>
                         </p:par>
                         <p:par>
-                          <p:cTn id="33" fill="hold">
+                          <p:cTn id="42" fill="hold">
                             <p:stCondLst>
-                              <p:cond delay="5600"/>
+                              <p:cond delay="5800"/>
                             </p:stCondLst>
                             <p:childTnLst>
                               <p:par>
-                                <p:cTn id="36" presetID="10" presetClass="exit" presetSubtype="0" fill="hold" grpId="0" nodeType="afterEffect">
+                                <p:cTn id="45" presetID="10" presetClass="exit" presetSubtype="0" fill="hold" grpId="0" nodeType="afterEffect">
                                   <p:stCondLst>
                                     <p:cond delay="2200"/>
                                   </p:stCondLst>
                                   <p:childTnLst>
                                     <p:animEffect transition="out" filter="fade">
                                       <p:cBhvr>
-                                        <p:cTn id="34" dur="300"/>
-                                        <p:tgtEl>
-                                          <p:spTgt spid="47"/>
-                                        </p:tgtEl>
-                                      </p:cBhvr>
-                                    </p:animEffect>
-                                    <p:set>
-                                      <p:cBhvr>
-                                        <p:cTn id="35" dur="1" fill="hold">
+                                        <p:cTn id="43" dur="300"/>
+                                        <p:tgtEl>
+                                          <p:spTgt spid="60"/>
+                                        </p:tgtEl>
+                                      </p:cBhvr>
+                                    </p:animEffect>
+                                    <p:set>
+                                      <p:cBhvr>
+                                        <p:cTn id="44" dur="1" fill="hold">
                                           <p:stCondLst>
                                             <p:cond delay="299"/>
                                           </p:stCondLst>
                                         </p:cTn>
                                         <p:tgtEl>
-                                          <p:spTgt spid="47"/>
+                                          <p:spTgt spid="60"/>
                                         </p:tgtEl>
                                         <p:attrNameLst>
                                           <p:attrName>style.visibility</p:attrName>
@@ -3636,20 +4198,20 @@
                                 </p:cTn>
                               </p:par>
                               <p:par>
-                                <p:cTn id="39" presetID="10" presetClass="entr" presetSubtype="0" fill="hold" grpId="0" nodeType="withEffect">
+                                <p:cTn id="48" presetID="10" presetClass="entr" presetSubtype="0" fill="hold" grpId="0" nodeType="withEffect">
                                   <p:stCondLst>
                                     <p:cond delay="2500"/>
                                   </p:stCondLst>
                                   <p:childTnLst>
                                     <p:set>
                                       <p:cBhvr>
-                                        <p:cTn id="37" dur="1" fill="hold">
+                                        <p:cTn id="46" dur="1" fill="hold">
                                           <p:stCondLst>
                                             <p:cond delay="0"/>
                                           </p:stCondLst>
                                         </p:cTn>
                                         <p:tgtEl>
-                                          <p:spTgt spid="15"/>
+                                          <p:spTgt spid="19"/>
                                         </p:tgtEl>
                                         <p:attrNameLst>
                                           <p:attrName>style.visibility</p:attrName>
@@ -3661,30 +4223,30 @@
                                     </p:set>
                                     <p:animEffect transition="in" filter="fade">
                                       <p:cBhvr>
-                                        <p:cTn id="38" dur="500"/>
-                                        <p:tgtEl>
-                                          <p:spTgt spid="15"/>
-                                        </p:tgtEl>
-                                      </p:cBhvr>
-                                    </p:animEffect>
-                                  </p:childTnLst>
-                                </p:cTn>
-                              </p:par>
-                              <p:par>
-                                <p:cTn id="42" presetID="10" presetClass="entr" presetSubtype="0" fill="hold" grpId="0" nodeType="withEffect">
-                                  <p:stCondLst>
-                                    <p:cond delay="2700"/>
-                                  </p:stCondLst>
-                                  <p:childTnLst>
-                                    <p:set>
-                                      <p:cBhvr>
-                                        <p:cTn id="40" dur="1" fill="hold">
+                                        <p:cTn id="47" dur="500"/>
+                                        <p:tgtEl>
+                                          <p:spTgt spid="19"/>
+                                        </p:tgtEl>
+                                      </p:cBhvr>
+                                    </p:animEffect>
+                                  </p:childTnLst>
+                                </p:cTn>
+                              </p:par>
+                              <p:par>
+                                <p:cTn id="51" presetID="10" presetClass="entr" presetSubtype="0" fill="hold" nodeType="withEffect">
+                                  <p:stCondLst>
+                                    <p:cond delay="2500"/>
+                                  </p:stCondLst>
+                                  <p:childTnLst>
+                                    <p:set>
+                                      <p:cBhvr>
+                                        <p:cTn id="49" dur="1" fill="hold">
                                           <p:stCondLst>
                                             <p:cond delay="0"/>
                                           </p:stCondLst>
                                         </p:cTn>
                                         <p:tgtEl>
-                                          <p:spTgt spid="16"/>
+                                          <p:spTgt spid="20"/>
                                         </p:tgtEl>
                                         <p:attrNameLst>
                                           <p:attrName>style.visibility</p:attrName>
@@ -3696,30 +4258,65 @@
                                     </p:set>
                                     <p:animEffect transition="in" filter="fade">
                                       <p:cBhvr>
-                                        <p:cTn id="41" dur="500"/>
-                                        <p:tgtEl>
-                                          <p:spTgt spid="16"/>
-                                        </p:tgtEl>
-                                      </p:cBhvr>
-                                    </p:animEffect>
-                                  </p:childTnLst>
-                                </p:cTn>
-                              </p:par>
-                              <p:par>
-                                <p:cTn id="45" presetID="10" presetClass="entr" presetSubtype="0" fill="hold" grpId="0" nodeType="withEffect">
+                                        <p:cTn id="50" dur="500"/>
+                                        <p:tgtEl>
+                                          <p:spTgt spid="20"/>
+                                        </p:tgtEl>
+                                      </p:cBhvr>
+                                    </p:animEffect>
+                                  </p:childTnLst>
+                                </p:cTn>
+                              </p:par>
+                              <p:par>
+                                <p:cTn id="54" presetID="10" presetClass="entr" presetSubtype="0" fill="hold" grpId="0" nodeType="withEffect">
+                                  <p:stCondLst>
+                                    <p:cond delay="2900"/>
+                                  </p:stCondLst>
+                                  <p:childTnLst>
+                                    <p:set>
+                                      <p:cBhvr>
+                                        <p:cTn id="52" dur="1" fill="hold">
+                                          <p:stCondLst>
+                                            <p:cond delay="0"/>
+                                          </p:stCondLst>
+                                        </p:cTn>
+                                        <p:tgtEl>
+                                          <p:spTgt spid="21"/>
+                                        </p:tgtEl>
+                                        <p:attrNameLst>
+                                          <p:attrName>style.visibility</p:attrName>
+                                        </p:attrNameLst>
+                                      </p:cBhvr>
+                                      <p:to>
+                                        <p:strVal val="visible"/>
+                                      </p:to>
+                                    </p:set>
+                                    <p:animEffect transition="in" filter="fade">
+                                      <p:cBhvr>
+                                        <p:cTn id="53" dur="500"/>
+                                        <p:tgtEl>
+                                          <p:spTgt spid="21"/>
+                                        </p:tgtEl>
+                                      </p:cBhvr>
+                                    </p:animEffect>
+                                  </p:childTnLst>
+                                </p:cTn>
+                              </p:par>
+                              <p:par>
+                                <p:cTn id="57" presetID="10" presetClass="entr" presetSubtype="0" fill="hold" grpId="0" nodeType="withEffect">
                                   <p:stCondLst>
                                     <p:cond delay="2500"/>
                                   </p:stCondLst>
                                   <p:childTnLst>
                                     <p:set>
                                       <p:cBhvr>
-                                        <p:cTn id="43" dur="1" fill="hold">
+                                        <p:cTn id="55" dur="1" fill="hold">
                                           <p:stCondLst>
                                             <p:cond delay="0"/>
                                           </p:stCondLst>
                                         </p:cTn>
                                         <p:tgtEl>
-                                          <p:spTgt spid="48"/>
+                                          <p:spTgt spid="61"/>
                                         </p:tgtEl>
                                         <p:attrNameLst>
                                           <p:attrName>style.visibility</p:attrName>
@@ -3731,30 +4328,30 @@
                                     </p:set>
                                     <p:animEffect transition="in" filter="fade">
                                       <p:cBhvr>
-                                        <p:cTn id="44" dur="500"/>
-                                        <p:tgtEl>
-                                          <p:spTgt spid="48"/>
-                                        </p:tgtEl>
-                                      </p:cBhvr>
-                                    </p:animEffect>
-                                  </p:childTnLst>
-                                </p:cTn>
-                              </p:par>
-                              <p:par>
-                                <p:cTn id="48" presetID="10" presetClass="entr" presetSubtype="0" fill="hold" grpId="0" nodeType="withEffect">
+                                        <p:cTn id="56" dur="500"/>
+                                        <p:tgtEl>
+                                          <p:spTgt spid="61"/>
+                                        </p:tgtEl>
+                                      </p:cBhvr>
+                                    </p:animEffect>
+                                  </p:childTnLst>
+                                </p:cTn>
+                              </p:par>
+                              <p:par>
+                                <p:cTn id="60" presetID="10" presetClass="entr" presetSubtype="0" fill="hold" grpId="0" nodeType="withEffect">
                                   <p:stCondLst>
                                     <p:cond delay="3700"/>
                                   </p:stCondLst>
                                   <p:childTnLst>
                                     <p:set>
                                       <p:cBhvr>
-                                        <p:cTn id="46" dur="1" fill="hold">
+                                        <p:cTn id="58" dur="1" fill="hold">
                                           <p:stCondLst>
                                             <p:cond delay="0"/>
                                           </p:stCondLst>
                                         </p:cTn>
                                         <p:tgtEl>
-                                          <p:spTgt spid="17"/>
+                                          <p:spTgt spid="23"/>
                                         </p:tgtEl>
                                         <p:attrNameLst>
                                           <p:attrName>style.visibility</p:attrName>
@@ -3766,9 +4363,9 @@
                                     </p:set>
                                     <p:animEffect transition="in" filter="fade">
                                       <p:cBhvr>
-                                        <p:cTn id="47" dur="500"/>
-                                        <p:tgtEl>
-                                          <p:spTgt spid="17"/>
+                                        <p:cTn id="59" dur="500"/>
+                                        <p:tgtEl>
+                                          <p:spTgt spid="23"/>
                                         </p:tgtEl>
                                       </p:cBhvr>
                                     </p:animEffect>
@@ -3779,34 +4376,34 @@
                           </p:cTn>
                         </p:par>
                         <p:par>
-                          <p:cTn id="49" fill="hold">
+                          <p:cTn id="61" fill="hold">
                             <p:stCondLst>
-                              <p:cond delay="9800"/>
+                              <p:cond delay="10000"/>
                             </p:stCondLst>
                             <p:childTnLst>
                               <p:par>
-                                <p:cTn id="52" presetID="10" presetClass="exit" presetSubtype="0" fill="hold" grpId="0" nodeType="afterEffect">
+                                <p:cTn id="64" presetID="10" presetClass="exit" presetSubtype="0" fill="hold" grpId="0" nodeType="afterEffect">
                                   <p:stCondLst>
                                     <p:cond delay="4000"/>
                                   </p:stCondLst>
                                   <p:childTnLst>
                                     <p:animEffect transition="out" filter="fade">
                                       <p:cBhvr>
-                                        <p:cTn id="50" dur="300"/>
-                                        <p:tgtEl>
-                                          <p:spTgt spid="48"/>
-                                        </p:tgtEl>
-                                      </p:cBhvr>
-                                    </p:animEffect>
-                                    <p:set>
-                                      <p:cBhvr>
-                                        <p:cTn id="51" dur="1" fill="hold">
+                                        <p:cTn id="62" dur="300"/>
+                                        <p:tgtEl>
+                                          <p:spTgt spid="61"/>
+                                        </p:tgtEl>
+                                      </p:cBhvr>
+                                    </p:animEffect>
+                                    <p:set>
+                                      <p:cBhvr>
+                                        <p:cTn id="63" dur="1" fill="hold">
                                           <p:stCondLst>
                                             <p:cond delay="299"/>
                                           </p:stCondLst>
                                         </p:cTn>
                                         <p:tgtEl>
-                                          <p:spTgt spid="48"/>
+                                          <p:spTgt spid="61"/>
                                         </p:tgtEl>
                                         <p:attrNameLst>
                                           <p:attrName>style.visibility</p:attrName>
@@ -3820,20 +4417,20 @@
                                 </p:cTn>
                               </p:par>
                               <p:par>
-                                <p:cTn id="55" presetID="22" presetClass="entr" presetSubtype="1" fill="hold" nodeType="withEffect">
+                                <p:cTn id="67" presetID="22" presetClass="entr" presetSubtype="1" fill="hold" nodeType="withEffect">
                                   <p:stCondLst>
                                     <p:cond delay="4300"/>
                                   </p:stCondLst>
                                   <p:childTnLst>
                                     <p:set>
                                       <p:cBhvr>
-                                        <p:cTn id="53" dur="1" fill="hold">
+                                        <p:cTn id="65" dur="1" fill="hold">
                                           <p:stCondLst>
                                             <p:cond delay="0"/>
                                           </p:stCondLst>
                                         </p:cTn>
                                         <p:tgtEl>
-                                          <p:spTgt spid="35"/>
+                                          <p:spTgt spid="45"/>
                                         </p:tgtEl>
                                         <p:attrNameLst>
                                           <p:attrName>style.visibility</p:attrName>
@@ -3845,38 +4442,38 @@
                                     </p:set>
                                     <p:animEffect transition="in" filter="wipe(up)">
                                       <p:cBhvr>
-                                        <p:cTn id="54" dur="600"/>
-                                        <p:tgtEl>
-                                          <p:spTgt spid="35"/>
-                                        </p:tgtEl>
-                                      </p:cBhvr>
-                                    </p:animEffect>
-                                  </p:childTnLst>
-                                </p:cTn>
-                              </p:par>
-                              <p:par>
-                                <p:cTn id="58" presetID="10" presetClass="exit" presetSubtype="0" fill="hold" grpId="0" nodeType="withEffect">
+                                        <p:cTn id="66" dur="600"/>
+                                        <p:tgtEl>
+                                          <p:spTgt spid="45"/>
+                                        </p:tgtEl>
+                                      </p:cBhvr>
+                                    </p:animEffect>
+                                  </p:childTnLst>
+                                </p:cTn>
+                              </p:par>
+                              <p:par>
+                                <p:cTn id="70" presetID="10" presetClass="exit" presetSubtype="0" fill="hold" grpId="0" nodeType="withEffect">
                                   <p:stCondLst>
                                     <p:cond delay="4300"/>
                                   </p:stCondLst>
                                   <p:childTnLst>
                                     <p:animEffect transition="out" filter="fade">
                                       <p:cBhvr>
-                                        <p:cTn id="56" dur="300"/>
-                                        <p:tgtEl>
-                                          <p:spTgt spid="16"/>
-                                        </p:tgtEl>
-                                      </p:cBhvr>
-                                    </p:animEffect>
-                                    <p:set>
-                                      <p:cBhvr>
-                                        <p:cTn id="57" dur="1" fill="hold">
+                                        <p:cTn id="68" dur="300"/>
+                                        <p:tgtEl>
+                                          <p:spTgt spid="21"/>
+                                        </p:tgtEl>
+                                      </p:cBhvr>
+                                    </p:animEffect>
+                                    <p:set>
+                                      <p:cBhvr>
+                                        <p:cTn id="69" dur="1" fill="hold">
                                           <p:stCondLst>
                                             <p:cond delay="299"/>
                                           </p:stCondLst>
                                         </p:cTn>
                                         <p:tgtEl>
-                                          <p:spTgt spid="16"/>
+                                          <p:spTgt spid="21"/>
                                         </p:tgtEl>
                                         <p:attrNameLst>
                                           <p:attrName>style.visibility</p:attrName>
@@ -3890,20 +4487,20 @@
                                 </p:cTn>
                               </p:par>
                               <p:par>
-                                <p:cTn id="61" presetID="10" presetClass="entr" presetSubtype="0" fill="hold" grpId="0" nodeType="withEffect">
+                                <p:cTn id="73" presetID="10" presetClass="entr" presetSubtype="0" fill="hold" grpId="0" nodeType="withEffect">
                                   <p:stCondLst>
                                     <p:cond delay="4700"/>
                                   </p:stCondLst>
                                   <p:childTnLst>
                                     <p:set>
                                       <p:cBhvr>
-                                        <p:cTn id="59" dur="1" fill="hold">
+                                        <p:cTn id="71" dur="1" fill="hold">
                                           <p:stCondLst>
                                             <p:cond delay="0"/>
                                           </p:stCondLst>
                                         </p:cTn>
                                         <p:tgtEl>
-                                          <p:spTgt spid="18"/>
+                                          <p:spTgt spid="25"/>
                                         </p:tgtEl>
                                         <p:attrNameLst>
                                           <p:attrName>style.visibility</p:attrName>
@@ -3915,30 +4512,30 @@
                                     </p:set>
                                     <p:animEffect transition="in" filter="fade">
                                       <p:cBhvr>
-                                        <p:cTn id="60" dur="500"/>
-                                        <p:tgtEl>
-                                          <p:spTgt spid="18"/>
-                                        </p:tgtEl>
-                                      </p:cBhvr>
-                                    </p:animEffect>
-                                  </p:childTnLst>
-                                </p:cTn>
-                              </p:par>
-                              <p:par>
-                                <p:cTn id="64" presetID="10" presetClass="entr" presetSubtype="0" fill="hold" grpId="0" nodeType="withEffect">
-                                  <p:stCondLst>
-                                    <p:cond delay="4900"/>
-                                  </p:stCondLst>
-                                  <p:childTnLst>
-                                    <p:set>
-                                      <p:cBhvr>
-                                        <p:cTn id="62" dur="1" fill="hold">
+                                        <p:cTn id="72" dur="500"/>
+                                        <p:tgtEl>
+                                          <p:spTgt spid="25"/>
+                                        </p:tgtEl>
+                                      </p:cBhvr>
+                                    </p:animEffect>
+                                  </p:childTnLst>
+                                </p:cTn>
+                              </p:par>
+                              <p:par>
+                                <p:cTn id="76" presetID="10" presetClass="entr" presetSubtype="0" fill="hold" nodeType="withEffect">
+                                  <p:stCondLst>
+                                    <p:cond delay="4700"/>
+                                  </p:stCondLst>
+                                  <p:childTnLst>
+                                    <p:set>
+                                      <p:cBhvr>
+                                        <p:cTn id="74" dur="1" fill="hold">
                                           <p:stCondLst>
                                             <p:cond delay="0"/>
                                           </p:stCondLst>
                                         </p:cTn>
                                         <p:tgtEl>
-                                          <p:spTgt spid="19"/>
+                                          <p:spTgt spid="26"/>
                                         </p:tgtEl>
                                         <p:attrNameLst>
                                           <p:attrName>style.visibility</p:attrName>
@@ -3950,30 +4547,65 @@
                                     </p:set>
                                     <p:animEffect transition="in" filter="fade">
                                       <p:cBhvr>
-                                        <p:cTn id="63" dur="500"/>
-                                        <p:tgtEl>
-                                          <p:spTgt spid="19"/>
-                                        </p:tgtEl>
-                                      </p:cBhvr>
-                                    </p:animEffect>
-                                  </p:childTnLst>
-                                </p:cTn>
-                              </p:par>
-                              <p:par>
-                                <p:cTn id="67" presetID="10" presetClass="entr" presetSubtype="0" fill="hold" grpId="0" nodeType="withEffect">
+                                        <p:cTn id="75" dur="500"/>
+                                        <p:tgtEl>
+                                          <p:spTgt spid="26"/>
+                                        </p:tgtEl>
+                                      </p:cBhvr>
+                                    </p:animEffect>
+                                  </p:childTnLst>
+                                </p:cTn>
+                              </p:par>
+                              <p:par>
+                                <p:cTn id="79" presetID="10" presetClass="entr" presetSubtype="0" fill="hold" grpId="0" nodeType="withEffect">
+                                  <p:stCondLst>
+                                    <p:cond delay="5000"/>
+                                  </p:stCondLst>
+                                  <p:childTnLst>
+                                    <p:set>
+                                      <p:cBhvr>
+                                        <p:cTn id="77" dur="1" fill="hold">
+                                          <p:stCondLst>
+                                            <p:cond delay="0"/>
+                                          </p:stCondLst>
+                                        </p:cTn>
+                                        <p:tgtEl>
+                                          <p:spTgt spid="27"/>
+                                        </p:tgtEl>
+                                        <p:attrNameLst>
+                                          <p:attrName>style.visibility</p:attrName>
+                                        </p:attrNameLst>
+                                      </p:cBhvr>
+                                      <p:to>
+                                        <p:strVal val="visible"/>
+                                      </p:to>
+                                    </p:set>
+                                    <p:animEffect transition="in" filter="fade">
+                                      <p:cBhvr>
+                                        <p:cTn id="78" dur="500"/>
+                                        <p:tgtEl>
+                                          <p:spTgt spid="27"/>
+                                        </p:tgtEl>
+                                      </p:cBhvr>
+                                    </p:animEffect>
+                                  </p:childTnLst>
+                                </p:cTn>
+                              </p:par>
+                              <p:par>
+                                <p:cTn id="82" presetID="10" presetClass="entr" presetSubtype="0" fill="hold" grpId="0" nodeType="withEffect">
                                   <p:stCondLst>
                                     <p:cond delay="4300"/>
                                   </p:stCondLst>
                                   <p:childTnLst>
                                     <p:set>
                                       <p:cBhvr>
-                                        <p:cTn id="65" dur="1" fill="hold">
+                                        <p:cTn id="80" dur="1" fill="hold">
                                           <p:stCondLst>
                                             <p:cond delay="0"/>
                                           </p:stCondLst>
                                         </p:cTn>
                                         <p:tgtEl>
-                                          <p:spTgt spid="49"/>
+                                          <p:spTgt spid="62"/>
                                         </p:tgtEl>
                                         <p:attrNameLst>
                                           <p:attrName>style.visibility</p:attrName>
@@ -3985,9 +4617,9 @@
                                     </p:set>
                                     <p:animEffect transition="in" filter="fade">
                                       <p:cBhvr>
-                                        <p:cTn id="66" dur="500"/>
-                                        <p:tgtEl>
-                                          <p:spTgt spid="49"/>
+                                        <p:cTn id="81" dur="500"/>
+                                        <p:tgtEl>
+                                          <p:spTgt spid="62"/>
                                         </p:tgtEl>
                                       </p:cBhvr>
                                     </p:animEffect>
@@ -3998,34 +4630,34 @@
                           </p:cTn>
                         </p:par>
                         <p:par>
-                          <p:cTn id="68" fill="hold">
+                          <p:cTn id="83" fill="hold">
                             <p:stCondLst>
-                              <p:cond delay="15200"/>
+                              <p:cond delay="15500"/>
                             </p:stCondLst>
                             <p:childTnLst>
                               <p:par>
-                                <p:cTn id="71" presetID="10" presetClass="exit" presetSubtype="0" fill="hold" grpId="0" nodeType="afterEffect">
+                                <p:cTn id="86" presetID="10" presetClass="exit" presetSubtype="0" fill="hold" grpId="0" nodeType="afterEffect">
                                   <p:stCondLst>
                                     <p:cond delay="2800"/>
                                   </p:stCondLst>
                                   <p:childTnLst>
                                     <p:animEffect transition="out" filter="fade">
                                       <p:cBhvr>
-                                        <p:cTn id="69" dur="300"/>
-                                        <p:tgtEl>
-                                          <p:spTgt spid="49"/>
-                                        </p:tgtEl>
-                                      </p:cBhvr>
-                                    </p:animEffect>
-                                    <p:set>
-                                      <p:cBhvr>
-                                        <p:cTn id="70" dur="1" fill="hold">
+                                        <p:cTn id="84" dur="300"/>
+                                        <p:tgtEl>
+                                          <p:spTgt spid="62"/>
+                                        </p:tgtEl>
+                                      </p:cBhvr>
+                                    </p:animEffect>
+                                    <p:set>
+                                      <p:cBhvr>
+                                        <p:cTn id="85" dur="1" fill="hold">
                                           <p:stCondLst>
                                             <p:cond delay="299"/>
                                           </p:stCondLst>
                                         </p:cTn>
                                         <p:tgtEl>
-                                          <p:spTgt spid="49"/>
+                                          <p:spTgt spid="62"/>
                                         </p:tgtEl>
                                         <p:attrNameLst>
                                           <p:attrName>style.visibility</p:attrName>
@@ -4039,20 +4671,20 @@
                                 </p:cTn>
                               </p:par>
                               <p:par>
-                                <p:cTn id="74" presetID="10" presetClass="entr" presetSubtype="0" fill="hold" grpId="0" nodeType="withEffect">
+                                <p:cTn id="89" presetID="10" presetClass="entr" presetSubtype="0" fill="hold" grpId="0" nodeType="withEffect">
                                   <p:stCondLst>
                                     <p:cond delay="3100"/>
                                   </p:stCondLst>
                                   <p:childTnLst>
                                     <p:set>
                                       <p:cBhvr>
-                                        <p:cTn id="72" dur="1" fill="hold">
+                                        <p:cTn id="87" dur="1" fill="hold">
                                           <p:stCondLst>
                                             <p:cond delay="0"/>
                                           </p:stCondLst>
                                         </p:cTn>
                                         <p:tgtEl>
-                                          <p:spTgt spid="20"/>
+                                          <p:spTgt spid="28"/>
                                         </p:tgtEl>
                                         <p:attrNameLst>
                                           <p:attrName>style.visibility</p:attrName>
@@ -4064,30 +4696,30 @@
                                     </p:set>
                                     <p:animEffect transition="in" filter="fade">
                                       <p:cBhvr>
-                                        <p:cTn id="73" dur="500"/>
-                                        <p:tgtEl>
-                                          <p:spTgt spid="20"/>
-                                        </p:tgtEl>
-                                      </p:cBhvr>
-                                    </p:animEffect>
-                                  </p:childTnLst>
-                                </p:cTn>
-                              </p:par>
-                              <p:par>
-                                <p:cTn id="77" presetID="10" presetClass="entr" presetSubtype="0" fill="hold" grpId="0" nodeType="withEffect">
+                                        <p:cTn id="88" dur="500"/>
+                                        <p:tgtEl>
+                                          <p:spTgt spid="28"/>
+                                        </p:tgtEl>
+                                      </p:cBhvr>
+                                    </p:animEffect>
+                                  </p:childTnLst>
+                                </p:cTn>
+                              </p:par>
+                              <p:par>
+                                <p:cTn id="92" presetID="10" presetClass="entr" presetSubtype="0" fill="hold" grpId="0" nodeType="withEffect">
                                   <p:stCondLst>
                                     <p:cond delay="3400"/>
                                   </p:stCondLst>
                                   <p:childTnLst>
                                     <p:set>
                                       <p:cBhvr>
-                                        <p:cTn id="75" dur="1" fill="hold">
+                                        <p:cTn id="90" dur="1" fill="hold">
                                           <p:stCondLst>
                                             <p:cond delay="0"/>
                                           </p:stCondLst>
                                         </p:cTn>
                                         <p:tgtEl>
-                                          <p:spTgt spid="21"/>
+                                          <p:spTgt spid="29"/>
                                         </p:tgtEl>
                                         <p:attrNameLst>
                                           <p:attrName>style.visibility</p:attrName>
@@ -4099,30 +4731,30 @@
                                     </p:set>
                                     <p:animEffect transition="in" filter="fade">
                                       <p:cBhvr>
-                                        <p:cTn id="76" dur="500"/>
-                                        <p:tgtEl>
-                                          <p:spTgt spid="21"/>
-                                        </p:tgtEl>
-                                      </p:cBhvr>
-                                    </p:animEffect>
-                                  </p:childTnLst>
-                                </p:cTn>
-                              </p:par>
-                              <p:par>
-                                <p:cTn id="80" presetID="10" presetClass="entr" presetSubtype="0" fill="hold" grpId="0" nodeType="withEffect">
+                                        <p:cTn id="91" dur="500"/>
+                                        <p:tgtEl>
+                                          <p:spTgt spid="29"/>
+                                        </p:tgtEl>
+                                      </p:cBhvr>
+                                    </p:animEffect>
+                                  </p:childTnLst>
+                                </p:cTn>
+                              </p:par>
+                              <p:par>
+                                <p:cTn id="95" presetID="10" presetClass="entr" presetSubtype="0" fill="hold" grpId="0" nodeType="withEffect">
                                   <p:stCondLst>
                                     <p:cond delay="3700"/>
                                   </p:stCondLst>
                                   <p:childTnLst>
                                     <p:set>
                                       <p:cBhvr>
-                                        <p:cTn id="78" dur="1" fill="hold">
+                                        <p:cTn id="93" dur="1" fill="hold">
                                           <p:stCondLst>
                                             <p:cond delay="0"/>
                                           </p:stCondLst>
                                         </p:cTn>
                                         <p:tgtEl>
-                                          <p:spTgt spid="22"/>
+                                          <p:spTgt spid="30"/>
                                         </p:tgtEl>
                                         <p:attrNameLst>
                                           <p:attrName>style.visibility</p:attrName>
@@ -4134,30 +4766,30 @@
                                     </p:set>
                                     <p:animEffect transition="in" filter="fade">
                                       <p:cBhvr>
-                                        <p:cTn id="79" dur="500"/>
-                                        <p:tgtEl>
-                                          <p:spTgt spid="22"/>
-                                        </p:tgtEl>
-                                      </p:cBhvr>
-                                    </p:animEffect>
-                                  </p:childTnLst>
-                                </p:cTn>
-                              </p:par>
-                              <p:par>
-                                <p:cTn id="83" presetID="10" presetClass="entr" presetSubtype="0" fill="hold" grpId="0" nodeType="withEffect">
+                                        <p:cTn id="94" dur="500"/>
+                                        <p:tgtEl>
+                                          <p:spTgt spid="30"/>
+                                        </p:tgtEl>
+                                      </p:cBhvr>
+                                    </p:animEffect>
+                                  </p:childTnLst>
+                                </p:cTn>
+                              </p:par>
+                              <p:par>
+                                <p:cTn id="98" presetID="10" presetClass="entr" presetSubtype="0" fill="hold" grpId="0" nodeType="withEffect">
                                   <p:stCondLst>
                                     <p:cond delay="4000"/>
                                   </p:stCondLst>
                                   <p:childTnLst>
                                     <p:set>
                                       <p:cBhvr>
-                                        <p:cTn id="81" dur="1" fill="hold">
+                                        <p:cTn id="96" dur="1" fill="hold">
                                           <p:stCondLst>
                                             <p:cond delay="0"/>
                                           </p:stCondLst>
                                         </p:cTn>
                                         <p:tgtEl>
-                                          <p:spTgt spid="23"/>
+                                          <p:spTgt spid="31"/>
                                         </p:tgtEl>
                                         <p:attrNameLst>
                                           <p:attrName>style.visibility</p:attrName>
@@ -4169,30 +4801,30 @@
                                     </p:set>
                                     <p:animEffect transition="in" filter="fade">
                                       <p:cBhvr>
-                                        <p:cTn id="82" dur="500"/>
-                                        <p:tgtEl>
-                                          <p:spTgt spid="23"/>
-                                        </p:tgtEl>
-                                      </p:cBhvr>
-                                    </p:animEffect>
-                                  </p:childTnLst>
-                                </p:cTn>
-                              </p:par>
-                              <p:par>
-                                <p:cTn id="86" presetID="10" presetClass="entr" presetSubtype="0" fill="hold" grpId="0" nodeType="withEffect">
+                                        <p:cTn id="97" dur="500"/>
+                                        <p:tgtEl>
+                                          <p:spTgt spid="31"/>
+                                        </p:tgtEl>
+                                      </p:cBhvr>
+                                    </p:animEffect>
+                                  </p:childTnLst>
+                                </p:cTn>
+                              </p:par>
+                              <p:par>
+                                <p:cTn id="101" presetID="10" presetClass="entr" presetSubtype="0" fill="hold" grpId="0" nodeType="withEffect">
                                   <p:stCondLst>
                                     <p:cond delay="4300"/>
                                   </p:stCondLst>
                                   <p:childTnLst>
                                     <p:set>
                                       <p:cBhvr>
-                                        <p:cTn id="84" dur="1" fill="hold">
+                                        <p:cTn id="99" dur="1" fill="hold">
                                           <p:stCondLst>
                                             <p:cond delay="0"/>
                                           </p:stCondLst>
                                         </p:cTn>
                                         <p:tgtEl>
-                                          <p:spTgt spid="24"/>
+                                          <p:spTgt spid="32"/>
                                         </p:tgtEl>
                                         <p:attrNameLst>
                                           <p:attrName>style.visibility</p:attrName>
@@ -4204,30 +4836,30 @@
                                     </p:set>
                                     <p:animEffect transition="in" filter="fade">
                                       <p:cBhvr>
-                                        <p:cTn id="85" dur="500"/>
-                                        <p:tgtEl>
-                                          <p:spTgt spid="24"/>
-                                        </p:tgtEl>
-                                      </p:cBhvr>
-                                    </p:animEffect>
-                                  </p:childTnLst>
-                                </p:cTn>
-                              </p:par>
-                              <p:par>
-                                <p:cTn id="89" presetID="10" presetClass="entr" presetSubtype="0" fill="hold" grpId="0" nodeType="withEffect">
+                                        <p:cTn id="100" dur="500"/>
+                                        <p:tgtEl>
+                                          <p:spTgt spid="32"/>
+                                        </p:tgtEl>
+                                      </p:cBhvr>
+                                    </p:animEffect>
+                                  </p:childTnLst>
+                                </p:cTn>
+                              </p:par>
+                              <p:par>
+                                <p:cTn id="104" presetID="10" presetClass="entr" presetSubtype="0" fill="hold" grpId="0" nodeType="withEffect">
                                   <p:stCondLst>
                                     <p:cond delay="3100"/>
                                   </p:stCondLst>
                                   <p:childTnLst>
                                     <p:set>
                                       <p:cBhvr>
-                                        <p:cTn id="87" dur="1" fill="hold">
+                                        <p:cTn id="102" dur="1" fill="hold">
                                           <p:stCondLst>
                                             <p:cond delay="0"/>
                                           </p:stCondLst>
                                         </p:cTn>
                                         <p:tgtEl>
-                                          <p:spTgt spid="50"/>
+                                          <p:spTgt spid="63"/>
                                         </p:tgtEl>
                                         <p:attrNameLst>
                                           <p:attrName>style.visibility</p:attrName>
@@ -4239,9 +4871,9 @@
                                     </p:set>
                                     <p:animEffect transition="in" filter="fade">
                                       <p:cBhvr>
-                                        <p:cTn id="88" dur="500"/>
-                                        <p:tgtEl>
-                                          <p:spTgt spid="50"/>
+                                        <p:cTn id="103" dur="500"/>
+                                        <p:tgtEl>
+                                          <p:spTgt spid="63"/>
                                         </p:tgtEl>
                                       </p:cBhvr>
                                     </p:animEffect>
@@ -4252,61 +4884,341 @@
                           </p:cTn>
                         </p:par>
                         <p:par>
-                          <p:cTn id="90" fill="hold">
+                          <p:cTn id="105" fill="hold">
                             <p:stCondLst>
-                              <p:cond delay="20000"/>
+                              <p:cond delay="20300"/>
                             </p:stCondLst>
                             <p:childTnLst>
                               <p:par>
-                                <p:cTn id="93" presetID="10" presetClass="exit" presetSubtype="0" fill="hold" grpId="0" nodeType="afterEffect">
+                                <p:cTn id="108" presetID="10" presetClass="exit" presetSubtype="0" fill="hold" grpId="0" nodeType="afterEffect">
                                   <p:stCondLst>
                                     <p:cond delay="3500"/>
                                   </p:stCondLst>
                                   <p:childTnLst>
                                     <p:animEffect transition="out" filter="fade">
                                       <p:cBhvr>
-                                        <p:cTn id="91" dur="300"/>
+                                        <p:cTn id="106" dur="300"/>
+                                        <p:tgtEl>
+                                          <p:spTgt spid="63"/>
+                                        </p:tgtEl>
+                                      </p:cBhvr>
+                                    </p:animEffect>
+                                    <p:set>
+                                      <p:cBhvr>
+                                        <p:cTn id="107" dur="1" fill="hold">
+                                          <p:stCondLst>
+                                            <p:cond delay="299"/>
+                                          </p:stCondLst>
+                                        </p:cTn>
+                                        <p:tgtEl>
+                                          <p:spTgt spid="63"/>
+                                        </p:tgtEl>
+                                        <p:attrNameLst>
+                                          <p:attrName>style.visibility</p:attrName>
+                                        </p:attrNameLst>
+                                      </p:cBhvr>
+                                      <p:to>
+                                        <p:strVal val="hidden"/>
+                                      </p:to>
+                                    </p:set>
+                                  </p:childTnLst>
+                                </p:cTn>
+                              </p:par>
+                              <p:par>
+                                <p:cTn id="111" presetID="22" presetClass="entr" presetSubtype="1" fill="hold" nodeType="withEffect">
+                                  <p:stCondLst>
+                                    <p:cond delay="3800"/>
+                                  </p:stCondLst>
+                                  <p:childTnLst>
+                                    <p:set>
+                                      <p:cBhvr>
+                                        <p:cTn id="109" dur="1" fill="hold">
+                                          <p:stCondLst>
+                                            <p:cond delay="0"/>
+                                          </p:stCondLst>
+                                        </p:cTn>
+                                        <p:tgtEl>
+                                          <p:spTgt spid="46"/>
+                                        </p:tgtEl>
+                                        <p:attrNameLst>
+                                          <p:attrName>style.visibility</p:attrName>
+                                        </p:attrNameLst>
+                                      </p:cBhvr>
+                                      <p:to>
+                                        <p:strVal val="visible"/>
+                                      </p:to>
+                                    </p:set>
+                                    <p:animEffect transition="in" filter="wipe(up)">
+                                      <p:cBhvr>
+                                        <p:cTn id="110" dur="250"/>
+                                        <p:tgtEl>
+                                          <p:spTgt spid="46"/>
+                                        </p:tgtEl>
+                                      </p:cBhvr>
+                                    </p:animEffect>
+                                  </p:childTnLst>
+                                </p:cTn>
+                              </p:par>
+                              <p:par>
+                                <p:cTn id="114" presetID="22" presetClass="entr" presetSubtype="8" fill="hold" nodeType="withEffect">
+                                  <p:stCondLst>
+                                    <p:cond delay="4050"/>
+                                  </p:stCondLst>
+                                  <p:childTnLst>
+                                    <p:set>
+                                      <p:cBhvr>
+                                        <p:cTn id="112" dur="1" fill="hold">
+                                          <p:stCondLst>
+                                            <p:cond delay="0"/>
+                                          </p:stCondLst>
+                                        </p:cTn>
+                                        <p:tgtEl>
+                                          <p:spTgt spid="47"/>
+                                        </p:tgtEl>
+                                        <p:attrNameLst>
+                                          <p:attrName>style.visibility</p:attrName>
+                                        </p:attrNameLst>
+                                      </p:cBhvr>
+                                      <p:to>
+                                        <p:strVal val="visible"/>
+                                      </p:to>
+                                    </p:set>
+                                    <p:animEffect transition="in" filter="wipe(left)">
+                                      <p:cBhvr>
+                                        <p:cTn id="113" dur="500"/>
+                                        <p:tgtEl>
+                                          <p:spTgt spid="47"/>
+                                        </p:tgtEl>
+                                      </p:cBhvr>
+                                    </p:animEffect>
+                                  </p:childTnLst>
+                                </p:cTn>
+                              </p:par>
+                              <p:par>
+                                <p:cTn id="117" presetID="22" presetClass="entr" presetSubtype="1" fill="hold" nodeType="withEffect">
+                                  <p:stCondLst>
+                                    <p:cond delay="4550"/>
+                                  </p:stCondLst>
+                                  <p:childTnLst>
+                                    <p:set>
+                                      <p:cBhvr>
+                                        <p:cTn id="115" dur="1" fill="hold">
+                                          <p:stCondLst>
+                                            <p:cond delay="0"/>
+                                          </p:stCondLst>
+                                        </p:cTn>
+                                        <p:tgtEl>
+                                          <p:spTgt spid="48"/>
+                                        </p:tgtEl>
+                                        <p:attrNameLst>
+                                          <p:attrName>style.visibility</p:attrName>
+                                        </p:attrNameLst>
+                                      </p:cBhvr>
+                                      <p:to>
+                                        <p:strVal val="visible"/>
+                                      </p:to>
+                                    </p:set>
+                                    <p:animEffect transition="in" filter="wipe(up)">
+                                      <p:cBhvr>
+                                        <p:cTn id="116" dur="250"/>
+                                        <p:tgtEl>
+                                          <p:spTgt spid="48"/>
+                                        </p:tgtEl>
+                                      </p:cBhvr>
+                                    </p:animEffect>
+                                  </p:childTnLst>
+                                </p:cTn>
+                              </p:par>
+                              <p:par>
+                                <p:cTn id="120" presetID="22" presetClass="entr" presetSubtype="1" fill="hold" nodeType="withEffect">
+                                  <p:stCondLst>
+                                    <p:cond delay="4550"/>
+                                  </p:stCondLst>
+                                  <p:childTnLst>
+                                    <p:set>
+                                      <p:cBhvr>
+                                        <p:cTn id="118" dur="1" fill="hold">
+                                          <p:stCondLst>
+                                            <p:cond delay="0"/>
+                                          </p:stCondLst>
+                                        </p:cTn>
+                                        <p:tgtEl>
+                                          <p:spTgt spid="49"/>
+                                        </p:tgtEl>
+                                        <p:attrNameLst>
+                                          <p:attrName>style.visibility</p:attrName>
+                                        </p:attrNameLst>
+                                      </p:cBhvr>
+                                      <p:to>
+                                        <p:strVal val="visible"/>
+                                      </p:to>
+                                    </p:set>
+                                    <p:animEffect transition="in" filter="wipe(up)">
+                                      <p:cBhvr>
+                                        <p:cTn id="119" dur="250"/>
+                                        <p:tgtEl>
+                                          <p:spTgt spid="49"/>
+                                        </p:tgtEl>
+                                      </p:cBhvr>
+                                    </p:animEffect>
+                                  </p:childTnLst>
+                                </p:cTn>
+                              </p:par>
+                              <p:par>
+                                <p:cTn id="123" presetID="22" presetClass="entr" presetSubtype="1" fill="hold" nodeType="withEffect">
+                                  <p:stCondLst>
+                                    <p:cond delay="4550"/>
+                                  </p:stCondLst>
+                                  <p:childTnLst>
+                                    <p:set>
+                                      <p:cBhvr>
+                                        <p:cTn id="121" dur="1" fill="hold">
+                                          <p:stCondLst>
+                                            <p:cond delay="0"/>
+                                          </p:stCondLst>
+                                        </p:cTn>
                                         <p:tgtEl>
                                           <p:spTgt spid="50"/>
                                         </p:tgtEl>
-                                      </p:cBhvr>
-                                    </p:animEffect>
-                                    <p:set>
-                                      <p:cBhvr>
-                                        <p:cTn id="92" dur="1" fill="hold">
-                                          <p:stCondLst>
-                                            <p:cond delay="299"/>
-                                          </p:stCondLst>
-                                        </p:cTn>
+                                        <p:attrNameLst>
+                                          <p:attrName>style.visibility</p:attrName>
+                                        </p:attrNameLst>
+                                      </p:cBhvr>
+                                      <p:to>
+                                        <p:strVal val="visible"/>
+                                      </p:to>
+                                    </p:set>
+                                    <p:animEffect transition="in" filter="wipe(up)">
+                                      <p:cBhvr>
+                                        <p:cTn id="122" dur="250"/>
                                         <p:tgtEl>
                                           <p:spTgt spid="50"/>
                                         </p:tgtEl>
-                                        <p:attrNameLst>
-                                          <p:attrName>style.visibility</p:attrName>
-                                        </p:attrNameLst>
-                                      </p:cBhvr>
-                                      <p:to>
-                                        <p:strVal val="hidden"/>
-                                      </p:to>
-                                    </p:set>
-                                  </p:childTnLst>
-                                </p:cTn>
-                              </p:par>
-                              <p:par>
-                                <p:cTn id="96" presetID="22" presetClass="entr" presetSubtype="1" fill="hold" nodeType="withEffect">
+                                      </p:cBhvr>
+                                    </p:animEffect>
+                                  </p:childTnLst>
+                                </p:cTn>
+                              </p:par>
+                              <p:par>
+                                <p:cTn id="126" presetID="10" presetClass="entr" presetSubtype="0" fill="hold" grpId="0" nodeType="withEffect">
+                                  <p:stCondLst>
+                                    <p:cond delay="4800"/>
+                                  </p:stCondLst>
+                                  <p:childTnLst>
+                                    <p:set>
+                                      <p:cBhvr>
+                                        <p:cTn id="124" dur="1" fill="hold">
+                                          <p:stCondLst>
+                                            <p:cond delay="0"/>
+                                          </p:stCondLst>
+                                        </p:cTn>
+                                        <p:tgtEl>
+                                          <p:spTgt spid="33"/>
+                                        </p:tgtEl>
+                                        <p:attrNameLst>
+                                          <p:attrName>style.visibility</p:attrName>
+                                        </p:attrNameLst>
+                                      </p:cBhvr>
+                                      <p:to>
+                                        <p:strVal val="visible"/>
+                                      </p:to>
+                                    </p:set>
+                                    <p:animEffect transition="in" filter="fade">
+                                      <p:cBhvr>
+                                        <p:cTn id="125" dur="500"/>
+                                        <p:tgtEl>
+                                          <p:spTgt spid="33"/>
+                                        </p:tgtEl>
+                                      </p:cBhvr>
+                                    </p:animEffect>
+                                  </p:childTnLst>
+                                </p:cTn>
+                              </p:par>
+                              <p:par>
+                                <p:cTn id="129" presetID="10" presetClass="entr" presetSubtype="0" fill="hold" grpId="0" nodeType="withEffect">
+                                  <p:stCondLst>
+                                    <p:cond delay="4800"/>
+                                  </p:stCondLst>
+                                  <p:childTnLst>
+                                    <p:set>
+                                      <p:cBhvr>
+                                        <p:cTn id="127" dur="1" fill="hold">
+                                          <p:stCondLst>
+                                            <p:cond delay="0"/>
+                                          </p:stCondLst>
+                                        </p:cTn>
+                                        <p:tgtEl>
+                                          <p:spTgt spid="34"/>
+                                        </p:tgtEl>
+                                        <p:attrNameLst>
+                                          <p:attrName>style.visibility</p:attrName>
+                                        </p:attrNameLst>
+                                      </p:cBhvr>
+                                      <p:to>
+                                        <p:strVal val="visible"/>
+                                      </p:to>
+                                    </p:set>
+                                    <p:animEffect transition="in" filter="fade">
+                                      <p:cBhvr>
+                                        <p:cTn id="128" dur="500"/>
+                                        <p:tgtEl>
+                                          <p:spTgt spid="34"/>
+                                        </p:tgtEl>
+                                      </p:cBhvr>
+                                    </p:animEffect>
+                                  </p:childTnLst>
+                                </p:cTn>
+                              </p:par>
+                              <p:par>
+                                <p:cTn id="132" presetID="10" presetClass="entr" presetSubtype="0" fill="hold" grpId="0" nodeType="withEffect">
+                                  <p:stCondLst>
+                                    <p:cond delay="4800"/>
+                                  </p:stCondLst>
+                                  <p:childTnLst>
+                                    <p:set>
+                                      <p:cBhvr>
+                                        <p:cTn id="130" dur="1" fill="hold">
+                                          <p:stCondLst>
+                                            <p:cond delay="0"/>
+                                          </p:stCondLst>
+                                        </p:cTn>
+                                        <p:tgtEl>
+                                          <p:spTgt spid="35"/>
+                                        </p:tgtEl>
+                                        <p:attrNameLst>
+                                          <p:attrName>style.visibility</p:attrName>
+                                        </p:attrNameLst>
+                                      </p:cBhvr>
+                                      <p:to>
+                                        <p:strVal val="visible"/>
+                                      </p:to>
+                                    </p:set>
+                                    <p:animEffect transition="in" filter="fade">
+                                      <p:cBhvr>
+                                        <p:cTn id="131" dur="500"/>
+                                        <p:tgtEl>
+                                          <p:spTgt spid="35"/>
+                                        </p:tgtEl>
+                                      </p:cBhvr>
+                                    </p:animEffect>
+                                  </p:childTnLst>
+                                </p:cTn>
+                              </p:par>
+                              <p:par>
+                                <p:cTn id="135" presetID="10" presetClass="entr" presetSubtype="0" fill="hold" grpId="0" nodeType="withEffect">
                                   <p:stCondLst>
                                     <p:cond delay="3800"/>
                                   </p:stCondLst>
                                   <p:childTnLst>
                                     <p:set>
                                       <p:cBhvr>
-                                        <p:cTn id="94" dur="1" fill="hold">
+                                        <p:cTn id="133" dur="1" fill="hold">
                                           <p:stCondLst>
                                             <p:cond delay="0"/>
                                           </p:stCondLst>
                                         </p:cTn>
                                         <p:tgtEl>
-                                          <p:spTgt spid="36"/>
+                                          <p:spTgt spid="64"/>
                                         </p:tgtEl>
                                         <p:attrNameLst>
                                           <p:attrName>style.visibility</p:attrName>
@@ -4316,291 +5228,11 @@
                                         <p:strVal val="visible"/>
                                       </p:to>
                                     </p:set>
-                                    <p:animEffect transition="in" filter="wipe(up)">
-                                      <p:cBhvr>
-                                        <p:cTn id="95" dur="250"/>
-                                        <p:tgtEl>
-                                          <p:spTgt spid="36"/>
-                                        </p:tgtEl>
-                                      </p:cBhvr>
-                                    </p:animEffect>
-                                  </p:childTnLst>
-                                </p:cTn>
-                              </p:par>
-                              <p:par>
-                                <p:cTn id="99" presetID="22" presetClass="entr" presetSubtype="8" fill="hold" nodeType="withEffect">
-                                  <p:stCondLst>
-                                    <p:cond delay="4050"/>
-                                  </p:stCondLst>
-                                  <p:childTnLst>
-                                    <p:set>
-                                      <p:cBhvr>
-                                        <p:cTn id="97" dur="1" fill="hold">
-                                          <p:stCondLst>
-                                            <p:cond delay="0"/>
-                                          </p:stCondLst>
-                                        </p:cTn>
-                                        <p:tgtEl>
-                                          <p:spTgt spid="37"/>
-                                        </p:tgtEl>
-                                        <p:attrNameLst>
-                                          <p:attrName>style.visibility</p:attrName>
-                                        </p:attrNameLst>
-                                      </p:cBhvr>
-                                      <p:to>
-                                        <p:strVal val="visible"/>
-                                      </p:to>
-                                    </p:set>
-                                    <p:animEffect transition="in" filter="wipe(left)">
-                                      <p:cBhvr>
-                                        <p:cTn id="98" dur="500"/>
-                                        <p:tgtEl>
-                                          <p:spTgt spid="37"/>
-                                        </p:tgtEl>
-                                      </p:cBhvr>
-                                    </p:animEffect>
-                                  </p:childTnLst>
-                                </p:cTn>
-                              </p:par>
-                              <p:par>
-                                <p:cTn id="102" presetID="22" presetClass="entr" presetSubtype="1" fill="hold" nodeType="withEffect">
-                                  <p:stCondLst>
-                                    <p:cond delay="4550"/>
-                                  </p:stCondLst>
-                                  <p:childTnLst>
-                                    <p:set>
-                                      <p:cBhvr>
-                                        <p:cTn id="100" dur="1" fill="hold">
-                                          <p:stCondLst>
-                                            <p:cond delay="0"/>
-                                          </p:stCondLst>
-                                        </p:cTn>
-                                        <p:tgtEl>
-                                          <p:spTgt spid="38"/>
-                                        </p:tgtEl>
-                                        <p:attrNameLst>
-                                          <p:attrName>style.visibility</p:attrName>
-                                        </p:attrNameLst>
-                                      </p:cBhvr>
-                                      <p:to>
-                                        <p:strVal val="visible"/>
-                                      </p:to>
-                                    </p:set>
-                                    <p:animEffect transition="in" filter="wipe(up)">
-                                      <p:cBhvr>
-                                        <p:cTn id="101" dur="250"/>
-                                        <p:tgtEl>
-                                          <p:spTgt spid="38"/>
-                                        </p:tgtEl>
-                                      </p:cBhvr>
-                                    </p:animEffect>
-                                  </p:childTnLst>
-                                </p:cTn>
-                              </p:par>
-                              <p:par>
-                                <p:cTn id="105" presetID="22" presetClass="entr" presetSubtype="1" fill="hold" nodeType="withEffect">
-                                  <p:stCondLst>
-                                    <p:cond delay="4550"/>
-                                  </p:stCondLst>
-                                  <p:childTnLst>
-                                    <p:set>
-                                      <p:cBhvr>
-                                        <p:cTn id="103" dur="1" fill="hold">
-                                          <p:stCondLst>
-                                            <p:cond delay="0"/>
-                                          </p:stCondLst>
-                                        </p:cTn>
-                                        <p:tgtEl>
-                                          <p:spTgt spid="39"/>
-                                        </p:tgtEl>
-                                        <p:attrNameLst>
-                                          <p:attrName>style.visibility</p:attrName>
-                                        </p:attrNameLst>
-                                      </p:cBhvr>
-                                      <p:to>
-                                        <p:strVal val="visible"/>
-                                      </p:to>
-                                    </p:set>
-                                    <p:animEffect transition="in" filter="wipe(up)">
-                                      <p:cBhvr>
-                                        <p:cTn id="104" dur="250"/>
-                                        <p:tgtEl>
-                                          <p:spTgt spid="39"/>
-                                        </p:tgtEl>
-                                      </p:cBhvr>
-                                    </p:animEffect>
-                                  </p:childTnLst>
-                                </p:cTn>
-                              </p:par>
-                              <p:par>
-                                <p:cTn id="108" presetID="22" presetClass="entr" presetSubtype="1" fill="hold" nodeType="withEffect">
-                                  <p:stCondLst>
-                                    <p:cond delay="4550"/>
-                                  </p:stCondLst>
-                                  <p:childTnLst>
-                                    <p:set>
-                                      <p:cBhvr>
-                                        <p:cTn id="106" dur="1" fill="hold">
-                                          <p:stCondLst>
-                                            <p:cond delay="0"/>
-                                          </p:stCondLst>
-                                        </p:cTn>
-                                        <p:tgtEl>
-                                          <p:spTgt spid="40"/>
-                                        </p:tgtEl>
-                                        <p:attrNameLst>
-                                          <p:attrName>style.visibility</p:attrName>
-                                        </p:attrNameLst>
-                                      </p:cBhvr>
-                                      <p:to>
-                                        <p:strVal val="visible"/>
-                                      </p:to>
-                                    </p:set>
-                                    <p:animEffect transition="in" filter="wipe(up)">
-                                      <p:cBhvr>
-                                        <p:cTn id="107" dur="250"/>
-                                        <p:tgtEl>
-                                          <p:spTgt spid="40"/>
-                                        </p:tgtEl>
-                                      </p:cBhvr>
-                                    </p:animEffect>
-                                  </p:childTnLst>
-                                </p:cTn>
-                              </p:par>
-                              <p:par>
-                                <p:cTn id="111" presetID="10" presetClass="entr" presetSubtype="0" fill="hold" grpId="0" nodeType="withEffect">
-                                  <p:stCondLst>
-                                    <p:cond delay="4800"/>
-                                  </p:stCondLst>
-                                  <p:childTnLst>
-                                    <p:set>
-                                      <p:cBhvr>
-                                        <p:cTn id="109" dur="1" fill="hold">
-                                          <p:stCondLst>
-                                            <p:cond delay="0"/>
-                                          </p:stCondLst>
-                                        </p:cTn>
-                                        <p:tgtEl>
-                                          <p:spTgt spid="25"/>
-                                        </p:tgtEl>
-                                        <p:attrNameLst>
-                                          <p:attrName>style.visibility</p:attrName>
-                                        </p:attrNameLst>
-                                      </p:cBhvr>
-                                      <p:to>
-                                        <p:strVal val="visible"/>
-                                      </p:to>
-                                    </p:set>
                                     <p:animEffect transition="in" filter="fade">
                                       <p:cBhvr>
-                                        <p:cTn id="110" dur="500"/>
-                                        <p:tgtEl>
-                                          <p:spTgt spid="25"/>
-                                        </p:tgtEl>
-                                      </p:cBhvr>
-                                    </p:animEffect>
-                                  </p:childTnLst>
-                                </p:cTn>
-                              </p:par>
-                              <p:par>
-                                <p:cTn id="114" presetID="10" presetClass="entr" presetSubtype="0" fill="hold" grpId="0" nodeType="withEffect">
-                                  <p:stCondLst>
-                                    <p:cond delay="4800"/>
-                                  </p:stCondLst>
-                                  <p:childTnLst>
-                                    <p:set>
-                                      <p:cBhvr>
-                                        <p:cTn id="112" dur="1" fill="hold">
-                                          <p:stCondLst>
-                                            <p:cond delay="0"/>
-                                          </p:stCondLst>
-                                        </p:cTn>
-                                        <p:tgtEl>
-                                          <p:spTgt spid="26"/>
-                                        </p:tgtEl>
-                                        <p:attrNameLst>
-                                          <p:attrName>style.visibility</p:attrName>
-                                        </p:attrNameLst>
-                                      </p:cBhvr>
-                                      <p:to>
-                                        <p:strVal val="visible"/>
-                                      </p:to>
-                                    </p:set>
-                                    <p:animEffect transition="in" filter="fade">
-                                      <p:cBhvr>
-                                        <p:cTn id="113" dur="500"/>
-                                        <p:tgtEl>
-                                          <p:spTgt spid="26"/>
-                                        </p:tgtEl>
-                                      </p:cBhvr>
-                                    </p:animEffect>
-                                  </p:childTnLst>
-                                </p:cTn>
-                              </p:par>
-                              <p:par>
-                                <p:cTn id="117" presetID="10" presetClass="entr" presetSubtype="0" fill="hold" grpId="0" nodeType="withEffect">
-                                  <p:stCondLst>
-                                    <p:cond delay="4800"/>
-                                  </p:stCondLst>
-                                  <p:childTnLst>
-                                    <p:set>
-                                      <p:cBhvr>
-                                        <p:cTn id="115" dur="1" fill="hold">
-                                          <p:stCondLst>
-                                            <p:cond delay="0"/>
-                                          </p:stCondLst>
-                                        </p:cTn>
-                                        <p:tgtEl>
-                                          <p:spTgt spid="27"/>
-                                        </p:tgtEl>
-                                        <p:attrNameLst>
-                                          <p:attrName>style.visibility</p:attrName>
-                                        </p:attrNameLst>
-                                      </p:cBhvr>
-                                      <p:to>
-                                        <p:strVal val="visible"/>
-                                      </p:to>
-                                    </p:set>
-                                    <p:animEffect transition="in" filter="fade">
-                                      <p:cBhvr>
-                                        <p:cTn id="116" dur="500"/>
-                                        <p:tgtEl>
-                                          <p:spTgt spid="27"/>
-                                        </p:tgtEl>
-                                      </p:cBhvr>
-                                    </p:animEffect>
-                                  </p:childTnLst>
-                                </p:cTn>
-                              </p:par>
-                              <p:par>
-                                <p:cTn id="120" presetID="10" presetClass="entr" presetSubtype="0" fill="hold" grpId="0" nodeType="withEffect">
-                                  <p:stCondLst>
-                                    <p:cond delay="3800"/>
-                                  </p:stCondLst>
-                                  <p:childTnLst>
-                                    <p:set>
-                                      <p:cBhvr>
-                                        <p:cTn id="118" dur="1" fill="hold">
-                                          <p:stCondLst>
-                                            <p:cond delay="0"/>
-                                          </p:stCondLst>
-                                        </p:cTn>
-                                        <p:tgtEl>
-                                          <p:spTgt spid="51"/>
-                                        </p:tgtEl>
-                                        <p:attrNameLst>
-                                          <p:attrName>style.visibility</p:attrName>
-                                        </p:attrNameLst>
-                                      </p:cBhvr>
-                                      <p:to>
-                                        <p:strVal val="visible"/>
-                                      </p:to>
-                                    </p:set>
-                                    <p:animEffect transition="in" filter="fade">
-                                      <p:cBhvr>
-                                        <p:cTn id="119" dur="500"/>
-                                        <p:tgtEl>
-                                          <p:spTgt spid="51"/>
+                                        <p:cTn id="134" dur="500"/>
+                                        <p:tgtEl>
+                                          <p:spTgt spid="64"/>
                                         </p:tgtEl>
                                       </p:cBhvr>
                                     </p:animEffect>
@@ -4611,34 +5243,34 @@
                           </p:cTn>
                         </p:par>
                         <p:par>
-                          <p:cTn id="121" fill="hold">
+                          <p:cTn id="136" fill="hold">
                             <p:stCondLst>
-                              <p:cond delay="25300"/>
+                              <p:cond delay="25600"/>
                             </p:stCondLst>
                             <p:childTnLst>
                               <p:par>
-                                <p:cTn id="124" presetID="10" presetClass="exit" presetSubtype="0" fill="hold" grpId="0" nodeType="afterEffect">
+                                <p:cTn id="139" presetID="10" presetClass="exit" presetSubtype="0" fill="hold" grpId="0" nodeType="afterEffect">
                                   <p:stCondLst>
                                     <p:cond delay="2200"/>
                                   </p:stCondLst>
                                   <p:childTnLst>
                                     <p:animEffect transition="out" filter="fade">
                                       <p:cBhvr>
-                                        <p:cTn id="122" dur="300"/>
-                                        <p:tgtEl>
-                                          <p:spTgt spid="51"/>
-                                        </p:tgtEl>
-                                      </p:cBhvr>
-                                    </p:animEffect>
-                                    <p:set>
-                                      <p:cBhvr>
-                                        <p:cTn id="123" dur="1" fill="hold">
+                                        <p:cTn id="137" dur="300"/>
+                                        <p:tgtEl>
+                                          <p:spTgt spid="64"/>
+                                        </p:tgtEl>
+                                      </p:cBhvr>
+                                    </p:animEffect>
+                                    <p:set>
+                                      <p:cBhvr>
+                                        <p:cTn id="138" dur="1" fill="hold">
                                           <p:stCondLst>
                                             <p:cond delay="299"/>
                                           </p:stCondLst>
                                         </p:cTn>
                                         <p:tgtEl>
-                                          <p:spTgt spid="51"/>
+                                          <p:spTgt spid="64"/>
                                         </p:tgtEl>
                                         <p:attrNameLst>
                                           <p:attrName>style.visibility</p:attrName>
@@ -4652,20 +5284,20 @@
                                 </p:cTn>
                               </p:par>
                               <p:par>
-                                <p:cTn id="127" presetID="10" presetClass="entr" presetSubtype="0" fill="hold" grpId="0" nodeType="withEffect">
+                                <p:cTn id="142" presetID="10" presetClass="entr" presetSubtype="0" fill="hold" grpId="0" nodeType="withEffect">
                                   <p:stCondLst>
                                     <p:cond delay="2500"/>
                                   </p:stCondLst>
                                   <p:childTnLst>
                                     <p:set>
                                       <p:cBhvr>
-                                        <p:cTn id="125" dur="1" fill="hold">
+                                        <p:cTn id="140" dur="1" fill="hold">
                                           <p:stCondLst>
                                             <p:cond delay="0"/>
                                           </p:stCondLst>
                                         </p:cTn>
                                         <p:tgtEl>
-                                          <p:spTgt spid="43"/>
+                                          <p:spTgt spid="56"/>
                                         </p:tgtEl>
                                         <p:attrNameLst>
                                           <p:attrName>style.visibility</p:attrName>
@@ -4677,30 +5309,30 @@
                                     </p:set>
                                     <p:animEffect transition="in" filter="fade">
                                       <p:cBhvr>
-                                        <p:cTn id="126" dur="500"/>
-                                        <p:tgtEl>
-                                          <p:spTgt spid="43"/>
-                                        </p:tgtEl>
-                                      </p:cBhvr>
-                                    </p:animEffect>
-                                  </p:childTnLst>
-                                </p:cTn>
-                              </p:par>
-                              <p:par>
-                                <p:cTn id="130" presetID="10" presetClass="entr" presetSubtype="0" fill="hold" grpId="0" nodeType="withEffect">
+                                        <p:cTn id="141" dur="500"/>
+                                        <p:tgtEl>
+                                          <p:spTgt spid="56"/>
+                                        </p:tgtEl>
+                                      </p:cBhvr>
+                                    </p:animEffect>
+                                  </p:childTnLst>
+                                </p:cTn>
+                              </p:par>
+                              <p:par>
+                                <p:cTn id="145" presetID="10" presetClass="entr" presetSubtype="0" fill="hold" grpId="0" nodeType="withEffect">
                                   <p:stCondLst>
                                     <p:cond delay="2500"/>
                                   </p:stCondLst>
                                   <p:childTnLst>
                                     <p:set>
                                       <p:cBhvr>
-                                        <p:cTn id="128" dur="1" fill="hold">
+                                        <p:cTn id="143" dur="1" fill="hold">
                                           <p:stCondLst>
                                             <p:cond delay="0"/>
                                           </p:stCondLst>
                                         </p:cTn>
                                         <p:tgtEl>
-                                          <p:spTgt spid="29"/>
+                                          <p:spTgt spid="37"/>
                                         </p:tgtEl>
                                         <p:attrNameLst>
                                           <p:attrName>style.visibility</p:attrName>
@@ -4712,30 +5344,30 @@
                                     </p:set>
                                     <p:animEffect transition="in" filter="fade">
                                       <p:cBhvr>
-                                        <p:cTn id="129" dur="500"/>
-                                        <p:tgtEl>
-                                          <p:spTgt spid="29"/>
-                                        </p:tgtEl>
-                                      </p:cBhvr>
-                                    </p:animEffect>
-                                  </p:childTnLst>
-                                </p:cTn>
-                              </p:par>
-                              <p:par>
-                                <p:cTn id="133" presetID="10" presetClass="entr" presetSubtype="0" fill="hold" grpId="0" nodeType="withEffect">
+                                        <p:cTn id="144" dur="500"/>
+                                        <p:tgtEl>
+                                          <p:spTgt spid="37"/>
+                                        </p:tgtEl>
+                                      </p:cBhvr>
+                                    </p:animEffect>
+                                  </p:childTnLst>
+                                </p:cTn>
+                              </p:par>
+                              <p:par>
+                                <p:cTn id="148" presetID="10" presetClass="entr" presetSubtype="0" fill="hold" grpId="0" nodeType="withEffect">
                                   <p:stCondLst>
                                     <p:cond delay="2500"/>
                                   </p:stCondLst>
                                   <p:childTnLst>
                                     <p:set>
                                       <p:cBhvr>
-                                        <p:cTn id="131" dur="1" fill="hold">
+                                        <p:cTn id="146" dur="1" fill="hold">
                                           <p:stCondLst>
                                             <p:cond delay="0"/>
                                           </p:stCondLst>
                                         </p:cTn>
                                         <p:tgtEl>
-                                          <p:spTgt spid="52"/>
+                                          <p:spTgt spid="65"/>
                                         </p:tgtEl>
                                         <p:attrNameLst>
                                           <p:attrName>style.visibility</p:attrName>
@@ -4747,9 +5379,9 @@
                                     </p:set>
                                     <p:animEffect transition="in" filter="fade">
                                       <p:cBhvr>
-                                        <p:cTn id="132" dur="500"/>
-                                        <p:tgtEl>
-                                          <p:spTgt spid="52"/>
+                                        <p:cTn id="147" dur="500"/>
+                                        <p:tgtEl>
+                                          <p:spTgt spid="65"/>
                                         </p:tgtEl>
                                       </p:cBhvr>
                                     </p:animEffect>
@@ -4760,34 +5392,34 @@
                           </p:cTn>
                         </p:par>
                         <p:par>
-                          <p:cTn id="134" fill="hold">
+                          <p:cTn id="149" fill="hold">
                             <p:stCondLst>
-                              <p:cond delay="28300"/>
+                              <p:cond delay="28600"/>
                             </p:stCondLst>
                             <p:childTnLst>
                               <p:par>
-                                <p:cTn id="137" presetID="10" presetClass="exit" presetSubtype="0" fill="hold" grpId="0" nodeType="afterEffect">
+                                <p:cTn id="152" presetID="10" presetClass="exit" presetSubtype="0" fill="hold" grpId="0" nodeType="afterEffect">
                                   <p:stCondLst>
                                     <p:cond delay="3800"/>
                                   </p:stCondLst>
                                   <p:childTnLst>
                                     <p:animEffect transition="out" filter="fade">
                                       <p:cBhvr>
-                                        <p:cTn id="135" dur="300"/>
-                                        <p:tgtEl>
-                                          <p:spTgt spid="52"/>
-                                        </p:tgtEl>
-                                      </p:cBhvr>
-                                    </p:animEffect>
-                                    <p:set>
-                                      <p:cBhvr>
-                                        <p:cTn id="136" dur="1" fill="hold">
+                                        <p:cTn id="150" dur="300"/>
+                                        <p:tgtEl>
+                                          <p:spTgt spid="65"/>
+                                        </p:tgtEl>
+                                      </p:cBhvr>
+                                    </p:animEffect>
+                                    <p:set>
+                                      <p:cBhvr>
+                                        <p:cTn id="151" dur="1" fill="hold">
                                           <p:stCondLst>
                                             <p:cond delay="299"/>
                                           </p:stCondLst>
                                         </p:cTn>
                                         <p:tgtEl>
-                                          <p:spTgt spid="52"/>
+                                          <p:spTgt spid="65"/>
                                         </p:tgtEl>
                                         <p:attrNameLst>
                                           <p:attrName>style.visibility</p:attrName>
@@ -4801,28 +5433,28 @@
                                 </p:cTn>
                               </p:par>
                               <p:par>
-                                <p:cTn id="140" presetID="10" presetClass="exit" presetSubtype="0" fill="hold" grpId="0" nodeType="withEffect">
+                                <p:cTn id="155" presetID="10" presetClass="exit" presetSubtype="0" fill="hold" grpId="0" nodeType="withEffect">
                                   <p:stCondLst>
                                     <p:cond delay="3800"/>
                                   </p:stCondLst>
                                   <p:childTnLst>
                                     <p:animEffect transition="out" filter="fade">
                                       <p:cBhvr>
-                                        <p:cTn id="138" dur="300"/>
-                                        <p:tgtEl>
-                                          <p:spTgt spid="43"/>
-                                        </p:tgtEl>
-                                      </p:cBhvr>
-                                    </p:animEffect>
-                                    <p:set>
-                                      <p:cBhvr>
-                                        <p:cTn id="139" dur="1" fill="hold">
+                                        <p:cTn id="153" dur="300"/>
+                                        <p:tgtEl>
+                                          <p:spTgt spid="56"/>
+                                        </p:tgtEl>
+                                      </p:cBhvr>
+                                    </p:animEffect>
+                                    <p:set>
+                                      <p:cBhvr>
+                                        <p:cTn id="154" dur="1" fill="hold">
                                           <p:stCondLst>
                                             <p:cond delay="299"/>
                                           </p:stCondLst>
                                         </p:cTn>
                                         <p:tgtEl>
-                                          <p:spTgt spid="43"/>
+                                          <p:spTgt spid="56"/>
                                         </p:tgtEl>
                                         <p:attrNameLst>
                                           <p:attrName>style.visibility</p:attrName>
@@ -4836,28 +5468,28 @@
                                 </p:cTn>
                               </p:par>
                               <p:par>
-                                <p:cTn id="143" presetID="10" presetClass="exit" presetSubtype="0" fill="hold" grpId="0" nodeType="withEffect">
+                                <p:cTn id="158" presetID="10" presetClass="exit" presetSubtype="0" fill="hold" grpId="0" nodeType="withEffect">
                                   <p:stCondLst>
                                     <p:cond delay="3800"/>
                                   </p:stCondLst>
                                   <p:childTnLst>
                                     <p:animEffect transition="out" filter="fade">
                                       <p:cBhvr>
-                                        <p:cTn id="141" dur="300"/>
-                                        <p:tgtEl>
-                                          <p:spTgt spid="29"/>
-                                        </p:tgtEl>
-                                      </p:cBhvr>
-                                    </p:animEffect>
-                                    <p:set>
-                                      <p:cBhvr>
-                                        <p:cTn id="142" dur="1" fill="hold">
+                                        <p:cTn id="156" dur="300"/>
+                                        <p:tgtEl>
+                                          <p:spTgt spid="37"/>
+                                        </p:tgtEl>
+                                      </p:cBhvr>
+                                    </p:animEffect>
+                                    <p:set>
+                                      <p:cBhvr>
+                                        <p:cTn id="157" dur="1" fill="hold">
                                           <p:stCondLst>
                                             <p:cond delay="299"/>
                                           </p:stCondLst>
                                         </p:cTn>
                                         <p:tgtEl>
-                                          <p:spTgt spid="29"/>
+                                          <p:spTgt spid="37"/>
                                         </p:tgtEl>
                                         <p:attrNameLst>
                                           <p:attrName>style.visibility</p:attrName>
@@ -4871,20 +5503,20 @@
                                 </p:cTn>
                               </p:par>
                               <p:par>
-                                <p:cTn id="146" presetID="10" presetClass="entr" presetSubtype="0" fill="hold" grpId="0" nodeType="withEffect">
+                                <p:cTn id="161" presetID="10" presetClass="entr" presetSubtype="0" fill="hold" grpId="0" nodeType="withEffect">
                                   <p:stCondLst>
                                     <p:cond delay="4200"/>
                                   </p:stCondLst>
                                   <p:childTnLst>
                                     <p:set>
                                       <p:cBhvr>
-                                        <p:cTn id="144" dur="1" fill="hold">
+                                        <p:cTn id="159" dur="1" fill="hold">
                                           <p:stCondLst>
                                             <p:cond delay="0"/>
                                           </p:stCondLst>
                                         </p:cTn>
                                         <p:tgtEl>
-                                          <p:spTgt spid="44"/>
+                                          <p:spTgt spid="57"/>
                                         </p:tgtEl>
                                         <p:attrNameLst>
                                           <p:attrName>style.visibility</p:attrName>
@@ -4896,30 +5528,30 @@
                                     </p:set>
                                     <p:animEffect transition="in" filter="fade">
                                       <p:cBhvr>
-                                        <p:cTn id="145" dur="500"/>
-                                        <p:tgtEl>
-                                          <p:spTgt spid="44"/>
-                                        </p:tgtEl>
-                                      </p:cBhvr>
-                                    </p:animEffect>
-                                  </p:childTnLst>
-                                </p:cTn>
-                              </p:par>
-                              <p:par>
-                                <p:cTn id="149" presetID="10" presetClass="entr" presetSubtype="0" fill="hold" grpId="0" nodeType="withEffect">
+                                        <p:cTn id="160" dur="500"/>
+                                        <p:tgtEl>
+                                          <p:spTgt spid="57"/>
+                                        </p:tgtEl>
+                                      </p:cBhvr>
+                                    </p:animEffect>
+                                  </p:childTnLst>
+                                </p:cTn>
+                              </p:par>
+                              <p:par>
+                                <p:cTn id="164" presetID="10" presetClass="entr" presetSubtype="0" fill="hold" grpId="0" nodeType="withEffect">
                                   <p:stCondLst>
                                     <p:cond delay="4200"/>
                                   </p:stCondLst>
                                   <p:childTnLst>
                                     <p:set>
                                       <p:cBhvr>
-                                        <p:cTn id="147" dur="1" fill="hold">
+                                        <p:cTn id="162" dur="1" fill="hold">
                                           <p:stCondLst>
                                             <p:cond delay="0"/>
                                           </p:stCondLst>
                                         </p:cTn>
                                         <p:tgtEl>
-                                          <p:spTgt spid="28"/>
+                                          <p:spTgt spid="36"/>
                                         </p:tgtEl>
                                         <p:attrNameLst>
                                           <p:attrName>style.visibility</p:attrName>
@@ -4931,38 +5563,38 @@
                                     </p:set>
                                     <p:animEffect transition="in" filter="fade">
                                       <p:cBhvr>
-                                        <p:cTn id="148" dur="500"/>
-                                        <p:tgtEl>
-                                          <p:spTgt spid="28"/>
-                                        </p:tgtEl>
-                                      </p:cBhvr>
-                                    </p:animEffect>
-                                  </p:childTnLst>
-                                </p:cTn>
-                              </p:par>
-                              <p:par>
-                                <p:cTn id="152" presetID="10" presetClass="exit" presetSubtype="0" fill="hold" grpId="0" nodeType="withEffect">
+                                        <p:cTn id="163" dur="500"/>
+                                        <p:tgtEl>
+                                          <p:spTgt spid="36"/>
+                                        </p:tgtEl>
+                                      </p:cBhvr>
+                                    </p:animEffect>
+                                  </p:childTnLst>
+                                </p:cTn>
+                              </p:par>
+                              <p:par>
+                                <p:cTn id="167" presetID="10" presetClass="exit" presetSubtype="0" fill="hold" grpId="0" nodeType="withEffect">
                                   <p:stCondLst>
                                     <p:cond delay="4200"/>
                                   </p:stCondLst>
                                   <p:childTnLst>
                                     <p:animEffect transition="out" filter="fade">
                                       <p:cBhvr>
-                                        <p:cTn id="150" dur="300"/>
-                                        <p:tgtEl>
-                                          <p:spTgt spid="19"/>
-                                        </p:tgtEl>
-                                      </p:cBhvr>
-                                    </p:animEffect>
-                                    <p:set>
-                                      <p:cBhvr>
-                                        <p:cTn id="151" dur="1" fill="hold">
+                                        <p:cTn id="165" dur="300"/>
+                                        <p:tgtEl>
+                                          <p:spTgt spid="27"/>
+                                        </p:tgtEl>
+                                      </p:cBhvr>
+                                    </p:animEffect>
+                                    <p:set>
+                                      <p:cBhvr>
+                                        <p:cTn id="166" dur="1" fill="hold">
                                           <p:stCondLst>
                                             <p:cond delay="299"/>
                                           </p:stCondLst>
                                         </p:cTn>
                                         <p:tgtEl>
-                                          <p:spTgt spid="19"/>
+                                          <p:spTgt spid="27"/>
                                         </p:tgtEl>
                                         <p:attrNameLst>
                                           <p:attrName>style.visibility</p:attrName>
@@ -4976,20 +5608,20 @@
                                 </p:cTn>
                               </p:par>
                               <p:par>
-                                <p:cTn id="155" presetID="10" presetClass="entr" presetSubtype="0" fill="hold" grpId="0" nodeType="withEffect">
+                                <p:cTn id="170" presetID="10" presetClass="entr" presetSubtype="0" fill="hold" grpId="0" nodeType="withEffect">
                                   <p:stCondLst>
                                     <p:cond delay="4200"/>
                                   </p:stCondLst>
                                   <p:childTnLst>
                                     <p:set>
                                       <p:cBhvr>
-                                        <p:cTn id="153" dur="1" fill="hold">
+                                        <p:cTn id="168" dur="1" fill="hold">
                                           <p:stCondLst>
                                             <p:cond delay="0"/>
                                           </p:stCondLst>
                                         </p:cTn>
                                         <p:tgtEl>
-                                          <p:spTgt spid="53"/>
+                                          <p:spTgt spid="66"/>
                                         </p:tgtEl>
                                         <p:attrNameLst>
                                           <p:attrName>style.visibility</p:attrName>
@@ -5001,9 +5633,9 @@
                                     </p:set>
                                     <p:animEffect transition="in" filter="fade">
                                       <p:cBhvr>
-                                        <p:cTn id="154" dur="500"/>
-                                        <p:tgtEl>
-                                          <p:spTgt spid="53"/>
+                                        <p:cTn id="169" dur="500"/>
+                                        <p:tgtEl>
+                                          <p:spTgt spid="66"/>
                                         </p:tgtEl>
                                       </p:cBhvr>
                                     </p:animEffect>
@@ -5014,34 +5646,34 @@
                           </p:cTn>
                         </p:par>
                         <p:par>
-                          <p:cTn id="156" fill="hold">
+                          <p:cTn id="171" fill="hold">
                             <p:stCondLst>
-                              <p:cond delay="33000"/>
+                              <p:cond delay="33300"/>
                             </p:stCondLst>
                             <p:childTnLst>
                               <p:par>
-                                <p:cTn id="159" presetID="10" presetClass="exit" presetSubtype="0" fill="hold" grpId="0" nodeType="afterEffect">
+                                <p:cTn id="174" presetID="10" presetClass="exit" presetSubtype="0" fill="hold" grpId="0" nodeType="afterEffect">
                                   <p:stCondLst>
                                     <p:cond delay="3000"/>
                                   </p:stCondLst>
                                   <p:childTnLst>
                                     <p:animEffect transition="out" filter="fade">
                                       <p:cBhvr>
-                                        <p:cTn id="157" dur="300"/>
-                                        <p:tgtEl>
-                                          <p:spTgt spid="53"/>
-                                        </p:tgtEl>
-                                      </p:cBhvr>
-                                    </p:animEffect>
-                                    <p:set>
-                                      <p:cBhvr>
-                                        <p:cTn id="158" dur="1" fill="hold">
+                                        <p:cTn id="172" dur="300"/>
+                                        <p:tgtEl>
+                                          <p:spTgt spid="66"/>
+                                        </p:tgtEl>
+                                      </p:cBhvr>
+                                    </p:animEffect>
+                                    <p:set>
+                                      <p:cBhvr>
+                                        <p:cTn id="173" dur="1" fill="hold">
                                           <p:stCondLst>
                                             <p:cond delay="299"/>
                                           </p:stCondLst>
                                         </p:cTn>
                                         <p:tgtEl>
-                                          <p:spTgt spid="53"/>
+                                          <p:spTgt spid="66"/>
                                         </p:tgtEl>
                                         <p:attrNameLst>
                                           <p:attrName>style.visibility</p:attrName>
@@ -5055,20 +5687,20 @@
                                 </p:cTn>
                               </p:par>
                               <p:par>
-                                <p:cTn id="162" presetID="22" presetClass="entr" presetSubtype="2" fill="hold" nodeType="withEffect">
+                                <p:cTn id="177" presetID="22" presetClass="entr" presetSubtype="2" fill="hold" nodeType="withEffect">
                                   <p:stCondLst>
                                     <p:cond delay="3300"/>
                                   </p:stCondLst>
                                   <p:childTnLst>
                                     <p:set>
                                       <p:cBhvr>
-                                        <p:cTn id="160" dur="1" fill="hold">
+                                        <p:cTn id="175" dur="1" fill="hold">
                                           <p:stCondLst>
                                             <p:cond delay="0"/>
                                           </p:stCondLst>
                                         </p:cTn>
                                         <p:tgtEl>
-                                          <p:spTgt spid="41"/>
+                                          <p:spTgt spid="51"/>
                                         </p:tgtEl>
                                         <p:attrNameLst>
                                           <p:attrName>style.visibility</p:attrName>
@@ -5080,30 +5712,30 @@
                                     </p:set>
                                     <p:animEffect transition="in" filter="wipe(right)">
                                       <p:cBhvr>
-                                        <p:cTn id="161" dur="600"/>
-                                        <p:tgtEl>
-                                          <p:spTgt spid="41"/>
-                                        </p:tgtEl>
-                                      </p:cBhvr>
-                                    </p:animEffect>
-                                  </p:childTnLst>
-                                </p:cTn>
-                              </p:par>
-                              <p:par>
-                                <p:cTn id="165" presetID="10" presetClass="entr" presetSubtype="0" fill="hold" grpId="0" nodeType="withEffect">
+                                        <p:cTn id="176" dur="600"/>
+                                        <p:tgtEl>
+                                          <p:spTgt spid="51"/>
+                                        </p:tgtEl>
+                                      </p:cBhvr>
+                                    </p:animEffect>
+                                  </p:childTnLst>
+                                </p:cTn>
+                              </p:par>
+                              <p:par>
+                                <p:cTn id="180" presetID="10" presetClass="entr" presetSubtype="0" fill="hold" grpId="0" nodeType="withEffect">
                                   <p:stCondLst>
                                     <p:cond delay="3800"/>
                                   </p:stCondLst>
                                   <p:childTnLst>
                                     <p:set>
                                       <p:cBhvr>
-                                        <p:cTn id="163" dur="1" fill="hold">
+                                        <p:cTn id="178" dur="1" fill="hold">
                                           <p:stCondLst>
                                             <p:cond delay="0"/>
                                           </p:stCondLst>
                                         </p:cTn>
                                         <p:tgtEl>
-                                          <p:spTgt spid="12"/>
+                                          <p:spTgt spid="15"/>
                                         </p:tgtEl>
                                         <p:attrNameLst>
                                           <p:attrName>style.visibility</p:attrName>
@@ -5115,30 +5747,65 @@
                                     </p:set>
                                     <p:animEffect transition="in" filter="fade">
                                       <p:cBhvr>
-                                        <p:cTn id="164" dur="500"/>
-                                        <p:tgtEl>
-                                          <p:spTgt spid="12"/>
-                                        </p:tgtEl>
-                                      </p:cBhvr>
-                                    </p:animEffect>
-                                  </p:childTnLst>
-                                </p:cTn>
-                              </p:par>
-                              <p:par>
-                                <p:cTn id="168" presetID="10" presetClass="entr" presetSubtype="0" fill="hold" grpId="0" nodeType="withEffect">
+                                        <p:cTn id="179" dur="500"/>
+                                        <p:tgtEl>
+                                          <p:spTgt spid="15"/>
+                                        </p:tgtEl>
+                                      </p:cBhvr>
+                                    </p:animEffect>
+                                  </p:childTnLst>
+                                </p:cTn>
+                              </p:par>
+                              <p:par>
+                                <p:cTn id="183" presetID="10" presetClass="entr" presetSubtype="0" fill="hold" nodeType="withEffect">
+                                  <p:stCondLst>
+                                    <p:cond delay="3800"/>
+                                  </p:stCondLst>
+                                  <p:childTnLst>
+                                    <p:set>
+                                      <p:cBhvr>
+                                        <p:cTn id="181" dur="1" fill="hold">
+                                          <p:stCondLst>
+                                            <p:cond delay="0"/>
+                                          </p:stCondLst>
+                                        </p:cTn>
+                                        <p:tgtEl>
+                                          <p:spTgt spid="16"/>
+                                        </p:tgtEl>
+                                        <p:attrNameLst>
+                                          <p:attrName>style.visibility</p:attrName>
+                                        </p:attrNameLst>
+                                      </p:cBhvr>
+                                      <p:to>
+                                        <p:strVal val="visible"/>
+                                      </p:to>
+                                    </p:set>
+                                    <p:animEffect transition="in" filter="fade">
+                                      <p:cBhvr>
+                                        <p:cTn id="182" dur="500"/>
+                                        <p:tgtEl>
+                                          <p:spTgt spid="16"/>
+                                        </p:tgtEl>
+                                      </p:cBhvr>
+                                    </p:animEffect>
+                                  </p:childTnLst>
+                                </p:cTn>
+                              </p:par>
+                              <p:par>
+                                <p:cTn id="186" presetID="10" presetClass="entr" presetSubtype="0" fill="hold" grpId="0" nodeType="withEffect">
                                   <p:stCondLst>
                                     <p:cond delay="4000"/>
                                   </p:stCondLst>
                                   <p:childTnLst>
                                     <p:set>
                                       <p:cBhvr>
-                                        <p:cTn id="166" dur="1" fill="hold">
+                                        <p:cTn id="184" dur="1" fill="hold">
                                           <p:stCondLst>
                                             <p:cond delay="0"/>
                                           </p:stCondLst>
                                         </p:cTn>
                                         <p:tgtEl>
-                                          <p:spTgt spid="13"/>
+                                          <p:spTgt spid="17"/>
                                         </p:tgtEl>
                                         <p:attrNameLst>
                                           <p:attrName>style.visibility</p:attrName>
@@ -5150,30 +5817,30 @@
                                     </p:set>
                                     <p:animEffect transition="in" filter="fade">
                                       <p:cBhvr>
-                                        <p:cTn id="167" dur="500"/>
-                                        <p:tgtEl>
-                                          <p:spTgt spid="13"/>
-                                        </p:tgtEl>
-                                      </p:cBhvr>
-                                    </p:animEffect>
-                                  </p:childTnLst>
-                                </p:cTn>
-                              </p:par>
-                              <p:par>
-                                <p:cTn id="171" presetID="10" presetClass="entr" presetSubtype="0" fill="hold" grpId="0" nodeType="withEffect">
+                                        <p:cTn id="185" dur="500"/>
+                                        <p:tgtEl>
+                                          <p:spTgt spid="17"/>
+                                        </p:tgtEl>
+                                      </p:cBhvr>
+                                    </p:animEffect>
+                                  </p:childTnLst>
+                                </p:cTn>
+                              </p:par>
+                              <p:par>
+                                <p:cTn id="189" presetID="10" presetClass="entr" presetSubtype="0" fill="hold" grpId="0" nodeType="withEffect">
                                   <p:stCondLst>
                                     <p:cond delay="4500"/>
                                   </p:stCondLst>
                                   <p:childTnLst>
                                     <p:set>
                                       <p:cBhvr>
-                                        <p:cTn id="169" dur="1" fill="hold">
+                                        <p:cTn id="187" dur="1" fill="hold">
                                           <p:stCondLst>
                                             <p:cond delay="0"/>
                                           </p:stCondLst>
                                         </p:cTn>
                                         <p:tgtEl>
-                                          <p:spTgt spid="14"/>
+                                          <p:spTgt spid="18"/>
                                         </p:tgtEl>
                                         <p:attrNameLst>
                                           <p:attrName>style.visibility</p:attrName>
@@ -5185,30 +5852,30 @@
                                     </p:set>
                                     <p:animEffect transition="in" filter="fade">
                                       <p:cBhvr>
-                                        <p:cTn id="170" dur="500"/>
-                                        <p:tgtEl>
-                                          <p:spTgt spid="14"/>
-                                        </p:tgtEl>
-                                      </p:cBhvr>
-                                    </p:animEffect>
-                                  </p:childTnLst>
-                                </p:cTn>
-                              </p:par>
-                              <p:par>
-                                <p:cTn id="174" presetID="10" presetClass="entr" presetSubtype="0" fill="hold" grpId="0" nodeType="withEffect">
+                                        <p:cTn id="188" dur="500"/>
+                                        <p:tgtEl>
+                                          <p:spTgt spid="18"/>
+                                        </p:tgtEl>
+                                      </p:cBhvr>
+                                    </p:animEffect>
+                                  </p:childTnLst>
+                                </p:cTn>
+                              </p:par>
+                              <p:par>
+                                <p:cTn id="192" presetID="10" presetClass="entr" presetSubtype="0" fill="hold" grpId="0" nodeType="withEffect">
                                   <p:stCondLst>
                                     <p:cond delay="3300"/>
                                   </p:stCondLst>
                                   <p:childTnLst>
                                     <p:set>
                                       <p:cBhvr>
-                                        <p:cTn id="172" dur="1" fill="hold">
+                                        <p:cTn id="190" dur="1" fill="hold">
                                           <p:stCondLst>
                                             <p:cond delay="0"/>
                                           </p:stCondLst>
                                         </p:cTn>
                                         <p:tgtEl>
-                                          <p:spTgt spid="54"/>
+                                          <p:spTgt spid="67"/>
                                         </p:tgtEl>
                                         <p:attrNameLst>
                                           <p:attrName>style.visibility</p:attrName>
@@ -5220,9 +5887,9 @@
                                     </p:set>
                                     <p:animEffect transition="in" filter="fade">
                                       <p:cBhvr>
-                                        <p:cTn id="173" dur="500"/>
-                                        <p:tgtEl>
-                                          <p:spTgt spid="54"/>
+                                        <p:cTn id="191" dur="500"/>
+                                        <p:tgtEl>
+                                          <p:spTgt spid="67"/>
                                         </p:tgtEl>
                                       </p:cBhvr>
                                     </p:animEffect>
@@ -5233,34 +5900,209 @@
                           </p:cTn>
                         </p:par>
                         <p:par>
-                          <p:cTn id="175" fill="hold">
+                          <p:cTn id="193" fill="hold">
                             <p:stCondLst>
-                              <p:cond delay="38000"/>
+                              <p:cond delay="38300"/>
                             </p:stCondLst>
                             <p:childTnLst>
                               <p:par>
-                                <p:cTn id="178" presetID="10" presetClass="exit" presetSubtype="0" fill="hold" grpId="0" nodeType="afterEffect">
-                                  <p:stCondLst>
-                                    <p:cond delay="5000"/>
+                                <p:cTn id="196" presetID="10" presetClass="exit" presetSubtype="0" fill="hold" grpId="0" nodeType="afterEffect">
+                                  <p:stCondLst>
+                                    <p:cond delay="2500"/>
                                   </p:stCondLst>
                                   <p:childTnLst>
                                     <p:animEffect transition="out" filter="fade">
                                       <p:cBhvr>
-                                        <p:cTn id="176" dur="300"/>
+                                        <p:cTn id="194" dur="300"/>
+                                        <p:tgtEl>
+                                          <p:spTgt spid="67"/>
+                                        </p:tgtEl>
+                                      </p:cBhvr>
+                                    </p:animEffect>
+                                    <p:set>
+                                      <p:cBhvr>
+                                        <p:cTn id="195" dur="1" fill="hold">
+                                          <p:stCondLst>
+                                            <p:cond delay="299"/>
+                                          </p:stCondLst>
+                                        </p:cTn>
+                                        <p:tgtEl>
+                                          <p:spTgt spid="67"/>
+                                        </p:tgtEl>
+                                        <p:attrNameLst>
+                                          <p:attrName>style.visibility</p:attrName>
+                                        </p:attrNameLst>
+                                      </p:cBhvr>
+                                      <p:to>
+                                        <p:strVal val="hidden"/>
+                                      </p:to>
+                                    </p:set>
+                                  </p:childTnLst>
+                                </p:cTn>
+                              </p:par>
+                              <p:par>
+                                <p:cTn id="199" presetID="22" presetClass="entr" presetSubtype="2" fill="hold" nodeType="withEffect">
+                                  <p:stCondLst>
+                                    <p:cond delay="2800"/>
+                                  </p:stCondLst>
+                                  <p:childTnLst>
+                                    <p:set>
+                                      <p:cBhvr>
+                                        <p:cTn id="197" dur="1" fill="hold">
+                                          <p:stCondLst>
+                                            <p:cond delay="0"/>
+                                          </p:stCondLst>
+                                        </p:cTn>
+                                        <p:tgtEl>
+                                          <p:spTgt spid="53"/>
+                                        </p:tgtEl>
+                                        <p:attrNameLst>
+                                          <p:attrName>style.visibility</p:attrName>
+                                        </p:attrNameLst>
+                                      </p:cBhvr>
+                                      <p:to>
+                                        <p:strVal val="visible"/>
+                                      </p:to>
+                                    </p:set>
+                                    <p:animEffect transition="in" filter="wipe(right)">
+                                      <p:cBhvr>
+                                        <p:cTn id="198" dur="250"/>
+                                        <p:tgtEl>
+                                          <p:spTgt spid="53"/>
+                                        </p:tgtEl>
+                                      </p:cBhvr>
+                                    </p:animEffect>
+                                  </p:childTnLst>
+                                </p:cTn>
+                              </p:par>
+                              <p:par>
+                                <p:cTn id="202" presetID="22" presetClass="entr" presetSubtype="4" fill="hold" nodeType="withEffect">
+                                  <p:stCondLst>
+                                    <p:cond delay="3050"/>
+                                  </p:stCondLst>
+                                  <p:childTnLst>
+                                    <p:set>
+                                      <p:cBhvr>
+                                        <p:cTn id="200" dur="1" fill="hold">
+                                          <p:stCondLst>
+                                            <p:cond delay="0"/>
+                                          </p:stCondLst>
+                                        </p:cTn>
                                         <p:tgtEl>
                                           <p:spTgt spid="54"/>
                                         </p:tgtEl>
-                                      </p:cBhvr>
-                                    </p:animEffect>
-                                    <p:set>
-                                      <p:cBhvr>
-                                        <p:cTn id="177" dur="1" fill="hold">
+                                        <p:attrNameLst>
+                                          <p:attrName>style.visibility</p:attrName>
+                                        </p:attrNameLst>
+                                      </p:cBhvr>
+                                      <p:to>
+                                        <p:strVal val="visible"/>
+                                      </p:to>
+                                    </p:set>
+                                    <p:animEffect transition="in" filter="wipe(down)">
+                                      <p:cBhvr>
+                                        <p:cTn id="201" dur="700"/>
+                                        <p:tgtEl>
+                                          <p:spTgt spid="54"/>
+                                        </p:tgtEl>
+                                      </p:cBhvr>
+                                    </p:animEffect>
+                                  </p:childTnLst>
+                                </p:cTn>
+                              </p:par>
+                              <p:par>
+                                <p:cTn id="205" presetID="22" presetClass="entr" presetSubtype="8" fill="hold" nodeType="withEffect">
+                                  <p:stCondLst>
+                                    <p:cond delay="3750"/>
+                                  </p:stCondLst>
+                                  <p:childTnLst>
+                                    <p:set>
+                                      <p:cBhvr>
+                                        <p:cTn id="203" dur="1" fill="hold">
+                                          <p:stCondLst>
+                                            <p:cond delay="0"/>
+                                          </p:stCondLst>
+                                        </p:cTn>
+                                        <p:tgtEl>
+                                          <p:spTgt spid="55"/>
+                                        </p:tgtEl>
+                                        <p:attrNameLst>
+                                          <p:attrName>style.visibility</p:attrName>
+                                        </p:attrNameLst>
+                                      </p:cBhvr>
+                                      <p:to>
+                                        <p:strVal val="visible"/>
+                                      </p:to>
+                                    </p:set>
+                                    <p:animEffect transition="in" filter="wipe(left)">
+                                      <p:cBhvr>
+                                        <p:cTn id="204" dur="250"/>
+                                        <p:tgtEl>
+                                          <p:spTgt spid="55"/>
+                                        </p:tgtEl>
+                                      </p:cBhvr>
+                                    </p:animEffect>
+                                  </p:childTnLst>
+                                </p:cTn>
+                              </p:par>
+                              <p:par>
+                                <p:cTn id="208" presetID="10" presetClass="entr" presetSubtype="0" fill="hold" grpId="0" nodeType="withEffect">
+                                  <p:stCondLst>
+                                    <p:cond delay="4000"/>
+                                  </p:stCondLst>
+                                  <p:childTnLst>
+                                    <p:set>
+                                      <p:cBhvr>
+                                        <p:cTn id="206" dur="1" fill="hold">
+                                          <p:stCondLst>
+                                            <p:cond delay="0"/>
+                                          </p:stCondLst>
+                                        </p:cTn>
+                                        <p:tgtEl>
+                                          <p:spTgt spid="12"/>
+                                        </p:tgtEl>
+                                        <p:attrNameLst>
+                                          <p:attrName>style.visibility</p:attrName>
+                                        </p:attrNameLst>
+                                      </p:cBhvr>
+                                      <p:to>
+                                        <p:strVal val="visible"/>
+                                      </p:to>
+                                    </p:set>
+                                    <p:animEffect transition="in" filter="fade">
+                                      <p:cBhvr>
+                                        <p:cTn id="207" dur="500"/>
+                                        <p:tgtEl>
+                                          <p:spTgt spid="12"/>
+                                        </p:tgtEl>
+                                      </p:cBhvr>
+                                    </p:animEffect>
+                                  </p:childTnLst>
+                                </p:cTn>
+                              </p:par>
+                              <p:par>
+                                <p:cTn id="211" presetID="10" presetClass="exit" presetSubtype="0" fill="hold" grpId="0" nodeType="withEffect">
+                                  <p:stCondLst>
+                                    <p:cond delay="4000"/>
+                                  </p:stCondLst>
+                                  <p:childTnLst>
+                                    <p:animEffect transition="out" filter="fade">
+                                      <p:cBhvr>
+                                        <p:cTn id="209" dur="300"/>
+                                        <p:tgtEl>
+                                          <p:spTgt spid="17"/>
+                                        </p:tgtEl>
+                                      </p:cBhvr>
+                                    </p:animEffect>
+                                    <p:set>
+                                      <p:cBhvr>
+                                        <p:cTn id="210" dur="1" fill="hold">
                                           <p:stCondLst>
                                             <p:cond delay="299"/>
                                           </p:stCondLst>
                                         </p:cTn>
                                         <p:tgtEl>
-                                          <p:spTgt spid="54"/>
+                                          <p:spTgt spid="17"/>
                                         </p:tgtEl>
                                         <p:attrNameLst>
                                           <p:attrName>style.visibility</p:attrName>
@@ -5274,230 +6116,20 @@
                                 </p:cTn>
                               </p:par>
                               <p:par>
-                                <p:cTn id="181" presetID="10" presetClass="exit" presetSubtype="0" fill="hold" grpId="0" nodeType="withEffect">
-                                  <p:stCondLst>
-                                    <p:cond delay="5000"/>
-                                  </p:stCondLst>
-                                  <p:childTnLst>
-                                    <p:animEffect transition="out" filter="fade">
-                                      <p:cBhvr>
-                                        <p:cTn id="179" dur="300"/>
-                                        <p:tgtEl>
-                                          <p:spTgt spid="44"/>
-                                        </p:tgtEl>
-                                      </p:cBhvr>
-                                    </p:animEffect>
-                                    <p:set>
-                                      <p:cBhvr>
-                                        <p:cTn id="180" dur="1" fill="hold">
-                                          <p:stCondLst>
-                                            <p:cond delay="299"/>
-                                          </p:stCondLst>
-                                        </p:cTn>
-                                        <p:tgtEl>
-                                          <p:spTgt spid="44"/>
-                                        </p:tgtEl>
-                                        <p:attrNameLst>
-                                          <p:attrName>style.visibility</p:attrName>
-                                        </p:attrNameLst>
-                                      </p:cBhvr>
-                                      <p:to>
-                                        <p:strVal val="hidden"/>
-                                      </p:to>
-                                    </p:set>
-                                  </p:childTnLst>
-                                </p:cTn>
-                              </p:par>
-                              <p:par>
-                                <p:cTn id="184" presetID="10" presetClass="exit" presetSubtype="0" fill="hold" grpId="0" nodeType="withEffect">
-                                  <p:stCondLst>
-                                    <p:cond delay="5000"/>
-                                  </p:stCondLst>
-                                  <p:childTnLst>
-                                    <p:animEffect transition="out" filter="fade">
-                                      <p:cBhvr>
-                                        <p:cTn id="182" dur="300"/>
-                                        <p:tgtEl>
-                                          <p:spTgt spid="28"/>
-                                        </p:tgtEl>
-                                      </p:cBhvr>
-                                    </p:animEffect>
-                                    <p:set>
-                                      <p:cBhvr>
-                                        <p:cTn id="183" dur="1" fill="hold">
-                                          <p:stCondLst>
-                                            <p:cond delay="299"/>
-                                          </p:stCondLst>
-                                        </p:cTn>
-                                        <p:tgtEl>
-                                          <p:spTgt spid="28"/>
-                                        </p:tgtEl>
-                                        <p:attrNameLst>
-                                          <p:attrName>style.visibility</p:attrName>
-                                        </p:attrNameLst>
-                                      </p:cBhvr>
-                                      <p:to>
-                                        <p:strVal val="hidden"/>
-                                      </p:to>
-                                    </p:set>
-                                  </p:childTnLst>
-                                </p:cTn>
-                              </p:par>
-                              <p:par>
-                                <p:cTn id="187" presetID="10" presetClass="exit" presetSubtype="0" fill="hold" nodeType="withEffect">
-                                  <p:stCondLst>
-                                    <p:cond delay="5000"/>
-                                  </p:stCondLst>
-                                  <p:childTnLst>
-                                    <p:animEffect transition="out" filter="fade">
-                                      <p:cBhvr>
-                                        <p:cTn id="185" dur="300"/>
-                                        <p:tgtEl>
-                                          <p:spTgt spid="41"/>
-                                        </p:tgtEl>
-                                      </p:cBhvr>
-                                    </p:animEffect>
-                                    <p:set>
-                                      <p:cBhvr>
-                                        <p:cTn id="186" dur="1" fill="hold">
-                                          <p:stCondLst>
-                                            <p:cond delay="299"/>
-                                          </p:stCondLst>
-                                        </p:cTn>
-                                        <p:tgtEl>
-                                          <p:spTgt spid="41"/>
-                                        </p:tgtEl>
-                                        <p:attrNameLst>
-                                          <p:attrName>style.visibility</p:attrName>
-                                        </p:attrNameLst>
-                                      </p:cBhvr>
-                                      <p:to>
-                                        <p:strVal val="hidden"/>
-                                      </p:to>
-                                    </p:set>
-                                  </p:childTnLst>
-                                </p:cTn>
-                              </p:par>
-                              <p:par>
-                                <p:cTn id="190" presetID="10" presetClass="exit" presetSubtype="0" fill="hold" grpId="0" nodeType="withEffect">
-                                  <p:stCondLst>
-                                    <p:cond delay="5000"/>
-                                  </p:stCondLst>
-                                  <p:childTnLst>
-                                    <p:animEffect transition="out" filter="fade">
-                                      <p:cBhvr>
-                                        <p:cTn id="188" dur="300"/>
-                                        <p:tgtEl>
-                                          <p:spTgt spid="12"/>
-                                        </p:tgtEl>
-                                      </p:cBhvr>
-                                    </p:animEffect>
-                                    <p:set>
-                                      <p:cBhvr>
-                                        <p:cTn id="189" dur="1" fill="hold">
-                                          <p:stCondLst>
-                                            <p:cond delay="299"/>
-                                          </p:stCondLst>
-                                        </p:cTn>
-                                        <p:tgtEl>
-                                          <p:spTgt spid="12"/>
-                                        </p:tgtEl>
-                                        <p:attrNameLst>
-                                          <p:attrName>style.visibility</p:attrName>
-                                        </p:attrNameLst>
-                                      </p:cBhvr>
-                                      <p:to>
-                                        <p:strVal val="hidden"/>
-                                      </p:to>
-                                    </p:set>
-                                  </p:childTnLst>
-                                </p:cTn>
-                              </p:par>
-                              <p:par>
-                                <p:cTn id="193" presetID="10" presetClass="exit" presetSubtype="0" fill="hold" grpId="0" nodeType="withEffect">
-                                  <p:stCondLst>
-                                    <p:cond delay="5000"/>
-                                  </p:stCondLst>
-                                  <p:childTnLst>
-                                    <p:animEffect transition="out" filter="fade">
-                                      <p:cBhvr>
-                                        <p:cTn id="191" dur="300"/>
-                                        <p:tgtEl>
-                                          <p:spTgt spid="13"/>
-                                        </p:tgtEl>
-                                      </p:cBhvr>
-                                    </p:animEffect>
-                                    <p:set>
-                                      <p:cBhvr>
-                                        <p:cTn id="192" dur="1" fill="hold">
-                                          <p:stCondLst>
-                                            <p:cond delay="299"/>
-                                          </p:stCondLst>
-                                        </p:cTn>
-                                        <p:tgtEl>
-                                          <p:spTgt spid="13"/>
-                                        </p:tgtEl>
-                                        <p:attrNameLst>
-                                          <p:attrName>style.visibility</p:attrName>
-                                        </p:attrNameLst>
-                                      </p:cBhvr>
-                                      <p:to>
-                                        <p:strVal val="hidden"/>
-                                      </p:to>
-                                    </p:set>
-                                  </p:childTnLst>
-                                </p:cTn>
-                              </p:par>
-                              <p:par>
-                                <p:cTn id="196" presetID="10" presetClass="exit" presetSubtype="0" fill="hold" grpId="0" nodeType="withEffect">
-                                  <p:stCondLst>
-                                    <p:cond delay="5000"/>
-                                  </p:stCondLst>
-                                  <p:childTnLst>
-                                    <p:animEffect transition="out" filter="fade">
-                                      <p:cBhvr>
-                                        <p:cTn id="194" dur="300"/>
-                                        <p:tgtEl>
-                                          <p:spTgt spid="14"/>
-                                        </p:tgtEl>
-                                      </p:cBhvr>
-                                    </p:animEffect>
-                                    <p:set>
-                                      <p:cBhvr>
-                                        <p:cTn id="195" dur="1" fill="hold">
-                                          <p:stCondLst>
-                                            <p:cond delay="299"/>
-                                          </p:stCondLst>
-                                        </p:cTn>
-                                        <p:tgtEl>
-                                          <p:spTgt spid="14"/>
-                                        </p:tgtEl>
-                                        <p:attrNameLst>
-                                          <p:attrName>style.visibility</p:attrName>
-                                        </p:attrNameLst>
-                                      </p:cBhvr>
-                                      <p:to>
-                                        <p:strVal val="hidden"/>
-                                      </p:to>
-                                    </p:set>
-                                  </p:childTnLst>
-                                </p:cTn>
-                              </p:par>
-                              <p:par>
-                                <p:cTn id="199" presetID="10" presetClass="entr" presetSubtype="0" fill="hold" grpId="0" nodeType="withEffect">
-                                  <p:stCondLst>
-                                    <p:cond delay="5500"/>
-                                  </p:stCondLst>
-                                  <p:childTnLst>
-                                    <p:set>
-                                      <p:cBhvr>
-                                        <p:cTn id="197" dur="1" fill="hold">
+                                <p:cTn id="214" presetID="10" presetClass="entr" presetSubtype="0" fill="hold" grpId="0" nodeType="withEffect">
+                                  <p:stCondLst>
+                                    <p:cond delay="2800"/>
+                                  </p:stCondLst>
+                                  <p:childTnLst>
+                                    <p:set>
+                                      <p:cBhvr>
+                                        <p:cTn id="212" dur="1" fill="hold">
                                           <p:stCondLst>
                                             <p:cond delay="0"/>
                                           </p:stCondLst>
                                         </p:cTn>
                                         <p:tgtEl>
-                                          <p:spTgt spid="45"/>
+                                          <p:spTgt spid="68"/>
                                         </p:tgtEl>
                                         <p:attrNameLst>
                                           <p:attrName>style.visibility</p:attrName>
@@ -5509,79 +6141,9 @@
                                     </p:set>
                                     <p:animEffect transition="in" filter="fade">
                                       <p:cBhvr>
-                                        <p:cTn id="198" dur="500"/>
-                                        <p:tgtEl>
-                                          <p:spTgt spid="45"/>
-                                        </p:tgtEl>
-                                      </p:cBhvr>
-                                    </p:animEffect>
-                                  </p:childTnLst>
-                                </p:cTn>
-                              </p:par>
-                              <p:par>
-                                <p:cTn id="202" presetID="10" presetClass="entr" presetSubtype="0" fill="hold" grpId="0" nodeType="withEffect">
-                                  <p:stCondLst>
-                                    <p:cond delay="5500"/>
-                                  </p:stCondLst>
-                                  <p:childTnLst>
-                                    <p:set>
-                                      <p:cBhvr>
-                                        <p:cTn id="200" dur="1" fill="hold">
-                                          <p:stCondLst>
-                                            <p:cond delay="0"/>
-                                          </p:stCondLst>
-                                        </p:cTn>
-                                        <p:tgtEl>
-                                          <p:spTgt spid="30"/>
-                                        </p:tgtEl>
-                                        <p:attrNameLst>
-                                          <p:attrName>style.visibility</p:attrName>
-                                        </p:attrNameLst>
-                                      </p:cBhvr>
-                                      <p:to>
-                                        <p:strVal val="visible"/>
-                                      </p:to>
-                                    </p:set>
-                                    <p:animEffect transition="in" filter="fade">
-                                      <p:cBhvr>
-                                        <p:cTn id="201" dur="500"/>
-                                        <p:tgtEl>
-                                          <p:spTgt spid="30"/>
-                                        </p:tgtEl>
-                                      </p:cBhvr>
-                                    </p:animEffect>
-                                  </p:childTnLst>
-                                </p:cTn>
-                              </p:par>
-                              <p:par>
-                                <p:cTn id="205" presetID="10" presetClass="entr" presetSubtype="0" fill="hold" grpId="0" nodeType="withEffect">
-                                  <p:stCondLst>
-                                    <p:cond delay="5500"/>
-                                  </p:stCondLst>
-                                  <p:childTnLst>
-                                    <p:set>
-                                      <p:cBhvr>
-                                        <p:cTn id="203" dur="1" fill="hold">
-                                          <p:stCondLst>
-                                            <p:cond delay="0"/>
-                                          </p:stCondLst>
-                                        </p:cTn>
-                                        <p:tgtEl>
-                                          <p:spTgt spid="55"/>
-                                        </p:tgtEl>
-                                        <p:attrNameLst>
-                                          <p:attrName>style.visibility</p:attrName>
-                                        </p:attrNameLst>
-                                      </p:cBhvr>
-                                      <p:to>
-                                        <p:strVal val="visible"/>
-                                      </p:to>
-                                    </p:set>
-                                    <p:animEffect transition="in" filter="fade">
-                                      <p:cBhvr>
-                                        <p:cTn id="204" dur="500"/>
-                                        <p:tgtEl>
-                                          <p:spTgt spid="55"/>
+                                        <p:cTn id="213" dur="500"/>
+                                        <p:tgtEl>
+                                          <p:spTgt spid="68"/>
                                         </p:tgtEl>
                                       </p:cBhvr>
                                     </p:animEffect>
@@ -5592,34 +6154,34 @@
                           </p:cTn>
                         </p:par>
                         <p:par>
-                          <p:cTn id="206" fill="hold">
+                          <p:cTn id="215" fill="hold">
                             <p:stCondLst>
-                              <p:cond delay="44000"/>
+                              <p:cond delay="42800"/>
                             </p:stCondLst>
                             <p:childTnLst>
                               <p:par>
-                                <p:cTn id="209" presetID="10" presetClass="exit" presetSubtype="0" fill="hold" grpId="0" nodeType="afterEffect">
+                                <p:cTn id="218" presetID="10" presetClass="exit" presetSubtype="0" fill="hold" grpId="0" nodeType="afterEffect">
                                   <p:stCondLst>
                                     <p:cond delay="3200"/>
                                   </p:stCondLst>
                                   <p:childTnLst>
                                     <p:animEffect transition="out" filter="fade">
                                       <p:cBhvr>
-                                        <p:cTn id="207" dur="300"/>
-                                        <p:tgtEl>
-                                          <p:spTgt spid="55"/>
-                                        </p:tgtEl>
-                                      </p:cBhvr>
-                                    </p:animEffect>
-                                    <p:set>
-                                      <p:cBhvr>
-                                        <p:cTn id="208" dur="1" fill="hold">
+                                        <p:cTn id="216" dur="300"/>
+                                        <p:tgtEl>
+                                          <p:spTgt spid="68"/>
+                                        </p:tgtEl>
+                                      </p:cBhvr>
+                                    </p:animEffect>
+                                    <p:set>
+                                      <p:cBhvr>
+                                        <p:cTn id="217" dur="1" fill="hold">
                                           <p:stCondLst>
                                             <p:cond delay="299"/>
                                           </p:stCondLst>
                                         </p:cTn>
                                         <p:tgtEl>
-                                          <p:spTgt spid="55"/>
+                                          <p:spTgt spid="68"/>
                                         </p:tgtEl>
                                         <p:attrNameLst>
                                           <p:attrName>style.visibility</p:attrName>
@@ -5633,20 +6195,90 @@
                                 </p:cTn>
                               </p:par>
                               <p:par>
-                                <p:cTn id="212" presetID="22" presetClass="entr" presetSubtype="1" fill="hold" nodeType="withEffect">
-                                  <p:stCondLst>
-                                    <p:cond delay="3500"/>
-                                  </p:stCondLst>
-                                  <p:childTnLst>
-                                    <p:set>
-                                      <p:cBhvr>
-                                        <p:cTn id="210" dur="1" fill="hold">
+                                <p:cTn id="221" presetID="10" presetClass="exit" presetSubtype="0" fill="hold" grpId="0" nodeType="withEffect">
+                                  <p:stCondLst>
+                                    <p:cond delay="3200"/>
+                                  </p:stCondLst>
+                                  <p:childTnLst>
+                                    <p:animEffect transition="out" filter="fade">
+                                      <p:cBhvr>
+                                        <p:cTn id="219" dur="300"/>
+                                        <p:tgtEl>
+                                          <p:spTgt spid="12"/>
+                                        </p:tgtEl>
+                                      </p:cBhvr>
+                                    </p:animEffect>
+                                    <p:set>
+                                      <p:cBhvr>
+                                        <p:cTn id="220" dur="1" fill="hold">
+                                          <p:stCondLst>
+                                            <p:cond delay="299"/>
+                                          </p:stCondLst>
+                                        </p:cTn>
+                                        <p:tgtEl>
+                                          <p:spTgt spid="12"/>
+                                        </p:tgtEl>
+                                        <p:attrNameLst>
+                                          <p:attrName>style.visibility</p:attrName>
+                                        </p:attrNameLst>
+                                      </p:cBhvr>
+                                      <p:to>
+                                        <p:strVal val="hidden"/>
+                                      </p:to>
+                                    </p:set>
+                                  </p:childTnLst>
+                                </p:cTn>
+                              </p:par>
+                              <p:par>
+                                <p:cTn id="224" presetID="10" presetClass="exit" presetSubtype="0" fill="hold" grpId="0" nodeType="withEffect">
+                                  <p:stCondLst>
+                                    <p:cond delay="3200"/>
+                                  </p:stCondLst>
+                                  <p:childTnLst>
+                                    <p:animEffect transition="out" filter="fade">
+                                      <p:cBhvr>
+                                        <p:cTn id="222" dur="300"/>
+                                        <p:tgtEl>
+                                          <p:spTgt spid="23"/>
+                                        </p:tgtEl>
+                                      </p:cBhvr>
+                                    </p:animEffect>
+                                    <p:set>
+                                      <p:cBhvr>
+                                        <p:cTn id="223" dur="1" fill="hold">
+                                          <p:stCondLst>
+                                            <p:cond delay="299"/>
+                                          </p:stCondLst>
+                                        </p:cTn>
+                                        <p:tgtEl>
+                                          <p:spTgt spid="23"/>
+                                        </p:tgtEl>
+                                        <p:attrNameLst>
+                                          <p:attrName>style.visibility</p:attrName>
+                                        </p:attrNameLst>
+                                      </p:cBhvr>
+                                      <p:to>
+                                        <p:strVal val="hidden"/>
+                                      </p:to>
+                                    </p:set>
+                                  </p:childTnLst>
+                                </p:cTn>
+                              </p:par>
+                              <p:par>
+                                <p:cTn id="227" presetID="10" presetClass="entr" presetSubtype="0" fill="hold" grpId="0" nodeType="withEffect">
+                                  <p:stCondLst>
+                                    <p:cond delay="3700"/>
+                                  </p:stCondLst>
+                                  <p:childTnLst>
+                                    <p:set>
+                                      <p:cBhvr>
+                                        <p:cTn id="225" dur="1" fill="hold">
                                           <p:stCondLst>
                                             <p:cond delay="0"/>
                                           </p:stCondLst>
                                         </p:cTn>
                                         <p:tgtEl>
-                                          <p:spTgt spid="42"/>
+                                          <p:spTgt spid="22"/>
                                         </p:tgtEl>
                                         <p:attrNameLst>
                                           <p:attrName>style.visibility</p:attrName>
@@ -5656,32 +6288,32 @@
                                         <p:strVal val="visible"/>
                                       </p:to>
                                     </p:set>
-                                    <p:animEffect transition="in" filter="wipe(up)">
-                                      <p:cBhvr>
-                                        <p:cTn id="211" dur="400"/>
-                                        <p:tgtEl>
-                                          <p:spTgt spid="42"/>
-                                        </p:tgtEl>
-                                      </p:cBhvr>
-                                    </p:animEffect>
-                                  </p:childTnLst>
-                                </p:cTn>
-                              </p:par>
-                              <p:par>
-                                <p:cTn id="215" presetID="10" presetClass="entr" presetSubtype="0" fill="hold" grpId="0" nodeType="withEffect">
+                                    <p:animEffect transition="in" filter="fade">
+                                      <p:cBhvr>
+                                        <p:cTn id="226" dur="500"/>
+                                        <p:tgtEl>
+                                          <p:spTgt spid="22"/>
+                                        </p:tgtEl>
+                                      </p:cBhvr>
+                                    </p:animEffect>
+                                  </p:childTnLst>
+                                </p:cTn>
+                              </p:par>
+                              <p:par>
+                                <p:cTn id="230" presetID="10" presetClass="entr" presetSubtype="0" fill="hold" grpId="0" nodeType="withEffect">
                                   <p:stCondLst>
                                     <p:cond delay="3900"/>
                                   </p:stCondLst>
                                   <p:childTnLst>
                                     <p:set>
                                       <p:cBhvr>
-                                        <p:cTn id="213" dur="1" fill="hold">
+                                        <p:cTn id="228" dur="1" fill="hold">
                                           <p:stCondLst>
                                             <p:cond delay="0"/>
                                           </p:stCondLst>
                                         </p:cTn>
                                         <p:tgtEl>
-                                          <p:spTgt spid="31"/>
+                                          <p:spTgt spid="24"/>
                                         </p:tgtEl>
                                         <p:attrNameLst>
                                           <p:attrName>style.visibility</p:attrName>
@@ -5693,30 +6325,30 @@
                                     </p:set>
                                     <p:animEffect transition="in" filter="fade">
                                       <p:cBhvr>
-                                        <p:cTn id="214" dur="500"/>
-                                        <p:tgtEl>
-                                          <p:spTgt spid="31"/>
-                                        </p:tgtEl>
-                                      </p:cBhvr>
-                                    </p:animEffect>
-                                  </p:childTnLst>
-                                </p:cTn>
-                              </p:par>
-                              <p:par>
-                                <p:cTn id="218" presetID="10" presetClass="entr" presetSubtype="0" fill="hold" grpId="0" nodeType="withEffect">
-                                  <p:stCondLst>
-                                    <p:cond delay="4700"/>
-                                  </p:stCondLst>
-                                  <p:childTnLst>
-                                    <p:set>
-                                      <p:cBhvr>
-                                        <p:cTn id="216" dur="1" fill="hold">
+                                        <p:cTn id="229" dur="500"/>
+                                        <p:tgtEl>
+                                          <p:spTgt spid="24"/>
+                                        </p:tgtEl>
+                                      </p:cBhvr>
+                                    </p:animEffect>
+                                  </p:childTnLst>
+                                </p:cTn>
+                              </p:par>
+                              <p:par>
+                                <p:cTn id="233" presetID="10" presetClass="entr" presetSubtype="0" fill="hold" grpId="0" nodeType="withEffect">
+                                  <p:stCondLst>
+                                    <p:cond delay="3600"/>
+                                  </p:stCondLst>
+                                  <p:childTnLst>
+                                    <p:set>
+                                      <p:cBhvr>
+                                        <p:cTn id="231" dur="1" fill="hold">
                                           <p:stCondLst>
                                             <p:cond delay="0"/>
                                           </p:stCondLst>
                                         </p:cTn>
                                         <p:tgtEl>
-                                          <p:spTgt spid="32"/>
+                                          <p:spTgt spid="69"/>
                                         </p:tgtEl>
                                         <p:attrNameLst>
                                           <p:attrName>style.visibility</p:attrName>
@@ -5728,44 +6360,9 @@
                                     </p:set>
                                     <p:animEffect transition="in" filter="fade">
                                       <p:cBhvr>
-                                        <p:cTn id="217" dur="500"/>
-                                        <p:tgtEl>
-                                          <p:spTgt spid="32"/>
-                                        </p:tgtEl>
-                                      </p:cBhvr>
-                                    </p:animEffect>
-                                  </p:childTnLst>
-                                </p:cTn>
-                              </p:par>
-                              <p:par>
-                                <p:cTn id="221" presetID="10" presetClass="entr" presetSubtype="0" fill="hold" grpId="0" nodeType="withEffect">
-                                  <p:stCondLst>
-                                    <p:cond delay="3500"/>
-                                  </p:stCondLst>
-                                  <p:childTnLst>
-                                    <p:set>
-                                      <p:cBhvr>
-                                        <p:cTn id="219" dur="1" fill="hold">
-                                          <p:stCondLst>
-                                            <p:cond delay="0"/>
-                                          </p:stCondLst>
-                                        </p:cTn>
-                                        <p:tgtEl>
-                                          <p:spTgt spid="56"/>
-                                        </p:tgtEl>
-                                        <p:attrNameLst>
-                                          <p:attrName>style.visibility</p:attrName>
-                                        </p:attrNameLst>
-                                      </p:cBhvr>
-                                      <p:to>
-                                        <p:strVal val="visible"/>
-                                      </p:to>
-                                    </p:set>
-                                    <p:animEffect transition="in" filter="fade">
-                                      <p:cBhvr>
-                                        <p:cTn id="220" dur="500"/>
-                                        <p:tgtEl>
-                                          <p:spTgt spid="56"/>
+                                        <p:cTn id="232" dur="500"/>
+                                        <p:tgtEl>
+                                          <p:spTgt spid="69"/>
                                         </p:tgtEl>
                                       </p:cBhvr>
                                     </p:animEffect>
@@ -5776,34 +6373,568 @@
                           </p:cTn>
                         </p:par>
                         <p:par>
-                          <p:cTn id="222" fill="hold">
+                          <p:cTn id="234" fill="hold">
                             <p:stCondLst>
-                              <p:cond delay="49200"/>
+                              <p:cond delay="47200"/>
                             </p:stCondLst>
                             <p:childTnLst>
                               <p:par>
-                                <p:cTn id="225" presetID="10" presetClass="exit" presetSubtype="0" fill="hold" grpId="0" nodeType="afterEffect">
+                                <p:cTn id="237" presetID="10" presetClass="exit" presetSubtype="0" fill="hold" grpId="0" nodeType="afterEffect">
+                                  <p:stCondLst>
+                                    <p:cond delay="4000"/>
+                                  </p:stCondLst>
+                                  <p:childTnLst>
+                                    <p:animEffect transition="out" filter="fade">
+                                      <p:cBhvr>
+                                        <p:cTn id="235" dur="300"/>
+                                        <p:tgtEl>
+                                          <p:spTgt spid="69"/>
+                                        </p:tgtEl>
+                                      </p:cBhvr>
+                                    </p:animEffect>
+                                    <p:set>
+                                      <p:cBhvr>
+                                        <p:cTn id="236" dur="1" fill="hold">
+                                          <p:stCondLst>
+                                            <p:cond delay="299"/>
+                                          </p:stCondLst>
+                                        </p:cTn>
+                                        <p:tgtEl>
+                                          <p:spTgt spid="69"/>
+                                        </p:tgtEl>
+                                        <p:attrNameLst>
+                                          <p:attrName>style.visibility</p:attrName>
+                                        </p:attrNameLst>
+                                      </p:cBhvr>
+                                      <p:to>
+                                        <p:strVal val="hidden"/>
+                                      </p:to>
+                                    </p:set>
+                                  </p:childTnLst>
+                                </p:cTn>
+                              </p:par>
+                              <p:par>
+                                <p:cTn id="240" presetID="10" presetClass="exit" presetSubtype="0" fill="hold" grpId="0" nodeType="withEffect">
+                                  <p:stCondLst>
+                                    <p:cond delay="4000"/>
+                                  </p:stCondLst>
+                                  <p:childTnLst>
+                                    <p:animEffect transition="out" filter="fade">
+                                      <p:cBhvr>
+                                        <p:cTn id="238" dur="300"/>
+                                        <p:tgtEl>
+                                          <p:spTgt spid="57"/>
+                                        </p:tgtEl>
+                                      </p:cBhvr>
+                                    </p:animEffect>
+                                    <p:set>
+                                      <p:cBhvr>
+                                        <p:cTn id="239" dur="1" fill="hold">
+                                          <p:stCondLst>
+                                            <p:cond delay="299"/>
+                                          </p:stCondLst>
+                                        </p:cTn>
+                                        <p:tgtEl>
+                                          <p:spTgt spid="57"/>
+                                        </p:tgtEl>
+                                        <p:attrNameLst>
+                                          <p:attrName>style.visibility</p:attrName>
+                                        </p:attrNameLst>
+                                      </p:cBhvr>
+                                      <p:to>
+                                        <p:strVal val="hidden"/>
+                                      </p:to>
+                                    </p:set>
+                                  </p:childTnLst>
+                                </p:cTn>
+                              </p:par>
+                              <p:par>
+                                <p:cTn id="243" presetID="10" presetClass="exit" presetSubtype="0" fill="hold" grpId="0" nodeType="withEffect">
+                                  <p:stCondLst>
+                                    <p:cond delay="4000"/>
+                                  </p:stCondLst>
+                                  <p:childTnLst>
+                                    <p:animEffect transition="out" filter="fade">
+                                      <p:cBhvr>
+                                        <p:cTn id="241" dur="300"/>
+                                        <p:tgtEl>
+                                          <p:spTgt spid="36"/>
+                                        </p:tgtEl>
+                                      </p:cBhvr>
+                                    </p:animEffect>
+                                    <p:set>
+                                      <p:cBhvr>
+                                        <p:cTn id="242" dur="1" fill="hold">
+                                          <p:stCondLst>
+                                            <p:cond delay="299"/>
+                                          </p:stCondLst>
+                                        </p:cTn>
+                                        <p:tgtEl>
+                                          <p:spTgt spid="36"/>
+                                        </p:tgtEl>
+                                        <p:attrNameLst>
+                                          <p:attrName>style.visibility</p:attrName>
+                                        </p:attrNameLst>
+                                      </p:cBhvr>
+                                      <p:to>
+                                        <p:strVal val="hidden"/>
+                                      </p:to>
+                                    </p:set>
+                                  </p:childTnLst>
+                                </p:cTn>
+                              </p:par>
+                              <p:par>
+                                <p:cTn id="246" presetID="10" presetClass="exit" presetSubtype="0" fill="hold" nodeType="withEffect">
+                                  <p:stCondLst>
+                                    <p:cond delay="4000"/>
+                                  </p:stCondLst>
+                                  <p:childTnLst>
+                                    <p:animEffect transition="out" filter="fade">
+                                      <p:cBhvr>
+                                        <p:cTn id="244" dur="300"/>
+                                        <p:tgtEl>
+                                          <p:spTgt spid="51"/>
+                                        </p:tgtEl>
+                                      </p:cBhvr>
+                                    </p:animEffect>
+                                    <p:set>
+                                      <p:cBhvr>
+                                        <p:cTn id="245" dur="1" fill="hold">
+                                          <p:stCondLst>
+                                            <p:cond delay="299"/>
+                                          </p:stCondLst>
+                                        </p:cTn>
+                                        <p:tgtEl>
+                                          <p:spTgt spid="51"/>
+                                        </p:tgtEl>
+                                        <p:attrNameLst>
+                                          <p:attrName>style.visibility</p:attrName>
+                                        </p:attrNameLst>
+                                      </p:cBhvr>
+                                      <p:to>
+                                        <p:strVal val="hidden"/>
+                                      </p:to>
+                                    </p:set>
+                                  </p:childTnLst>
+                                </p:cTn>
+                              </p:par>
+                              <p:par>
+                                <p:cTn id="249" presetID="10" presetClass="exit" presetSubtype="0" fill="hold" grpId="0" nodeType="withEffect">
+                                  <p:stCondLst>
+                                    <p:cond delay="4000"/>
+                                  </p:stCondLst>
+                                  <p:childTnLst>
+                                    <p:animEffect transition="out" filter="fade">
+                                      <p:cBhvr>
+                                        <p:cTn id="247" dur="300"/>
+                                        <p:tgtEl>
+                                          <p:spTgt spid="15"/>
+                                        </p:tgtEl>
+                                      </p:cBhvr>
+                                    </p:animEffect>
+                                    <p:set>
+                                      <p:cBhvr>
+                                        <p:cTn id="248" dur="1" fill="hold">
+                                          <p:stCondLst>
+                                            <p:cond delay="299"/>
+                                          </p:stCondLst>
+                                        </p:cTn>
+                                        <p:tgtEl>
+                                          <p:spTgt spid="15"/>
+                                        </p:tgtEl>
+                                        <p:attrNameLst>
+                                          <p:attrName>style.visibility</p:attrName>
+                                        </p:attrNameLst>
+                                      </p:cBhvr>
+                                      <p:to>
+                                        <p:strVal val="hidden"/>
+                                      </p:to>
+                                    </p:set>
+                                  </p:childTnLst>
+                                </p:cTn>
+                              </p:par>
+                              <p:par>
+                                <p:cTn id="252" presetID="10" presetClass="exit" presetSubtype="0" fill="hold" nodeType="withEffect">
+                                  <p:stCondLst>
+                                    <p:cond delay="4000"/>
+                                  </p:stCondLst>
+                                  <p:childTnLst>
+                                    <p:animEffect transition="out" filter="fade">
+                                      <p:cBhvr>
+                                        <p:cTn id="250" dur="300"/>
+                                        <p:tgtEl>
+                                          <p:spTgt spid="16"/>
+                                        </p:tgtEl>
+                                      </p:cBhvr>
+                                    </p:animEffect>
+                                    <p:set>
+                                      <p:cBhvr>
+                                        <p:cTn id="251" dur="1" fill="hold">
+                                          <p:stCondLst>
+                                            <p:cond delay="299"/>
+                                          </p:stCondLst>
+                                        </p:cTn>
+                                        <p:tgtEl>
+                                          <p:spTgt spid="16"/>
+                                        </p:tgtEl>
+                                        <p:attrNameLst>
+                                          <p:attrName>style.visibility</p:attrName>
+                                        </p:attrNameLst>
+                                      </p:cBhvr>
+                                      <p:to>
+                                        <p:strVal val="hidden"/>
+                                      </p:to>
+                                    </p:set>
+                                  </p:childTnLst>
+                                </p:cTn>
+                              </p:par>
+                              <p:par>
+                                <p:cTn id="255" presetID="10" presetClass="exit" presetSubtype="0" fill="hold" grpId="0" nodeType="withEffect">
+                                  <p:stCondLst>
+                                    <p:cond delay="4000"/>
+                                  </p:stCondLst>
+                                  <p:childTnLst>
+                                    <p:animEffect transition="out" filter="fade">
+                                      <p:cBhvr>
+                                        <p:cTn id="253" dur="300"/>
+                                        <p:tgtEl>
+                                          <p:spTgt spid="18"/>
+                                        </p:tgtEl>
+                                      </p:cBhvr>
+                                    </p:animEffect>
+                                    <p:set>
+                                      <p:cBhvr>
+                                        <p:cTn id="254" dur="1" fill="hold">
+                                          <p:stCondLst>
+                                            <p:cond delay="299"/>
+                                          </p:stCondLst>
+                                        </p:cTn>
+                                        <p:tgtEl>
+                                          <p:spTgt spid="18"/>
+                                        </p:tgtEl>
+                                        <p:attrNameLst>
+                                          <p:attrName>style.visibility</p:attrName>
+                                        </p:attrNameLst>
+                                      </p:cBhvr>
+                                      <p:to>
+                                        <p:strVal val="hidden"/>
+                                      </p:to>
+                                    </p:set>
+                                  </p:childTnLst>
+                                </p:cTn>
+                              </p:par>
+                              <p:par>
+                                <p:cTn id="258" presetID="10" presetClass="exit" presetSubtype="0" fill="hold" nodeType="withEffect">
+                                  <p:stCondLst>
+                                    <p:cond delay="4000"/>
+                                  </p:stCondLst>
+                                  <p:childTnLst>
+                                    <p:animEffect transition="out" filter="fade">
+                                      <p:cBhvr>
+                                        <p:cTn id="256" dur="300"/>
+                                        <p:tgtEl>
+                                          <p:spTgt spid="53"/>
+                                        </p:tgtEl>
+                                      </p:cBhvr>
+                                    </p:animEffect>
+                                    <p:set>
+                                      <p:cBhvr>
+                                        <p:cTn id="257" dur="1" fill="hold">
+                                          <p:stCondLst>
+                                            <p:cond delay="299"/>
+                                          </p:stCondLst>
+                                        </p:cTn>
+                                        <p:tgtEl>
+                                          <p:spTgt spid="53"/>
+                                        </p:tgtEl>
+                                        <p:attrNameLst>
+                                          <p:attrName>style.visibility</p:attrName>
+                                        </p:attrNameLst>
+                                      </p:cBhvr>
+                                      <p:to>
+                                        <p:strVal val="hidden"/>
+                                      </p:to>
+                                    </p:set>
+                                  </p:childTnLst>
+                                </p:cTn>
+                              </p:par>
+                              <p:par>
+                                <p:cTn id="261" presetID="10" presetClass="exit" presetSubtype="0" fill="hold" nodeType="withEffect">
+                                  <p:stCondLst>
+                                    <p:cond delay="4000"/>
+                                  </p:stCondLst>
+                                  <p:childTnLst>
+                                    <p:animEffect transition="out" filter="fade">
+                                      <p:cBhvr>
+                                        <p:cTn id="259" dur="300"/>
+                                        <p:tgtEl>
+                                          <p:spTgt spid="54"/>
+                                        </p:tgtEl>
+                                      </p:cBhvr>
+                                    </p:animEffect>
+                                    <p:set>
+                                      <p:cBhvr>
+                                        <p:cTn id="260" dur="1" fill="hold">
+                                          <p:stCondLst>
+                                            <p:cond delay="299"/>
+                                          </p:stCondLst>
+                                        </p:cTn>
+                                        <p:tgtEl>
+                                          <p:spTgt spid="54"/>
+                                        </p:tgtEl>
+                                        <p:attrNameLst>
+                                          <p:attrName>style.visibility</p:attrName>
+                                        </p:attrNameLst>
+                                      </p:cBhvr>
+                                      <p:to>
+                                        <p:strVal val="hidden"/>
+                                      </p:to>
+                                    </p:set>
+                                  </p:childTnLst>
+                                </p:cTn>
+                              </p:par>
+                              <p:par>
+                                <p:cTn id="264" presetID="10" presetClass="exit" presetSubtype="0" fill="hold" nodeType="withEffect">
+                                  <p:stCondLst>
+                                    <p:cond delay="4000"/>
+                                  </p:stCondLst>
+                                  <p:childTnLst>
+                                    <p:animEffect transition="out" filter="fade">
+                                      <p:cBhvr>
+                                        <p:cTn id="262" dur="300"/>
+                                        <p:tgtEl>
+                                          <p:spTgt spid="55"/>
+                                        </p:tgtEl>
+                                      </p:cBhvr>
+                                    </p:animEffect>
+                                    <p:set>
+                                      <p:cBhvr>
+                                        <p:cTn id="263" dur="1" fill="hold">
+                                          <p:stCondLst>
+                                            <p:cond delay="299"/>
+                                          </p:stCondLst>
+                                        </p:cTn>
+                                        <p:tgtEl>
+                                          <p:spTgt spid="55"/>
+                                        </p:tgtEl>
+                                        <p:attrNameLst>
+                                          <p:attrName>style.visibility</p:attrName>
+                                        </p:attrNameLst>
+                                      </p:cBhvr>
+                                      <p:to>
+                                        <p:strVal val="hidden"/>
+                                      </p:to>
+                                    </p:set>
+                                  </p:childTnLst>
+                                </p:cTn>
+                              </p:par>
+                              <p:par>
+                                <p:cTn id="267" presetID="10" presetClass="exit" presetSubtype="0" fill="hold" grpId="0" nodeType="withEffect">
+                                  <p:stCondLst>
+                                    <p:cond delay="4000"/>
+                                  </p:stCondLst>
+                                  <p:childTnLst>
+                                    <p:animEffect transition="out" filter="fade">
+                                      <p:cBhvr>
+                                        <p:cTn id="265" dur="300"/>
+                                        <p:tgtEl>
+                                          <p:spTgt spid="22"/>
+                                        </p:tgtEl>
+                                      </p:cBhvr>
+                                    </p:animEffect>
+                                    <p:set>
+                                      <p:cBhvr>
+                                        <p:cTn id="266" dur="1" fill="hold">
+                                          <p:stCondLst>
+                                            <p:cond delay="299"/>
+                                          </p:stCondLst>
+                                        </p:cTn>
+                                        <p:tgtEl>
+                                          <p:spTgt spid="22"/>
+                                        </p:tgtEl>
+                                        <p:attrNameLst>
+                                          <p:attrName>style.visibility</p:attrName>
+                                        </p:attrNameLst>
+                                      </p:cBhvr>
+                                      <p:to>
+                                        <p:strVal val="hidden"/>
+                                      </p:to>
+                                    </p:set>
+                                  </p:childTnLst>
+                                </p:cTn>
+                              </p:par>
+                              <p:par>
+                                <p:cTn id="270" presetID="10" presetClass="exit" presetSubtype="0" fill="hold" grpId="0" nodeType="withEffect">
+                                  <p:stCondLst>
+                                    <p:cond delay="4000"/>
+                                  </p:stCondLst>
+                                  <p:childTnLst>
+                                    <p:animEffect transition="out" filter="fade">
+                                      <p:cBhvr>
+                                        <p:cTn id="268" dur="300"/>
+                                        <p:tgtEl>
+                                          <p:spTgt spid="24"/>
+                                        </p:tgtEl>
+                                      </p:cBhvr>
+                                    </p:animEffect>
+                                    <p:set>
+                                      <p:cBhvr>
+                                        <p:cTn id="269" dur="1" fill="hold">
+                                          <p:stCondLst>
+                                            <p:cond delay="299"/>
+                                          </p:stCondLst>
+                                        </p:cTn>
+                                        <p:tgtEl>
+                                          <p:spTgt spid="24"/>
+                                        </p:tgtEl>
+                                        <p:attrNameLst>
+                                          <p:attrName>style.visibility</p:attrName>
+                                        </p:attrNameLst>
+                                      </p:cBhvr>
+                                      <p:to>
+                                        <p:strVal val="hidden"/>
+                                      </p:to>
+                                    </p:set>
+                                  </p:childTnLst>
+                                </p:cTn>
+                              </p:par>
+                              <p:par>
+                                <p:cTn id="273" presetID="10" presetClass="entr" presetSubtype="0" fill="hold" grpId="0" nodeType="withEffect">
                                   <p:stCondLst>
                                     <p:cond delay="4500"/>
                                   </p:stCondLst>
                                   <p:childTnLst>
+                                    <p:set>
+                                      <p:cBhvr>
+                                        <p:cTn id="271" dur="1" fill="hold">
+                                          <p:stCondLst>
+                                            <p:cond delay="0"/>
+                                          </p:stCondLst>
+                                        </p:cTn>
+                                        <p:tgtEl>
+                                          <p:spTgt spid="58"/>
+                                        </p:tgtEl>
+                                        <p:attrNameLst>
+                                          <p:attrName>style.visibility</p:attrName>
+                                        </p:attrNameLst>
+                                      </p:cBhvr>
+                                      <p:to>
+                                        <p:strVal val="visible"/>
+                                      </p:to>
+                                    </p:set>
+                                    <p:animEffect transition="in" filter="fade">
+                                      <p:cBhvr>
+                                        <p:cTn id="272" dur="500"/>
+                                        <p:tgtEl>
+                                          <p:spTgt spid="58"/>
+                                        </p:tgtEl>
+                                      </p:cBhvr>
+                                    </p:animEffect>
+                                  </p:childTnLst>
+                                </p:cTn>
+                              </p:par>
+                              <p:par>
+                                <p:cTn id="276" presetID="10" presetClass="entr" presetSubtype="0" fill="hold" grpId="0" nodeType="withEffect">
+                                  <p:stCondLst>
+                                    <p:cond delay="4500"/>
+                                  </p:stCondLst>
+                                  <p:childTnLst>
+                                    <p:set>
+                                      <p:cBhvr>
+                                        <p:cTn id="274" dur="1" fill="hold">
+                                          <p:stCondLst>
+                                            <p:cond delay="0"/>
+                                          </p:stCondLst>
+                                        </p:cTn>
+                                        <p:tgtEl>
+                                          <p:spTgt spid="38"/>
+                                        </p:tgtEl>
+                                        <p:attrNameLst>
+                                          <p:attrName>style.visibility</p:attrName>
+                                        </p:attrNameLst>
+                                      </p:cBhvr>
+                                      <p:to>
+                                        <p:strVal val="visible"/>
+                                      </p:to>
+                                    </p:set>
+                                    <p:animEffect transition="in" filter="fade">
+                                      <p:cBhvr>
+                                        <p:cTn id="275" dur="500"/>
+                                        <p:tgtEl>
+                                          <p:spTgt spid="38"/>
+                                        </p:tgtEl>
+                                      </p:cBhvr>
+                                    </p:animEffect>
+                                  </p:childTnLst>
+                                </p:cTn>
+                              </p:par>
+                              <p:par>
+                                <p:cTn id="279" presetID="10" presetClass="entr" presetSubtype="0" fill="hold" grpId="0" nodeType="withEffect">
+                                  <p:stCondLst>
+                                    <p:cond delay="4500"/>
+                                  </p:stCondLst>
+                                  <p:childTnLst>
+                                    <p:set>
+                                      <p:cBhvr>
+                                        <p:cTn id="277" dur="1" fill="hold">
+                                          <p:stCondLst>
+                                            <p:cond delay="0"/>
+                                          </p:stCondLst>
+                                        </p:cTn>
+                                        <p:tgtEl>
+                                          <p:spTgt spid="70"/>
+                                        </p:tgtEl>
+                                        <p:attrNameLst>
+                                          <p:attrName>style.visibility</p:attrName>
+                                        </p:attrNameLst>
+                                      </p:cBhvr>
+                                      <p:to>
+                                        <p:strVal val="visible"/>
+                                      </p:to>
+                                    </p:set>
+                                    <p:animEffect transition="in" filter="fade">
+                                      <p:cBhvr>
+                                        <p:cTn id="278" dur="500"/>
+                                        <p:tgtEl>
+                                          <p:spTgt spid="70"/>
+                                        </p:tgtEl>
+                                      </p:cBhvr>
+                                    </p:animEffect>
+                                  </p:childTnLst>
+                                </p:cTn>
+                              </p:par>
+                            </p:childTnLst>
+                          </p:cTn>
+                        </p:par>
+                        <p:par>
+                          <p:cTn id="280" fill="hold">
+                            <p:stCondLst>
+                              <p:cond delay="52200"/>
+                            </p:stCondLst>
+                            <p:childTnLst>
+                              <p:par>
+                                <p:cTn id="283" presetID="10" presetClass="exit" presetSubtype="0" fill="hold" grpId="0" nodeType="afterEffect">
+                                  <p:stCondLst>
+                                    <p:cond delay="3200"/>
+                                  </p:stCondLst>
+                                  <p:childTnLst>
                                     <p:animEffect transition="out" filter="fade">
                                       <p:cBhvr>
-                                        <p:cTn id="223" dur="300"/>
-                                        <p:tgtEl>
-                                          <p:spTgt spid="56"/>
-                                        </p:tgtEl>
-                                      </p:cBhvr>
-                                    </p:animEffect>
-                                    <p:set>
-                                      <p:cBhvr>
-                                        <p:cTn id="224" dur="1" fill="hold">
+                                        <p:cTn id="281" dur="300"/>
+                                        <p:tgtEl>
+                                          <p:spTgt spid="70"/>
+                                        </p:tgtEl>
+                                      </p:cBhvr>
+                                    </p:animEffect>
+                                    <p:set>
+                                      <p:cBhvr>
+                                        <p:cTn id="282" dur="1" fill="hold">
                                           <p:stCondLst>
                                             <p:cond delay="299"/>
                                           </p:stCondLst>
                                         </p:cTn>
                                         <p:tgtEl>
-                                          <p:spTgt spid="56"/>
+                                          <p:spTgt spid="70"/>
                                         </p:tgtEl>
                                         <p:attrNameLst>
                                           <p:attrName>style.visibility</p:attrName>
@@ -5817,28 +6948,212 @@
                                 </p:cTn>
                               </p:par>
                               <p:par>
-                                <p:cTn id="228" presetID="10" presetClass="exit" presetSubtype="0" fill="hold" grpId="0" nodeType="withEffect">
+                                <p:cTn id="286" presetID="22" presetClass="entr" presetSubtype="1" fill="hold" nodeType="withEffect">
+                                  <p:stCondLst>
+                                    <p:cond delay="3500"/>
+                                  </p:stCondLst>
+                                  <p:childTnLst>
+                                    <p:set>
+                                      <p:cBhvr>
+                                        <p:cTn id="284" dur="1" fill="hold">
+                                          <p:stCondLst>
+                                            <p:cond delay="0"/>
+                                          </p:stCondLst>
+                                        </p:cTn>
+                                        <p:tgtEl>
+                                          <p:spTgt spid="52"/>
+                                        </p:tgtEl>
+                                        <p:attrNameLst>
+                                          <p:attrName>style.visibility</p:attrName>
+                                        </p:attrNameLst>
+                                      </p:cBhvr>
+                                      <p:to>
+                                        <p:strVal val="visible"/>
+                                      </p:to>
+                                    </p:set>
+                                    <p:animEffect transition="in" filter="wipe(up)">
+                                      <p:cBhvr>
+                                        <p:cTn id="285" dur="400"/>
+                                        <p:tgtEl>
+                                          <p:spTgt spid="52"/>
+                                        </p:tgtEl>
+                                      </p:cBhvr>
+                                    </p:animEffect>
+                                  </p:childTnLst>
+                                </p:cTn>
+                              </p:par>
+                              <p:par>
+                                <p:cTn id="289" presetID="10" presetClass="entr" presetSubtype="0" fill="hold" grpId="0" nodeType="withEffect">
+                                  <p:stCondLst>
+                                    <p:cond delay="3900"/>
+                                  </p:stCondLst>
+                                  <p:childTnLst>
+                                    <p:set>
+                                      <p:cBhvr>
+                                        <p:cTn id="287" dur="1" fill="hold">
+                                          <p:stCondLst>
+                                            <p:cond delay="0"/>
+                                          </p:stCondLst>
+                                        </p:cTn>
+                                        <p:tgtEl>
+                                          <p:spTgt spid="39"/>
+                                        </p:tgtEl>
+                                        <p:attrNameLst>
+                                          <p:attrName>style.visibility</p:attrName>
+                                        </p:attrNameLst>
+                                      </p:cBhvr>
+                                      <p:to>
+                                        <p:strVal val="visible"/>
+                                      </p:to>
+                                    </p:set>
+                                    <p:animEffect transition="in" filter="fade">
+                                      <p:cBhvr>
+                                        <p:cTn id="288" dur="500"/>
+                                        <p:tgtEl>
+                                          <p:spTgt spid="39"/>
+                                        </p:tgtEl>
+                                      </p:cBhvr>
+                                    </p:animEffect>
+                                  </p:childTnLst>
+                                </p:cTn>
+                              </p:par>
+                              <p:par>
+                                <p:cTn id="292" presetID="10" presetClass="entr" presetSubtype="0" fill="hold" nodeType="withEffect">
+                                  <p:stCondLst>
+                                    <p:cond delay="3900"/>
+                                  </p:stCondLst>
+                                  <p:childTnLst>
+                                    <p:set>
+                                      <p:cBhvr>
+                                        <p:cTn id="290" dur="1" fill="hold">
+                                          <p:stCondLst>
+                                            <p:cond delay="0"/>
+                                          </p:stCondLst>
+                                        </p:cTn>
+                                        <p:tgtEl>
+                                          <p:spTgt spid="40"/>
+                                        </p:tgtEl>
+                                        <p:attrNameLst>
+                                          <p:attrName>style.visibility</p:attrName>
+                                        </p:attrNameLst>
+                                      </p:cBhvr>
+                                      <p:to>
+                                        <p:strVal val="visible"/>
+                                      </p:to>
+                                    </p:set>
+                                    <p:animEffect transition="in" filter="fade">
+                                      <p:cBhvr>
+                                        <p:cTn id="291" dur="500"/>
+                                        <p:tgtEl>
+                                          <p:spTgt spid="40"/>
+                                        </p:tgtEl>
+                                      </p:cBhvr>
+                                    </p:animEffect>
+                                  </p:childTnLst>
+                                </p:cTn>
+                              </p:par>
+                              <p:par>
+                                <p:cTn id="295" presetID="10" presetClass="entr" presetSubtype="0" fill="hold" grpId="0" nodeType="withEffect">
+                                  <p:stCondLst>
+                                    <p:cond delay="4700"/>
+                                  </p:stCondLst>
+                                  <p:childTnLst>
+                                    <p:set>
+                                      <p:cBhvr>
+                                        <p:cTn id="293" dur="1" fill="hold">
+                                          <p:stCondLst>
+                                            <p:cond delay="0"/>
+                                          </p:stCondLst>
+                                        </p:cTn>
+                                        <p:tgtEl>
+                                          <p:spTgt spid="41"/>
+                                        </p:tgtEl>
+                                        <p:attrNameLst>
+                                          <p:attrName>style.visibility</p:attrName>
+                                        </p:attrNameLst>
+                                      </p:cBhvr>
+                                      <p:to>
+                                        <p:strVal val="visible"/>
+                                      </p:to>
+                                    </p:set>
+                                    <p:animEffect transition="in" filter="fade">
+                                      <p:cBhvr>
+                                        <p:cTn id="294" dur="500"/>
+                                        <p:tgtEl>
+                                          <p:spTgt spid="41"/>
+                                        </p:tgtEl>
+                                      </p:cBhvr>
+                                    </p:animEffect>
+                                  </p:childTnLst>
+                                </p:cTn>
+                              </p:par>
+                              <p:par>
+                                <p:cTn id="298" presetID="10" presetClass="entr" presetSubtype="0" fill="hold" grpId="0" nodeType="withEffect">
+                                  <p:stCondLst>
+                                    <p:cond delay="3500"/>
+                                  </p:stCondLst>
+                                  <p:childTnLst>
+                                    <p:set>
+                                      <p:cBhvr>
+                                        <p:cTn id="296" dur="1" fill="hold">
+                                          <p:stCondLst>
+                                            <p:cond delay="0"/>
+                                          </p:stCondLst>
+                                        </p:cTn>
+                                        <p:tgtEl>
+                                          <p:spTgt spid="71"/>
+                                        </p:tgtEl>
+                                        <p:attrNameLst>
+                                          <p:attrName>style.visibility</p:attrName>
+                                        </p:attrNameLst>
+                                      </p:cBhvr>
+                                      <p:to>
+                                        <p:strVal val="visible"/>
+                                      </p:to>
+                                    </p:set>
+                                    <p:animEffect transition="in" filter="fade">
+                                      <p:cBhvr>
+                                        <p:cTn id="297" dur="500"/>
+                                        <p:tgtEl>
+                                          <p:spTgt spid="71"/>
+                                        </p:tgtEl>
+                                      </p:cBhvr>
+                                    </p:animEffect>
+                                  </p:childTnLst>
+                                </p:cTn>
+                              </p:par>
+                            </p:childTnLst>
+                          </p:cTn>
+                        </p:par>
+                        <p:par>
+                          <p:cTn id="299" fill="hold">
+                            <p:stCondLst>
+                              <p:cond delay="57400"/>
+                            </p:stCondLst>
+                            <p:childTnLst>
+                              <p:par>
+                                <p:cTn id="302" presetID="10" presetClass="exit" presetSubtype="0" fill="hold" grpId="0" nodeType="afterEffect">
                                   <p:stCondLst>
                                     <p:cond delay="4500"/>
                                   </p:stCondLst>
                                   <p:childTnLst>
                                     <p:animEffect transition="out" filter="fade">
                                       <p:cBhvr>
-                                        <p:cTn id="226" dur="300"/>
-                                        <p:tgtEl>
-                                          <p:spTgt spid="45"/>
-                                        </p:tgtEl>
-                                      </p:cBhvr>
-                                    </p:animEffect>
-                                    <p:set>
-                                      <p:cBhvr>
-                                        <p:cTn id="227" dur="1" fill="hold">
+                                        <p:cTn id="300" dur="300"/>
+                                        <p:tgtEl>
+                                          <p:spTgt spid="71"/>
+                                        </p:tgtEl>
+                                      </p:cBhvr>
+                                    </p:animEffect>
+                                    <p:set>
+                                      <p:cBhvr>
+                                        <p:cTn id="301" dur="1" fill="hold">
                                           <p:stCondLst>
                                             <p:cond delay="299"/>
                                           </p:stCondLst>
                                         </p:cTn>
                                         <p:tgtEl>
-                                          <p:spTgt spid="45"/>
+                                          <p:spTgt spid="71"/>
                                         </p:tgtEl>
                                         <p:attrNameLst>
                                           <p:attrName>style.visibility</p:attrName>
@@ -5852,28 +7167,28 @@
                                 </p:cTn>
                               </p:par>
                               <p:par>
-                                <p:cTn id="231" presetID="10" presetClass="exit" presetSubtype="0" fill="hold" grpId="0" nodeType="withEffect">
+                                <p:cTn id="305" presetID="10" presetClass="exit" presetSubtype="0" fill="hold" grpId="0" nodeType="withEffect">
                                   <p:stCondLst>
                                     <p:cond delay="4500"/>
                                   </p:stCondLst>
                                   <p:childTnLst>
                                     <p:animEffect transition="out" filter="fade">
                                       <p:cBhvr>
-                                        <p:cTn id="229" dur="300"/>
-                                        <p:tgtEl>
-                                          <p:spTgt spid="30"/>
-                                        </p:tgtEl>
-                                      </p:cBhvr>
-                                    </p:animEffect>
-                                    <p:set>
-                                      <p:cBhvr>
-                                        <p:cTn id="230" dur="1" fill="hold">
+                                        <p:cTn id="303" dur="300"/>
+                                        <p:tgtEl>
+                                          <p:spTgt spid="58"/>
+                                        </p:tgtEl>
+                                      </p:cBhvr>
+                                    </p:animEffect>
+                                    <p:set>
+                                      <p:cBhvr>
+                                        <p:cTn id="304" dur="1" fill="hold">
                                           <p:stCondLst>
                                             <p:cond delay="299"/>
                                           </p:stCondLst>
                                         </p:cTn>
                                         <p:tgtEl>
-                                          <p:spTgt spid="30"/>
+                                          <p:spTgt spid="58"/>
                                         </p:tgtEl>
                                         <p:attrNameLst>
                                           <p:attrName>style.visibility</p:attrName>
@@ -5887,20 +7202,55 @@
                                 </p:cTn>
                               </p:par>
                               <p:par>
-                                <p:cTn id="234" presetID="10" presetClass="entr" presetSubtype="0" fill="hold" grpId="0" nodeType="withEffect">
+                                <p:cTn id="308" presetID="10" presetClass="exit" presetSubtype="0" fill="hold" grpId="0" nodeType="withEffect">
+                                  <p:stCondLst>
+                                    <p:cond delay="4500"/>
+                                  </p:stCondLst>
+                                  <p:childTnLst>
+                                    <p:animEffect transition="out" filter="fade">
+                                      <p:cBhvr>
+                                        <p:cTn id="306" dur="300"/>
+                                        <p:tgtEl>
+                                          <p:spTgt spid="38"/>
+                                        </p:tgtEl>
+                                      </p:cBhvr>
+                                    </p:animEffect>
+                                    <p:set>
+                                      <p:cBhvr>
+                                        <p:cTn id="307" dur="1" fill="hold">
+                                          <p:stCondLst>
+                                            <p:cond delay="299"/>
+                                          </p:stCondLst>
+                                        </p:cTn>
+                                        <p:tgtEl>
+                                          <p:spTgt spid="38"/>
+                                        </p:tgtEl>
+                                        <p:attrNameLst>
+                                          <p:attrName>style.visibility</p:attrName>
+                                        </p:attrNameLst>
+                                      </p:cBhvr>
+                                      <p:to>
+                                        <p:strVal val="hidden"/>
+                                      </p:to>
+                                    </p:set>
+                                  </p:childTnLst>
+                                </p:cTn>
+                              </p:par>
+                              <p:par>
+                                <p:cTn id="311" presetID="10" presetClass="entr" presetSubtype="0" fill="hold" grpId="0" nodeType="withEffect">
                                   <p:stCondLst>
                                     <p:cond delay="4900"/>
                                   </p:stCondLst>
                                   <p:childTnLst>
                                     <p:set>
                                       <p:cBhvr>
-                                        <p:cTn id="232" dur="1" fill="hold">
+                                        <p:cTn id="309" dur="1" fill="hold">
                                           <p:stCondLst>
                                             <p:cond delay="0"/>
                                           </p:stCondLst>
                                         </p:cTn>
                                         <p:tgtEl>
-                                          <p:spTgt spid="57"/>
+                                          <p:spTgt spid="72"/>
                                         </p:tgtEl>
                                         <p:attrNameLst>
                                           <p:attrName>style.visibility</p:attrName>
@@ -5912,9 +7262,9 @@
                                     </p:set>
                                     <p:animEffect transition="in" filter="fade">
                                       <p:cBhvr>
-                                        <p:cTn id="233" dur="500"/>
-                                        <p:tgtEl>
-                                          <p:spTgt spid="57"/>
+                                        <p:cTn id="310" dur="500"/>
+                                        <p:tgtEl>
+                                          <p:spTgt spid="72"/>
                                         </p:tgtEl>
                                       </p:cBhvr>
                                     </p:animEffect>
@@ -5950,45 +7300,50 @@
     </p:tnLst>
     <p:bldLst>
       <p:bldP spid="9" grpId="0" animBg="1"/>
+      <p:bldP spid="13" grpId="0" animBg="1"/>
       <p:bldP spid="11" grpId="0" animBg="1"/>
-      <p:bldP spid="10" grpId="0" animBg="1"/>
-      <p:bldP spid="46" grpId="0"/>
-      <p:bldP spid="34" grpId="0"/>
-      <p:bldP spid="47" grpId="0"/>
+      <p:bldP spid="59" grpId="0"/>
+      <p:bldP spid="44" grpId="0"/>
+      <p:bldP spid="60" grpId="0"/>
+      <p:bldP spid="19" grpId="0" animBg="1"/>
+      <p:bldP spid="21" grpId="0" animBg="1"/>
+      <p:bldP spid="61" grpId="0"/>
+      <p:bldP spid="23" grpId="0" animBg="1"/>
+      <p:bldP spid="25" grpId="0" animBg="1"/>
+      <p:bldP spid="27" grpId="0" animBg="1"/>
+      <p:bldP spid="62" grpId="0"/>
+      <p:bldP spid="28" grpId="0"/>
+      <p:bldP spid="29" grpId="0" animBg="1"/>
+      <p:bldP spid="30" grpId="0" animBg="1"/>
+      <p:bldP spid="31" grpId="0" animBg="1"/>
+      <p:bldP spid="32" grpId="0" animBg="1"/>
+      <p:bldP spid="63" grpId="0"/>
+      <p:bldP spid="33" grpId="0" animBg="1"/>
+      <p:bldP spid="34" grpId="0" animBg="1"/>
+      <p:bldP spid="35" grpId="0" animBg="1"/>
+      <p:bldP spid="64" grpId="0"/>
+      <p:bldP spid="56" grpId="0"/>
+      <p:bldP spid="37" grpId="0" animBg="1"/>
+      <p:bldP spid="65" grpId="0"/>
+      <p:bldP spid="57" grpId="0"/>
+      <p:bldP spid="36" grpId="0" animBg="1"/>
+      <p:bldP spid="66" grpId="0"/>
       <p:bldP spid="15" grpId="0" animBg="1"/>
-      <p:bldP spid="16" grpId="0" animBg="1"/>
-      <p:bldP spid="48" grpId="0"/>
       <p:bldP spid="17" grpId="0" animBg="1"/>
       <p:bldP spid="18" grpId="0" animBg="1"/>
-      <p:bldP spid="19" grpId="0" animBg="1"/>
-      <p:bldP spid="49" grpId="0"/>
-      <p:bldP spid="20" grpId="0"/>
-      <p:bldP spid="21" grpId="0" animBg="1"/>
+      <p:bldP spid="67" grpId="0"/>
+      <p:bldP spid="12" grpId="0" animBg="1"/>
+      <p:bldP spid="68" grpId="0"/>
       <p:bldP spid="22" grpId="0" animBg="1"/>
-      <p:bldP spid="23" grpId="0" animBg="1"/>
       <p:bldP spid="24" grpId="0" animBg="1"/>
-      <p:bldP spid="50" grpId="0"/>
-      <p:bldP spid="25" grpId="0" animBg="1"/>
-      <p:bldP spid="26" grpId="0" animBg="1"/>
-      <p:bldP spid="27" grpId="0" animBg="1"/>
-      <p:bldP spid="51" grpId="0"/>
-      <p:bldP spid="43" grpId="0"/>
-      <p:bldP spid="29" grpId="0" animBg="1"/>
-      <p:bldP spid="52" grpId="0"/>
-      <p:bldP spid="44" grpId="0"/>
-      <p:bldP spid="28" grpId="0" animBg="1"/>
-      <p:bldP spid="53" grpId="0"/>
-      <p:bldP spid="12" grpId="0" animBg="1"/>
-      <p:bldP spid="13" grpId="0" animBg="1"/>
-      <p:bldP spid="14" grpId="0" animBg="1"/>
-      <p:bldP spid="54" grpId="0"/>
-      <p:bldP spid="45" grpId="0"/>
-      <p:bldP spid="30" grpId="0" animBg="1"/>
-      <p:bldP spid="55" grpId="0"/>
-      <p:bldP spid="31" grpId="0" animBg="1"/>
-      <p:bldP spid="32" grpId="0" animBg="1"/>
-      <p:bldP spid="56" grpId="0"/>
-      <p:bldP spid="57" grpId="0"/>
+      <p:bldP spid="69" grpId="0"/>
+      <p:bldP spid="58" grpId="0"/>
+      <p:bldP spid="38" grpId="0" animBg="1"/>
+      <p:bldP spid="70" grpId="0"/>
+      <p:bldP spid="39" grpId="0" animBg="1"/>
+      <p:bldP spid="41" grpId="0" animBg="1"/>
+      <p:bldP spid="71" grpId="0"/>
+      <p:bldP spid="72" grpId="0"/>
     </p:bldLst>
   </p:timing>
 </p:sld>
